--- a/presentations/hr-driven-identity-interview/HR_Driven_Identity_AnyAgency.pptx
+++ b/presentations/hr-driven-identity-interview/HR_Driven_Identity_AnyAgency.pptx
@@ -122,7 +122,7 @@
   <p:extLst>
     <p:ext uri="{521415D9-36F7-43E2-AB2F-B90AF26B5E84}">
       <p14:sectionLst xmlns:p14="http://schemas.microsoft.com/office/powerpoint/2010/main">
-        <p14:section name="Thesis" id="{fa008d68-4be7-9589-394b-007ff1a2a0de}">
+        <p14:section name="Thesis" id="{0b715bc0-98aa-193d-782b-d042dc88f4ed}">
           <p14:sldIdLst>
             <p14:sldId id="256"/>
             <p14:sldId id="257"/>
@@ -131,7 +131,7 @@
             <p14:sldId id="260"/>
           </p14:sldIdLst>
         </p14:section>
-        <p14:section name="The data" id="{085f156c-5277-aa98-c05d-11ff2d71b5a3}">
+        <p14:section name="The data" id="{64b8220b-93a9-72ec-60cd-17b41d252d89}">
           <p14:sldIdLst>
             <p14:sldId id="261"/>
             <p14:sldId id="262"/>
@@ -139,21 +139,21 @@
             <p14:sldId id="264"/>
           </p14:sldIdLst>
         </p14:section>
-        <p14:section name="Identity and ICAM" id="{1fd31d1e-5166-f6d8-dc0c-198dc8f60bc9}">
+        <p14:section name="Identity and ICAM" id="{7f6c2bb3-a34d-a968-d664-85822baad2fe}">
           <p14:sldIdLst>
             <p14:sldId id="265"/>
             <p14:sldId id="266"/>
             <p14:sldId id="267"/>
           </p14:sldIdLst>
         </p14:section>
-        <p14:section name="Delivery" id="{17b588a0-fc63-c19e-502e-a2e50f6774af}">
+        <p14:section name="Delivery" id="{81048cee-169c-705a-7003-91d04e251d5a}">
           <p14:sldIdLst>
             <p14:sldId id="268"/>
             <p14:sldId id="269"/>
             <p14:sldId id="270"/>
           </p14:sldIdLst>
         </p14:section>
-        <p14:section name="Beyond" id="{e888da30-500b-0ed5-092d-65bd2c248aac}">
+        <p14:section name="Beyond" id="{2b41fc3b-001d-ab77-41c3-6b6b0e965b36}">
           <p14:sldIdLst>
             <p14:sldId id="271"/>
           </p14:sldIdLst>
@@ -564,8 +564,8 @@
               <a:rPr lang="en-US" dirty="0"/>
               <a:t>[0:00–0:55]  Good morning, and thank you.
 I want to make one proposal.
-In many agencies today there is no HR-driven identity. Accounts in Active Directory and Entra ID, and the access and credentials that hang off them, come from tickets and manual process.
-Two changes are coming regardless: Federal HR 2.0 moves each agency's HR onto Oracle Core HCM in waves through 2027, and agency identity is moving from Active Directory toward Entra ID. My proposal is to use the two together to start HR-driven identity — HR, through OPM's standard personnel data, as the source of authority for Entra ID, Active Directory and the rest of ICAM. That's Microsoft's own term: HR-driven provisioning.
+Based on current visibility, many agencies do not operate a comprehensive enterprise HR-driven identity lifecycle. In the processes I have observed, many workforce identity changes in Active Directory and Entra ID, and the access and credentials that hang off them, remain dependent on tickets or manual coordination.
+Two changes are coming regardless: Federal HR 2.0 moves each agency's HR onto Oracle Core HCM in waves, and current planning assumes onboarding through 2027; agency identity is moving from Active Directory toward Entra ID. My proposal is to use the two together to start HR-driven identity — HR, through OPM's standard personnel data, as the source of authority for Entra ID, Active Directory and the rest of ICAM. That's Microsoft's own term: HR-driven provisioning.
 Workbook: HR-Driven Identity, Chapter 00 — Overview and Applicability: The proposal; Why now; Why together.</a:t>
             </a:r>
             <a:endParaRPr lang="en-US" dirty="0"/>
@@ -1208,8 +1208,9 @@
             <a:r>
               <a:rPr lang="en-US" dirty="0"/>
               <a:t>[Leave up during questions — about 20 seconds]
-HR-driven identity is one piece of a larger set of modernizations I've designed over the last several years: the AD to Entra ID migration, next-generation DNS and IP address management, field office WAN and data-center consolidation, the TIC 3.0 branch edge, the client-server to hybrid cloud path, SQL Server identity, the move from Group Policy to Intune and Azure Arc, and continuous compliance against SCuBA, BOD 25-01 and FedRAMP 20x.
+HR-driven identity is one piece of a larger set of modernizations I've designed over the last several years: Entra ID migration, next-generation DNS and IP address management, field office WAN and data-center consolidation, the TIC 3.0 Cloud and Branch Office cases, the client-server to hybrid cloud path, SQL Server identity, the move from Group Policy to Intune and Azure Arc, and continuous compliance against SCuBA, BOD 25-01 and FedRAMP 20x.
 They share the same data discipline you just saw: a named authority for every fact, a governed model, and evidence produced by operation. I'm happy to go into any of them.
+Two companion decks go deeper on this one: the Contractor Identity Source deck, on who is authoritative for a contractor, and the original HR-Driven Identity deck, with the full model, lifecycle and plan.
 Workbook: HR-Driven Identity, the same site's Whitepapers, Next-Generation DDI, Client-Server to Hybrid Cloud and Operational Guides sections.</a:t>
             </a:r>
             <a:endParaRPr lang="en-US" dirty="0"/>
@@ -1299,7 +1300,7 @@
             <a:r>
               <a:rPr lang="en-US" dirty="0"/>
               <a:t>[0:55–1:48]  The thesis in one slide.
-On the left, two migrations that happen regardless: HR moves to Core HCM, and identity moves from Active Directory toward Entra ID. Meanwhile nothing connects HR to identity today — accounts come from tickets.
+On the left, two migrations that happen regardless: HR moves to Core HCM, and identity moves from Active Directory toward Entra ID. Meanwhile, the enterprise lifecycle remains substantially manual and fragmented.
 In the middle, what OPM leaves to us. OPM fixes the HR side; how the agency's directories and ICAM consume that data is the agency's decision. And the solicitation requires SCIM 2.0 provisioning — exactly what Entra ID consumes.
 On the right, the proposal: start HR-driven identity, with HR as the source of authority, expressed in OPM's standard attributes.
 So the real choice is: carry ticket-driven identity through both migrations, or start HR-driven identity once, while both platforms are being rebuilt anyway.
@@ -1393,7 +1394,7 @@
               <a:rPr lang="en-US" dirty="0"/>
               <a:t>[1:48–3:09]  Why we need HR-driven ICAM at all — and why now.
 Zero Trust is federal strategy — OMB M-22-09, with NIST SP 800-207 as the architecture and CISA's maturity model as the yardstick. SASE is how it's delivered: security enforced at a cloud edge close to the user, which TIC 3.0 opens up for agencies, instead of at our network perimeter. And SASE's decisions are driven by ICAM: the user presents a token from a PIV card or phishing-resistant MFA, and Entra ID decides access through Conditional Access and dynamic groups that read the user's attributes.
-In the perimeter era, a wrong department meant a wrong phone-book entry. Now it means the wrong groups, and so the wrong access — and a stale status is worse than ever. In the perimeter era an orphaned account was already a standing security violation that could enable a breach. Now it's a valid token for someone who has left, usable from anywhere, because there is no perimeter left to stop it. When access is decided by attributes, the accuracy of employee data is the accuracy of access.
+In the perimeter era, a wrong department meant a wrong phone-book entry. Now it means the wrong groups, and so the wrong access — and a stale status is worse than ever. In the perimeter era an orphaned account was already a standing security violation that could enable a breach. Now it's a valid token for someone who has left, usable from anywhere, because there is no perimeter left to stop it. When access decisions depend on attributes, the accuracy of employee data drives the accuracy of access.
 Workbook: HR-Driven Identity, Chapter 01 — Why the agency needs HR-driven ICAM now; Chapter 08 — The derivation chain.</a:t>
             </a:r>
             <a:endParaRPr lang="en-US" dirty="0"/>
@@ -1575,7 +1576,7 @@
             <a:r>
               <a:rPr lang="en-US" dirty="0"/>
               <a:t>[4:11–5:18]  The window.
-The December 10, 2025 OMB/OPM memo directs one government-wide Core HCM platform. Oracle Fusion Cloud HCM was awarded June 11, 2026. First go-lives are January to March 2027. Wave 2 agencies follow in fiscal 2027. For an agency not yet on the platform, that's the point: about eight months of onboarding, with interconnections live around month five, still lie ahead. By fiscal 2028 EHRI and eOPF are decommissioned.
+The December 10, 2025 OMB/OPM memo directs one government-wide Core HCM platform. Oracle Fusion Cloud HCM was awarded June 11, 2026. First go-lives are January to March 2027. Current planning, based on published Federal HR 2.0 material, has Wave 2 agencies following in fiscal 2027; agency-specific milestones are confirmed with the program office. Program material describes interconnections occurring during the onboarding period, and for an agency not yet on the platform, that onboarding still lies ahead. By fiscal 2028 EHRI and eOPF are decommissioned.
 I'd describe that not as a deadline but as a window. Inside it, the data standards, the cleanup, the interconnection design — and, on our side, the Entra ID migration plan — are all being decided, and an HR-driven identity feed can be written into them. After it closes, both migrations finish with ticket-driven identity carried forward, and adding HR-driven identity later means reopening both.
 (Verify the agency's onboarding dates before presenting.)
 Workbook: HR-Driven Identity, Chapter 02 — The program facts; Why this is the opportunity, not the project.</a:t>
@@ -1669,7 +1670,7 @@
               <a:t>[5:18–6:49]  This is the heart of the proposal, and it's the programmatic data knowledge.
 OPM already defines the personnel data every agency records. Agency and subelement give the legal employer and component. Duty station is the location of record. Series, pay plan and grade give a position category for role-based access. Supervisory status tells us who can approve and review. Tenure and appointment type drive the worker type. And the nature-of-action code, with its effective date, tells us what just happened — next slide.
 Why build on OPM's standard rather than on Oracle's field names? Because OPM defines these elements and their codes the same way for every agency. We map them to Entra ID and AD once, for every employee population — and if the HR vendor ever changes, the mapping still holds.
-One honest limit: HRIT covers federal employees only. Contractors and vendors live in COR spreadsheets today. My best bet is Core HCM's Contingent Worker type — a person record, an assignment and a lifecycle much like an employee's, though it has no vendor-management layer. The alternative is to source them from PIV sponsorship. That's a decision to put in front of the program early.
+One honest limit: HRIT covers federal employees only. In the processes I have observed, contractors and vendors are tracked in COR spreadsheets. A contractor authority decision is required, and I propose evaluating three candidate sources: Core HCM's Contingent Worker type — a person record, an assignment and a lifecycle much like an employee's, though with no vendor-management layer; PIV sponsorship; and a contractor suitability register, which ties each contractor to an agency contract with a suitability decision. That's a decision to put in front of the program early.
 (Confirm element names against OPM's current data standards.)
 Workbook: HR-Driven Identity, Chapter 05 — The standard-attribute layer; Contractors and vendors.</a:t>
             </a:r>
@@ -1760,9 +1761,9 @@
             <a:r>
               <a:rPr lang="en-US" dirty="0"/>
               <a:t>[6:49–7:43]  Personnel actions drive the lifecycle.
-For federal employees, every personnel action carries a nature-of-action code, and the families map cleanly to identity events: the 100 series are joiners, the 700 series movers, the 500 series conversions, the 300 series separations. Contractors have no SF-50; their events come from contract start and end dates.
+For federal employees, every personnel action carries a nature-of-action code, and I propose mapping the families to identity events: the 100 series are joiners, the 700 series movers, the 500 series conversions, the 300 series separations. Contractors have no SF-50; their events come from contract start and end dates.
 Two families matter more than people expect. The 400 series — furlough, leave without pay, suspension — is not a leaver; the person is still employed and policy restricts the account. The 200 series, return to duty, lifts those restrictions. Getting this wrong either locks out people on leave or leaves access open for people who've left.
-The codes also settle precedence — a separation wins — and rescinded offers.
+The codes also settle precedence — a separation wins — and rescinded offers. HR, security, labor-relations, privacy, and personnel-policy owners would validate the mappings, exceptions, precedence rules, and actions before automation.
 Workbook: HR-Driven Identity, Chapter 06 — Personnel actions are the triggers; Appendix A — Lifecycle Rules.</a:t>
             </a:r>
             <a:endParaRPr lang="en-US" dirty="0"/>
@@ -1853,7 +1854,7 @@
               <a:rPr lang="en-US" dirty="0"/>
               <a:t>[7:43–8:48]  Identifiers are where data architecture earns its keep.
 A common design says the employee ID is the person, for life. It breaks the moment the source changes, a contractor converts, or someone is rehired. So I model identifiers in layers: an enterprise person key the agency controls; a source key per HR system; an affiliation key per employment or contract; a directory ID per account; and credential identifiers per PIV or certificate.
-The person is the tracked entity, not the account. That's what survives rehire, conversion and reorganization. And many agencies already have one — for example, a Mainframe PIN that already serves as the person ID and employee ID. Then the decision is to confirm it as the enterprise key and map Core HCM's PersonNumber to it — so when the agency moves to Core HCM, only the source key changes, and nothing downstream has to.
+The person is the tracked entity, not the account. That's what survives rehire, conversion and reorganization. And many agencies already have a strong candidate — for example, a Mainframe PIN that already serves as the person ID and employee ID. I propose it for confirmation as the enterprise person key; adoption requires validating its uniqueness, persistence, non-reassignment, population coverage, privacy constraints and historical behavior. Once it's confirmed, map Core HCM's PersonNumber to it — so when the agency moves to Core HCM, only the source key changes, and nothing downstream has to.
 Workbook: HR-Driven Identity, Chapter 03 — One person, layered identifiers.</a:t>
             </a:r>
             <a:endParaRPr lang="en-US" dirty="0"/>
@@ -4645,7 +4646,7 @@
       </p:sp>
       <p:pic>
         <p:nvPicPr>
-          <p:cNvPr id="5" name="Image 0" descr="C:\Users\whale\AppData\Local\Temp\claude\C--Users-whale-git-uiao-inbox\cbd5b766-acc0-4006-9202-a9bb6b23e97b\scratchpad\deck\icons\FaIdCard.png">    </p:cNvPr>
+          <p:cNvPr id="5" name="Image 0" descr="C:\Users\whale\git\uiao\inbox\SSA-Interview\build\icons\FaIdCard.png">    </p:cNvPr>
           <p:cNvPicPr>
             <a:picLocks noChangeAspect="1"/>
           </p:cNvPicPr>
@@ -4843,7 +4844,7 @@
       </p:sp>
       <p:pic>
         <p:nvPicPr>
-          <p:cNvPr id="10" name="Image 1" descr="C:\Users\whale\AppData\Local\Temp\claude\C--Users-whale-git-uiao-inbox\cbd5b766-acc0-4006-9202-a9bb6b23e97b\scratchpad\deck\icons\FaFingerprint.png">    </p:cNvPr>
+          <p:cNvPr id="10" name="Image 1" descr="C:\Users\whale\git\uiao\inbox\SSA-Interview\build\icons\FaFingerprint.png">    </p:cNvPr>
           <p:cNvPicPr>
             <a:picLocks noChangeAspect="1"/>
           </p:cNvPicPr>
@@ -5041,7 +5042,7 @@
       </p:sp>
       <p:pic>
         <p:nvPicPr>
-          <p:cNvPr id="15" name="Image 2" descr="C:\Users\whale\AppData\Local\Temp\claude\C--Users-whale-git-uiao-inbox\cbd5b766-acc0-4006-9202-a9bb6b23e97b\scratchpad\deck\icons\FaKey.png">    </p:cNvPr>
+          <p:cNvPr id="15" name="Image 2" descr="C:\Users\whale\git\uiao\inbox\SSA-Interview\build\icons\FaKey.png">    </p:cNvPr>
           <p:cNvPicPr>
             <a:picLocks noChangeAspect="1"/>
           </p:cNvPicPr>
@@ -5431,7 +5432,7 @@
       </p:sp>
       <p:pic>
         <p:nvPicPr>
-          <p:cNvPr id="5" name="Image 0" descr="C:\Users\whale\AppData\Local\Temp\claude\C--Users-whale-git-uiao-inbox\cbd5b766-acc0-4006-9202-a9bb6b23e97b\scratchpad\deck\icons\FaScaleBalanced.png">    </p:cNvPr>
+          <p:cNvPr id="5" name="Image 0" descr="C:\Users\whale\git\uiao\inbox\SSA-Interview\build\icons\FaScaleBalanced.png">    </p:cNvPr>
           <p:cNvPicPr>
             <a:picLocks noChangeAspect="1"/>
           </p:cNvPicPr>
@@ -5573,7 +5574,7 @@
       </p:sp>
       <p:pic>
         <p:nvPicPr>
-          <p:cNvPr id="9" name="Image 1" descr="C:\Users\whale\AppData\Local\Temp\claude\C--Users-whale-git-uiao-inbox\cbd5b766-acc0-4006-9202-a9bb6b23e97b\scratchpad\deck\icons\FaFilter.png">    </p:cNvPr>
+          <p:cNvPr id="9" name="Image 1" descr="C:\Users\whale\git\uiao\inbox\SSA-Interview\build\icons\FaFilter.png">    </p:cNvPr>
           <p:cNvPicPr>
             <a:picLocks noChangeAspect="1"/>
           </p:cNvPicPr>
@@ -5715,7 +5716,7 @@
       </p:sp>
       <p:pic>
         <p:nvPicPr>
-          <p:cNvPr id="13" name="Image 2" descr="C:\Users\whale\AppData\Local\Temp\claude\C--Users-whale-git-uiao-inbox\cbd5b766-acc0-4006-9202-a9bb6b23e97b\scratchpad\deck\icons\FaFileShield.png">    </p:cNvPr>
+          <p:cNvPr id="13" name="Image 2" descr="C:\Users\whale\git\uiao\inbox\SSA-Interview\build\icons\FaFileShield.png">    </p:cNvPr>
           <p:cNvPicPr>
             <a:picLocks noChangeAspect="1"/>
           </p:cNvPicPr>
@@ -5857,7 +5858,7 @@
       </p:sp>
       <p:pic>
         <p:nvPicPr>
-          <p:cNvPr id="17" name="Image 3" descr="C:\Users\whale\AppData\Local\Temp\claude\C--Users-whale-git-uiao-inbox\cbd5b766-acc0-4006-9202-a9bb6b23e97b\scratchpad\deck\icons\FaLock.png">    </p:cNvPr>
+          <p:cNvPr id="17" name="Image 3" descr="C:\Users\whale\git\uiao\inbox\SSA-Interview\build\icons\FaLock.png">    </p:cNvPr>
           <p:cNvPicPr>
             <a:picLocks noChangeAspect="1"/>
           </p:cNvPicPr>
@@ -6191,7 +6192,7 @@
       </p:sp>
       <p:pic>
         <p:nvPicPr>
-          <p:cNvPr id="5" name="Image 0" descr="C:\Users\whale\AppData\Local\Temp\claude\C--Users-whale-git-uiao-inbox\cbd5b766-acc0-4006-9202-a9bb6b23e97b\scratchpad\deck\icons\FaSitemap.png">    </p:cNvPr>
+          <p:cNvPr id="5" name="Image 0" descr="C:\Users\whale\git\uiao\inbox\SSA-Interview\build\icons\FaSitemap.png">    </p:cNvPr>
           <p:cNvPicPr>
             <a:picLocks noChangeAspect="1"/>
           </p:cNvPicPr>
@@ -6330,7 +6331,7 @@
       </p:sp>
       <p:pic>
         <p:nvPicPr>
-          <p:cNvPr id="9" name="Image 1" descr="C:\Users\whale\AppData\Local\Temp\claude\C--Users-whale-git-uiao-inbox\cbd5b766-acc0-4006-9202-a9bb6b23e97b\scratchpad\deck\icons\FaUserShield.png">    </p:cNvPr>
+          <p:cNvPr id="9" name="Image 1" descr="C:\Users\whale\git\uiao\inbox\SSA-Interview\build\icons\FaUserShield.png">    </p:cNvPr>
           <p:cNvPicPr>
             <a:picLocks noChangeAspect="1"/>
           </p:cNvPicPr>
@@ -6469,7 +6470,7 @@
       </p:sp>
       <p:pic>
         <p:nvPicPr>
-          <p:cNvPr id="13" name="Image 2" descr="C:\Users\whale\AppData\Local\Temp\claude\C--Users-whale-git-uiao-inbox\cbd5b766-acc0-4006-9202-a9bb6b23e97b\scratchpad\deck\icons\FaClipboardCheck.png">    </p:cNvPr>
+          <p:cNvPr id="13" name="Image 2" descr="C:\Users\whale\git\uiao\inbox\SSA-Interview\build\icons\FaClipboardCheck.png">    </p:cNvPr>
           <p:cNvPicPr>
             <a:picLocks noChangeAspect="1"/>
           </p:cNvPicPr>
@@ -6608,7 +6609,7 @@
       </p:sp>
       <p:pic>
         <p:nvPicPr>
-          <p:cNvPr id="17" name="Image 3" descr="C:\Users\whale\AppData\Local\Temp\claude\C--Users-whale-git-uiao-inbox\cbd5b766-acc0-4006-9202-a9bb6b23e97b\scratchpad\deck\icons\FaPlugCircleXmark.png">    </p:cNvPr>
+          <p:cNvPr id="17" name="Image 3" descr="C:\Users\whale\git\uiao\inbox\SSA-Interview\build\icons\FaPlugCircleXmark.png">    </p:cNvPr>
           <p:cNvPicPr>
             <a:picLocks noChangeAspect="1"/>
           </p:cNvPicPr>
@@ -6747,7 +6748,7 @@
       </p:sp>
       <p:pic>
         <p:nvPicPr>
-          <p:cNvPr id="21" name="Image 4" descr="C:\Users\whale\AppData\Local\Temp\claude\C--Users-whale-git-uiao-inbox\cbd5b766-acc0-4006-9202-a9bb6b23e97b\scratchpad\deck\icons\FaListCheck.png">    </p:cNvPr>
+          <p:cNvPr id="21" name="Image 4" descr="C:\Users\whale\git\uiao\inbox\SSA-Interview\build\icons\FaListCheck.png">    </p:cNvPr>
           <p:cNvPicPr>
             <a:picLocks noChangeAspect="1"/>
           </p:cNvPicPr>
@@ -6886,7 +6887,7 @@
       </p:sp>
       <p:pic>
         <p:nvPicPr>
-          <p:cNvPr id="25" name="Image 5" descr="C:\Users\whale\AppData\Local\Temp\claude\C--Users-whale-git-uiao-inbox\cbd5b766-acc0-4006-9202-a9bb6b23e97b\scratchpad\deck\icons\FaTriangleExclamation.png">    </p:cNvPr>
+          <p:cNvPr id="25" name="Image 5" descr="C:\Users\whale\git\uiao\inbox\SSA-Interview\build\icons\FaTriangleExclamation.png">    </p:cNvPr>
           <p:cNvPicPr>
             <a:picLocks noChangeAspect="1"/>
           </p:cNvPicPr>
@@ -7025,7 +7026,7 @@
       </p:sp>
       <p:pic>
         <p:nvPicPr>
-          <p:cNvPr id="29" name="Image 6" descr="C:\Users\whale\AppData\Local\Temp\claude\C--Users-whale-git-uiao-inbox\cbd5b766-acc0-4006-9202-a9bb6b23e97b\scratchpad\deck\icons\FaChartLine.png">    </p:cNvPr>
+          <p:cNvPr id="29" name="Image 6" descr="C:\Users\whale\git\uiao\inbox\SSA-Interview\build\icons\FaChartLine.png">    </p:cNvPr>
           <p:cNvPicPr>
             <a:picLocks noChangeAspect="1"/>
           </p:cNvPicPr>
@@ -7164,7 +7165,7 @@
       </p:sp>
       <p:pic>
         <p:nvPicPr>
-          <p:cNvPr id="33" name="Image 7" descr="C:\Users\whale\AppData\Local\Temp\claude\C--Users-whale-git-uiao-inbox\cbd5b766-acc0-4006-9202-a9bb6b23e97b\scratchpad\deck\icons\FaCodeBranch.png">    </p:cNvPr>
+          <p:cNvPr id="33" name="Image 7" descr="C:\Users\whale\git\uiao\inbox\SSA-Interview\build\icons\FaCodeBranch.png">    </p:cNvPr>
           <p:cNvPicPr>
             <a:picLocks noChangeAspect="1"/>
           </p:cNvPicPr>
@@ -7486,7 +7487,7 @@
       </p:sp>
       <p:pic>
         <p:nvPicPr>
-          <p:cNvPr id="6" name="Image 0" descr="C:\Users\whale\AppData\Local\Temp\claude\C--Users-whale-git-uiao-inbox\cbd5b766-acc0-4006-9202-a9bb6b23e97b\scratchpad\deck\icons\FaBuildingColumns.png">    </p:cNvPr>
+          <p:cNvPr id="6" name="Image 0" descr="C:\Users\whale\git\uiao\inbox\SSA-Interview\build\icons\FaBuildingColumns.png">    </p:cNvPr>
           <p:cNvPicPr>
             <a:picLocks noChangeAspect="1"/>
           </p:cNvPicPr>
@@ -7591,7 +7592,7 @@
       </p:sp>
       <p:pic>
         <p:nvPicPr>
-          <p:cNvPr id="9" name="Image 1" descr="C:\Users\whale\AppData\Local\Temp\claude\C--Users-whale-git-uiao-inbox\cbd5b766-acc0-4006-9202-a9bb6b23e97b\scratchpad\deck\icons\FaRightLeft.png">    </p:cNvPr>
+          <p:cNvPr id="9" name="Image 1" descr="C:\Users\whale\git\uiao\inbox\SSA-Interview\build\icons\FaRightLeft.png">    </p:cNvPr>
           <p:cNvPicPr>
             <a:picLocks noChangeAspect="1"/>
           </p:cNvPicPr>
@@ -7696,7 +7697,7 @@
       </p:sp>
       <p:pic>
         <p:nvPicPr>
-          <p:cNvPr id="12" name="Image 2" descr="C:\Users\whale\AppData\Local\Temp\claude\C--Users-whale-git-uiao-inbox\cbd5b766-acc0-4006-9202-a9bb6b23e97b\scratchpad\deck\icons\FaChartLine.png">    </p:cNvPr>
+          <p:cNvPr id="12" name="Image 2" descr="C:\Users\whale\git\uiao\inbox\SSA-Interview\build\icons\FaChartLine.png">    </p:cNvPr>
           <p:cNvPicPr>
             <a:picLocks noChangeAspect="1"/>
           </p:cNvPicPr>
@@ -7871,7 +7872,7 @@
       </p:sp>
       <p:pic>
         <p:nvPicPr>
-          <p:cNvPr id="17" name="Image 3" descr="C:\Users\whale\AppData\Local\Temp\claude\C--Users-whale-git-uiao-inbox\cbd5b766-acc0-4006-9202-a9bb6b23e97b\scratchpad\deck\icons\FaPeopleArrows.png">    </p:cNvPr>
+          <p:cNvPr id="17" name="Image 3" descr="C:\Users\whale\git\uiao\inbox\SSA-Interview\build\icons\FaPeopleArrows.png">    </p:cNvPr>
           <p:cNvPicPr>
             <a:picLocks noChangeAspect="1"/>
           </p:cNvPicPr>
@@ -7976,7 +7977,7 @@
       </p:sp>
       <p:pic>
         <p:nvPicPr>
-          <p:cNvPr id="20" name="Image 4" descr="C:\Users\whale\AppData\Local\Temp\claude\C--Users-whale-git-uiao-inbox\cbd5b766-acc0-4006-9202-a9bb6b23e97b\scratchpad\deck\icons\FaScaleBalanced.png">    </p:cNvPr>
+          <p:cNvPr id="20" name="Image 4" descr="C:\Users\whale\git\uiao\inbox\SSA-Interview\build\icons\FaScaleBalanced.png">    </p:cNvPr>
           <p:cNvPicPr>
             <a:picLocks noChangeAspect="1"/>
           </p:cNvPicPr>
@@ -8081,7 +8082,7 @@
       </p:sp>
       <p:pic>
         <p:nvPicPr>
-          <p:cNvPr id="23" name="Image 5" descr="C:\Users\whale\AppData\Local\Temp\claude\C--Users-whale-git-uiao-inbox\cbd5b766-acc0-4006-9202-a9bb6b23e97b\scratchpad\deck\icons\FaUsersGear.png">    </p:cNvPr>
+          <p:cNvPr id="23" name="Image 5" descr="C:\Users\whale\git\uiao\inbox\SSA-Interview\build\icons\FaUsersGear.png">    </p:cNvPr>
           <p:cNvPicPr>
             <a:picLocks noChangeAspect="1"/>
           </p:cNvPicPr>
@@ -9020,7 +9021,7 @@
       </p:sp>
       <p:pic>
         <p:nvPicPr>
-          <p:cNvPr id="21" name="Image 0" descr="C:\Users\whale\AppData\Local\Temp\claude\C--Users-whale-git-uiao-inbox\cbd5b766-acc0-4006-9202-a9bb6b23e97b\scratchpad\deck\icons\FaLightbulb.png">    </p:cNvPr>
+          <p:cNvPr id="21" name="Image 0" descr="C:\Users\whale\git\uiao\inbox\SSA-Interview\build\icons\FaLightbulb.png">    </p:cNvPr>
           <p:cNvPicPr>
             <a:picLocks noChangeAspect="1"/>
           </p:cNvPicPr>
@@ -9289,12 +9290,12 @@
         </p:nvSpPr>
         <p:spPr>
           <a:xfrm>
-            <a:off x="548640" y="1325880"/>
-            <a:ext cx="2670048" cy="1920240"/>
+            <a:off x="548640" y="1280160"/>
+            <a:ext cx="2670048" cy="1719072"/>
           </a:xfrm>
           <a:prstGeom prst="roundRect">
             <a:avLst>
-              <a:gd name="adj" fmla="val 3810"/>
+              <a:gd name="adj" fmla="val 4255"/>
             </a:avLst>
           </a:prstGeom>
           <a:solidFill>
@@ -9323,7 +9324,7 @@
         </p:nvSpPr>
         <p:spPr>
           <a:xfrm>
-            <a:off x="731520" y="1490472"/>
+            <a:off x="731520" y="1417320"/>
             <a:ext cx="457200" cy="457200"/>
           </a:xfrm>
           <a:prstGeom prst="ellipse">
@@ -9342,7 +9343,7 @@
       </p:sp>
       <p:pic>
         <p:nvPicPr>
-          <p:cNvPr id="5" name="Image 0" descr="C:\Users\whale\AppData\Local\Temp\claude\C--Users-whale-git-uiao-inbox\cbd5b766-acc0-4006-9202-a9bb6b23e97b\scratchpad\deck\icons\FaCloudArrowUp.png">    </p:cNvPr>
+          <p:cNvPr id="5" name="Image 0" descr="C:\Users\whale\git\uiao\inbox\SSA-Interview\build\icons\FaCloudArrowUp.png">    </p:cNvPr>
           <p:cNvPicPr>
             <a:picLocks noChangeAspect="1"/>
           </p:cNvPicPr>
@@ -9356,7 +9357,7 @@
         </p:blipFill>
         <p:spPr>
           <a:xfrm>
-            <a:off x="841248" y="1600200"/>
+            <a:off x="841248" y="1527048"/>
             <a:ext cx="237744" cy="237744"/>
           </a:xfrm>
           <a:prstGeom prst="rect">
@@ -9372,8 +9373,8 @@
         </p:nvSpPr>
         <p:spPr>
           <a:xfrm>
-            <a:off x="731520" y="2039112"/>
-            <a:ext cx="2377440" cy="1143000"/>
+            <a:off x="731520" y="1938528"/>
+            <a:ext cx="2377440" cy="1005840"/>
           </a:xfrm>
           <a:prstGeom prst="rect">
             <a:avLst/>
@@ -9397,7 +9398,7 @@
                   <a:srgbClr val="1F2A44"/>
                 </a:solidFill>
               </a:rPr>
-              <a:t>AD → Entra ID migration</a:t>
+              <a:t>Entra ID migration</a:t>
             </a:r>
             <a:endParaRPr lang="en-US" sz="1400" dirty="0"/>
           </a:p>
@@ -9428,12 +9429,12 @@
         </p:nvSpPr>
         <p:spPr>
           <a:xfrm>
-            <a:off x="3355848" y="1325880"/>
-            <a:ext cx="2670048" cy="1920240"/>
+            <a:off x="3355848" y="1280160"/>
+            <a:ext cx="2670048" cy="1719072"/>
           </a:xfrm>
           <a:prstGeom prst="roundRect">
             <a:avLst>
-              <a:gd name="adj" fmla="val 3810"/>
+              <a:gd name="adj" fmla="val 4255"/>
             </a:avLst>
           </a:prstGeom>
           <a:solidFill>
@@ -9462,7 +9463,7 @@
         </p:nvSpPr>
         <p:spPr>
           <a:xfrm>
-            <a:off x="3538728" y="1490472"/>
+            <a:off x="3538728" y="1417320"/>
             <a:ext cx="457200" cy="457200"/>
           </a:xfrm>
           <a:prstGeom prst="ellipse">
@@ -9481,7 +9482,7 @@
       </p:sp>
       <p:pic>
         <p:nvPicPr>
-          <p:cNvPr id="9" name="Image 1" descr="C:\Users\whale\AppData\Local\Temp\claude\C--Users-whale-git-uiao-inbox\cbd5b766-acc0-4006-9202-a9bb6b23e97b\scratchpad\deck\icons\FaGlobe.png">    </p:cNvPr>
+          <p:cNvPr id="9" name="Image 1" descr="C:\Users\whale\git\uiao\inbox\SSA-Interview\build\icons\FaGlobe.png">    </p:cNvPr>
           <p:cNvPicPr>
             <a:picLocks noChangeAspect="1"/>
           </p:cNvPicPr>
@@ -9495,7 +9496,7 @@
         </p:blipFill>
         <p:spPr>
           <a:xfrm>
-            <a:off x="3648456" y="1600200"/>
+            <a:off x="3648456" y="1527048"/>
             <a:ext cx="237744" cy="237744"/>
           </a:xfrm>
           <a:prstGeom prst="rect">
@@ -9511,8 +9512,8 @@
         </p:nvSpPr>
         <p:spPr>
           <a:xfrm>
-            <a:off x="3538728" y="2039112"/>
-            <a:ext cx="2377440" cy="1143000"/>
+            <a:off x="3538728" y="1938528"/>
+            <a:ext cx="2377440" cy="1005840"/>
           </a:xfrm>
           <a:prstGeom prst="rect">
             <a:avLst/>
@@ -9567,12 +9568,12 @@
         </p:nvSpPr>
         <p:spPr>
           <a:xfrm>
-            <a:off x="6163056" y="1325880"/>
-            <a:ext cx="2670048" cy="1920240"/>
+            <a:off x="6163056" y="1280160"/>
+            <a:ext cx="2670048" cy="1719072"/>
           </a:xfrm>
           <a:prstGeom prst="roundRect">
             <a:avLst>
-              <a:gd name="adj" fmla="val 3810"/>
+              <a:gd name="adj" fmla="val 4255"/>
             </a:avLst>
           </a:prstGeom>
           <a:solidFill>
@@ -9601,7 +9602,7 @@
         </p:nvSpPr>
         <p:spPr>
           <a:xfrm>
-            <a:off x="6345936" y="1490472"/>
+            <a:off x="6345936" y="1417320"/>
             <a:ext cx="457200" cy="457200"/>
           </a:xfrm>
           <a:prstGeom prst="ellipse">
@@ -9620,7 +9621,7 @@
       </p:sp>
       <p:pic>
         <p:nvPicPr>
-          <p:cNvPr id="13" name="Image 2" descr="C:\Users\whale\AppData\Local\Temp\claude\C--Users-whale-git-uiao-inbox\cbd5b766-acc0-4006-9202-a9bb6b23e97b\scratchpad\deck\icons\FaBuilding.png">    </p:cNvPr>
+          <p:cNvPr id="13" name="Image 2" descr="C:\Users\whale\git\uiao\inbox\SSA-Interview\build\icons\FaBuilding.png">    </p:cNvPr>
           <p:cNvPicPr>
             <a:picLocks noChangeAspect="1"/>
           </p:cNvPicPr>
@@ -9634,7 +9635,7 @@
         </p:blipFill>
         <p:spPr>
           <a:xfrm>
-            <a:off x="6455664" y="1600200"/>
+            <a:off x="6455664" y="1527048"/>
             <a:ext cx="237744" cy="237744"/>
           </a:xfrm>
           <a:prstGeom prst="rect">
@@ -9650,8 +9651,8 @@
         </p:nvSpPr>
         <p:spPr>
           <a:xfrm>
-            <a:off x="6345936" y="2039112"/>
-            <a:ext cx="2377440" cy="1143000"/>
+            <a:off x="6345936" y="1938528"/>
+            <a:ext cx="2377440" cy="1005840"/>
           </a:xfrm>
           <a:prstGeom prst="rect">
             <a:avLst/>
@@ -9706,12 +9707,12 @@
         </p:nvSpPr>
         <p:spPr>
           <a:xfrm>
-            <a:off x="8970264" y="1325880"/>
-            <a:ext cx="2670048" cy="1920240"/>
+            <a:off x="8970264" y="1280160"/>
+            <a:ext cx="2670048" cy="1719072"/>
           </a:xfrm>
           <a:prstGeom prst="roundRect">
             <a:avLst>
-              <a:gd name="adj" fmla="val 3810"/>
+              <a:gd name="adj" fmla="val 4255"/>
             </a:avLst>
           </a:prstGeom>
           <a:solidFill>
@@ -9740,7 +9741,7 @@
         </p:nvSpPr>
         <p:spPr>
           <a:xfrm>
-            <a:off x="9153144" y="1490472"/>
+            <a:off x="9153144" y="1417320"/>
             <a:ext cx="457200" cy="457200"/>
           </a:xfrm>
           <a:prstGeom prst="ellipse">
@@ -9759,7 +9760,7 @@
       </p:sp>
       <p:pic>
         <p:nvPicPr>
-          <p:cNvPr id="17" name="Image 3" descr="C:\Users\whale\AppData\Local\Temp\claude\C--Users-whale-git-uiao-inbox\cbd5b766-acc0-4006-9202-a9bb6b23e97b\scratchpad\deck\icons\FaRoute.png">    </p:cNvPr>
+          <p:cNvPr id="17" name="Image 3" descr="C:\Users\whale\git\uiao\inbox\SSA-Interview\build\icons\FaRoute.png">    </p:cNvPr>
           <p:cNvPicPr>
             <a:picLocks noChangeAspect="1"/>
           </p:cNvPicPr>
@@ -9773,7 +9774,7 @@
         </p:blipFill>
         <p:spPr>
           <a:xfrm>
-            <a:off x="9262872" y="1600200"/>
+            <a:off x="9262872" y="1527048"/>
             <a:ext cx="237744" cy="237744"/>
           </a:xfrm>
           <a:prstGeom prst="rect">
@@ -9789,8 +9790,8 @@
         </p:nvSpPr>
         <p:spPr>
           <a:xfrm>
-            <a:off x="9153144" y="2039112"/>
-            <a:ext cx="2377440" cy="1143000"/>
+            <a:off x="9153144" y="1938528"/>
+            <a:ext cx="2377440" cy="1005840"/>
           </a:xfrm>
           <a:prstGeom prst="rect">
             <a:avLst/>
@@ -9814,7 +9815,7 @@
                   <a:srgbClr val="1F2A44"/>
                 </a:solidFill>
               </a:rPr>
-              <a:t>TIC 3.0 branch edge</a:t>
+              <a:t>TIC 3.0 Cloud and Branch Office cases</a:t>
             </a:r>
             <a:endParaRPr lang="en-US" sz="1400" dirty="0"/>
           </a:p>
@@ -9831,7 +9832,7 @@
                   <a:schemeClr val="tx2"/>
                 </a:solidFill>
               </a:rPr>
-              <a:t>SD-WAN versus direct internet access</a:t>
+              <a:t>Trusted Internet Connections use cases</a:t>
             </a:r>
             <a:endParaRPr lang="en-US" sz="1400" dirty="0"/>
           </a:p>
@@ -9845,12 +9846,12 @@
         </p:nvSpPr>
         <p:spPr>
           <a:xfrm>
-            <a:off x="548640" y="3383280"/>
-            <a:ext cx="2670048" cy="1920240"/>
+            <a:off x="548640" y="3108960"/>
+            <a:ext cx="2670048" cy="1719072"/>
           </a:xfrm>
           <a:prstGeom prst="roundRect">
             <a:avLst>
-              <a:gd name="adj" fmla="val 3810"/>
+              <a:gd name="adj" fmla="val 4255"/>
             </a:avLst>
           </a:prstGeom>
           <a:solidFill>
@@ -9879,7 +9880,7 @@
         </p:nvSpPr>
         <p:spPr>
           <a:xfrm>
-            <a:off x="731520" y="3547872"/>
+            <a:off x="731520" y="3246120"/>
             <a:ext cx="457200" cy="457200"/>
           </a:xfrm>
           <a:prstGeom prst="ellipse">
@@ -9898,7 +9899,7 @@
       </p:sp>
       <p:pic>
         <p:nvPicPr>
-          <p:cNvPr id="21" name="Image 4" descr="C:\Users\whale\AppData\Local\Temp\claude\C--Users-whale-git-uiao-inbox\cbd5b766-acc0-4006-9202-a9bb6b23e97b\scratchpad\deck\icons\FaServer.png">    </p:cNvPr>
+          <p:cNvPr id="21" name="Image 4" descr="C:\Users\whale\git\uiao\inbox\SSA-Interview\build\icons\FaServer.png">    </p:cNvPr>
           <p:cNvPicPr>
             <a:picLocks noChangeAspect="1"/>
           </p:cNvPicPr>
@@ -9912,7 +9913,7 @@
         </p:blipFill>
         <p:spPr>
           <a:xfrm>
-            <a:off x="841248" y="3657600"/>
+            <a:off x="841248" y="3355848"/>
             <a:ext cx="237744" cy="237744"/>
           </a:xfrm>
           <a:prstGeom prst="rect">
@@ -9928,8 +9929,8 @@
         </p:nvSpPr>
         <p:spPr>
           <a:xfrm>
-            <a:off x="731520" y="4096512"/>
-            <a:ext cx="2377440" cy="1143000"/>
+            <a:off x="731520" y="3767328"/>
+            <a:ext cx="2377440" cy="1005840"/>
           </a:xfrm>
           <a:prstGeom prst="rect">
             <a:avLst/>
@@ -9984,12 +9985,12 @@
         </p:nvSpPr>
         <p:spPr>
           <a:xfrm>
-            <a:off x="3355848" y="3383280"/>
-            <a:ext cx="2670048" cy="1920240"/>
+            <a:off x="3355848" y="3108960"/>
+            <a:ext cx="2670048" cy="1719072"/>
           </a:xfrm>
           <a:prstGeom prst="roundRect">
             <a:avLst>
-              <a:gd name="adj" fmla="val 3810"/>
+              <a:gd name="adj" fmla="val 4255"/>
             </a:avLst>
           </a:prstGeom>
           <a:solidFill>
@@ -10018,7 +10019,7 @@
         </p:nvSpPr>
         <p:spPr>
           <a:xfrm>
-            <a:off x="3538728" y="3547872"/>
+            <a:off x="3538728" y="3246120"/>
             <a:ext cx="457200" cy="457200"/>
           </a:xfrm>
           <a:prstGeom prst="ellipse">
@@ -10037,7 +10038,7 @@
       </p:sp>
       <p:pic>
         <p:nvPicPr>
-          <p:cNvPr id="25" name="Image 5" descr="C:\Users\whale\AppData\Local\Temp\claude\C--Users-whale-git-uiao-inbox\cbd5b766-acc0-4006-9202-a9bb6b23e97b\scratchpad\deck\icons\FaDatabase.png">    </p:cNvPr>
+          <p:cNvPr id="25" name="Image 5" descr="C:\Users\whale\git\uiao\inbox\SSA-Interview\build\icons\FaDatabase.png">    </p:cNvPr>
           <p:cNvPicPr>
             <a:picLocks noChangeAspect="1"/>
           </p:cNvPicPr>
@@ -10051,7 +10052,7 @@
         </p:blipFill>
         <p:spPr>
           <a:xfrm>
-            <a:off x="3648456" y="3657600"/>
+            <a:off x="3648456" y="3355848"/>
             <a:ext cx="237744" cy="237744"/>
           </a:xfrm>
           <a:prstGeom prst="rect">
@@ -10067,8 +10068,8 @@
         </p:nvSpPr>
         <p:spPr>
           <a:xfrm>
-            <a:off x="3538728" y="4096512"/>
-            <a:ext cx="2377440" cy="1143000"/>
+            <a:off x="3538728" y="3767328"/>
+            <a:ext cx="2377440" cy="1005840"/>
           </a:xfrm>
           <a:prstGeom prst="rect">
             <a:avLst/>
@@ -10123,12 +10124,12 @@
         </p:nvSpPr>
         <p:spPr>
           <a:xfrm>
-            <a:off x="6163056" y="3383280"/>
-            <a:ext cx="2670048" cy="1920240"/>
+            <a:off x="6163056" y="3108960"/>
+            <a:ext cx="2670048" cy="1719072"/>
           </a:xfrm>
           <a:prstGeom prst="roundRect">
             <a:avLst>
-              <a:gd name="adj" fmla="val 3810"/>
+              <a:gd name="adj" fmla="val 4255"/>
             </a:avLst>
           </a:prstGeom>
           <a:solidFill>
@@ -10157,7 +10158,7 @@
         </p:nvSpPr>
         <p:spPr>
           <a:xfrm>
-            <a:off x="6345936" y="3547872"/>
+            <a:off x="6345936" y="3246120"/>
             <a:ext cx="457200" cy="457200"/>
           </a:xfrm>
           <a:prstGeom prst="ellipse">
@@ -10176,7 +10177,7 @@
       </p:sp>
       <p:pic>
         <p:nvPicPr>
-          <p:cNvPr id="29" name="Image 6" descr="C:\Users\whale\AppData\Local\Temp\claude\C--Users-whale-git-uiao-inbox\cbd5b766-acc0-4006-9202-a9bb6b23e97b\scratchpad\deck\icons\FaLaptop.png">    </p:cNvPr>
+          <p:cNvPr id="29" name="Image 6" descr="C:\Users\whale\git\uiao\inbox\SSA-Interview\build\icons\FaLaptop.png">    </p:cNvPr>
           <p:cNvPicPr>
             <a:picLocks noChangeAspect="1"/>
           </p:cNvPicPr>
@@ -10190,7 +10191,7 @@
         </p:blipFill>
         <p:spPr>
           <a:xfrm>
-            <a:off x="6455664" y="3657600"/>
+            <a:off x="6455664" y="3355848"/>
             <a:ext cx="237744" cy="237744"/>
           </a:xfrm>
           <a:prstGeom prst="rect">
@@ -10206,8 +10207,8 @@
         </p:nvSpPr>
         <p:spPr>
           <a:xfrm>
-            <a:off x="6345936" y="4096512"/>
-            <a:ext cx="2377440" cy="1143000"/>
+            <a:off x="6345936" y="3767328"/>
+            <a:ext cx="2377440" cy="1005840"/>
           </a:xfrm>
           <a:prstGeom prst="rect">
             <a:avLst/>
@@ -10262,12 +10263,12 @@
         </p:nvSpPr>
         <p:spPr>
           <a:xfrm>
-            <a:off x="8970264" y="3383280"/>
-            <a:ext cx="2670048" cy="1920240"/>
+            <a:off x="8970264" y="3108960"/>
+            <a:ext cx="2670048" cy="1719072"/>
           </a:xfrm>
           <a:prstGeom prst="roundRect">
             <a:avLst>
-              <a:gd name="adj" fmla="val 3810"/>
+              <a:gd name="adj" fmla="val 4255"/>
             </a:avLst>
           </a:prstGeom>
           <a:solidFill>
@@ -10296,7 +10297,7 @@
         </p:nvSpPr>
         <p:spPr>
           <a:xfrm>
-            <a:off x="9153144" y="3547872"/>
+            <a:off x="9153144" y="3246120"/>
             <a:ext cx="457200" cy="457200"/>
           </a:xfrm>
           <a:prstGeom prst="ellipse">
@@ -10315,7 +10316,7 @@
       </p:sp>
       <p:pic>
         <p:nvPicPr>
-          <p:cNvPr id="33" name="Image 7" descr="C:\Users\whale\AppData\Local\Temp\claude\C--Users-whale-git-uiao-inbox\cbd5b766-acc0-4006-9202-a9bb6b23e97b\scratchpad\deck\icons\FaShieldHalved.png">    </p:cNvPr>
+          <p:cNvPr id="33" name="Image 7" descr="C:\Users\whale\git\uiao\inbox\SSA-Interview\build\icons\FaShieldHalved.png">    </p:cNvPr>
           <p:cNvPicPr>
             <a:picLocks noChangeAspect="1"/>
           </p:cNvPicPr>
@@ -10329,7 +10330,7 @@
         </p:blipFill>
         <p:spPr>
           <a:xfrm>
-            <a:off x="9262872" y="3657600"/>
+            <a:off x="9262872" y="3355848"/>
             <a:ext cx="237744" cy="237744"/>
           </a:xfrm>
           <a:prstGeom prst="rect">
@@ -10345,8 +10346,8 @@
         </p:nvSpPr>
         <p:spPr>
           <a:xfrm>
-            <a:off x="9153144" y="4096512"/>
-            <a:ext cx="2377440" cy="1143000"/>
+            <a:off x="9153144" y="3767328"/>
+            <a:ext cx="2377440" cy="1005840"/>
           </a:xfrm>
           <a:prstGeom prst="rect">
             <a:avLst/>
@@ -10395,18 +10396,132 @@
       </p:sp>
       <p:sp>
         <p:nvSpPr>
-          <p:cNvPr id="35" name="Teaser footer"/>
+          <p:cNvPr id="35" name="Teaser companions"/>
           <p:cNvSpPr/>
           <p:nvPr/>
         </p:nvSpPr>
         <p:spPr>
           <a:xfrm>
-            <a:off x="548640" y="5486400"/>
-            <a:ext cx="11109960" cy="640080"/>
+            <a:off x="548640" y="4937760"/>
+            <a:ext cx="11109960" cy="566928"/>
           </a:xfrm>
           <a:prstGeom prst="roundRect">
             <a:avLst>
-              <a:gd name="adj" fmla="val 11429"/>
+              <a:gd name="adj" fmla="val 12903"/>
+            </a:avLst>
+          </a:prstGeom>
+          <a:solidFill>
+            <a:srgbClr val="E4EAF4"/>
+          </a:solidFill>
+          <a:ln w="12700">
+            <a:solidFill>
+              <a:srgbClr val="1F2A44"/>
+            </a:solidFill>
+            <a:prstDash val="solid"/>
+          </a:ln>
+          <a:effectLst>
+            <a:outerShdw sx="100000" sy="100000" kx="0" ky="0" algn="bl" rotWithShape="0" blurRad="76200" dist="25400" dir="5400000">
+              <a:srgbClr val="64748B">
+                <a:alpha val="22000"/>
+              </a:srgbClr>
+            </a:outerShdw>
+          </a:effectLst>
+        </p:spPr>
+      </p:sp>
+      <p:sp>
+        <p:nvSpPr>
+          <p:cNvPr id="36" name="Teaser companions text"/>
+          <p:cNvSpPr txBox="1"/>
+          <p:nvPr/>
+        </p:nvSpPr>
+        <p:spPr>
+          <a:xfrm>
+            <a:off x="822960" y="4956048"/>
+            <a:ext cx="10607040" cy="530352"/>
+          </a:xfrm>
+          <a:prstGeom prst="rect">
+            <a:avLst/>
+          </a:prstGeom>
+          <a:noFill/>
+          <a:ln/>
+        </p:spPr>
+        <p:txBody>
+          <a:bodyPr wrap="square" lIns="0" tIns="0" rIns="0" bIns="0" rtlCol="0" anchor="ctr"/>
+          <a:lstStyle/>
+          <a:p>
+            <a:pPr indent="0" marL="0">
+              <a:buNone/>
+            </a:pPr>
+            <a:r>
+              <a:rPr lang="en-US" sz="1450" b="1" dirty="0">
+                <a:solidFill>
+                  <a:srgbClr val="1F2A44"/>
+                </a:solidFill>
+              </a:rPr>
+              <a:t>Companion decks: </a:t>
+            </a:r>
+            <a:pPr indent="0" marL="0">
+              <a:buNone/>
+            </a:pPr>
+            <a:r>
+              <a:rPr lang="en-US" sz="1450" b="1" dirty="0">
+                <a:solidFill>
+                  <a:schemeClr val="tx2"/>
+                </a:solidFill>
+              </a:rPr>
+              <a:t>Contractor Identity Source</a:t>
+            </a:r>
+            <a:pPr indent="0" marL="0">
+              <a:buNone/>
+            </a:pPr>
+            <a:r>
+              <a:rPr lang="en-US" sz="1450" dirty="0">
+                <a:solidFill>
+                  <a:schemeClr val="tx2"/>
+                </a:solidFill>
+              </a:rPr>
+              <a:t> (who is authoritative for a contractor)  ·  </a:t>
+            </a:r>
+            <a:pPr indent="0" marL="0">
+              <a:buNone/>
+            </a:pPr>
+            <a:r>
+              <a:rPr lang="en-US" sz="1450" b="1" dirty="0">
+                <a:solidFill>
+                  <a:schemeClr val="tx2"/>
+                </a:solidFill>
+              </a:rPr>
+              <a:t>Original HR-Driven Identity</a:t>
+            </a:r>
+            <a:pPr indent="0" marL="0">
+              <a:buNone/>
+            </a:pPr>
+            <a:r>
+              <a:rPr lang="en-US" sz="1450" dirty="0">
+                <a:solidFill>
+                  <a:schemeClr val="tx2"/>
+                </a:solidFill>
+              </a:rPr>
+              <a:t> (full model, lifecycle, plan)</a:t>
+            </a:r>
+            <a:endParaRPr lang="en-US" sz="1450" dirty="0"/>
+          </a:p>
+        </p:txBody>
+      </p:sp>
+      <p:sp>
+        <p:nvSpPr>
+          <p:cNvPr id="37" name="Teaser footer"/>
+          <p:cNvSpPr/>
+          <p:nvPr/>
+        </p:nvSpPr>
+        <p:spPr>
+          <a:xfrm>
+            <a:off x="548640" y="5596128"/>
+            <a:ext cx="11109960" cy="548640"/>
+          </a:xfrm>
+          <a:prstGeom prst="roundRect">
+            <a:avLst>
+              <a:gd name="adj" fmla="val 13333"/>
             </a:avLst>
           </a:prstGeom>
           <a:solidFill>
@@ -10429,14 +10544,14 @@
       </p:sp>
       <p:sp>
         <p:nvSpPr>
-          <p:cNvPr id="36" name="Teaser footer text"/>
+          <p:cNvPr id="38" name="Teaser footer text"/>
           <p:cNvSpPr txBox="1"/>
           <p:nvPr/>
         </p:nvSpPr>
         <p:spPr>
           <a:xfrm>
-            <a:off x="822960" y="5504688"/>
-            <a:ext cx="10607040" cy="603504"/>
+            <a:off x="822960" y="5614416"/>
+            <a:ext cx="10607040" cy="512064"/>
           </a:xfrm>
           <a:prstGeom prst="rect">
             <a:avLst/>
@@ -10452,7 +10567,7 @@
               <a:buNone/>
             </a:pPr>
             <a:r>
-              <a:rPr lang="en-US" sz="1600" b="1" dirty="0">
+              <a:rPr lang="en-US" sz="1500" b="1" dirty="0">
                 <a:solidFill>
                   <a:srgbClr val="B45309"/>
                 </a:solidFill>
@@ -10463,14 +10578,14 @@
               <a:buNone/>
             </a:pPr>
             <a:r>
-              <a:rPr lang="en-US" sz="1600" dirty="0">
+              <a:rPr lang="en-US" sz="1500" dirty="0">
                 <a:solidFill>
                   <a:schemeClr val="tx2"/>
                 </a:solidFill>
               </a:rPr>
               <a:t>Zero Trust whole-agency unification · AI identity governance · help desk Entra operations</a:t>
             </a:r>
-            <a:endParaRPr lang="en-US" sz="1600" dirty="0"/>
+            <a:endParaRPr lang="en-US" sz="1500" dirty="0"/>
           </a:p>
         </p:txBody>
       </p:sp>
@@ -10646,7 +10761,7 @@
       </p:sp>
       <p:pic>
         <p:nvPicPr>
-          <p:cNvPr id="5" name="Image 0" descr="C:\Users\whale\AppData\Local\Temp\claude\C--Users-whale-git-uiao-inbox\cbd5b766-acc0-4006-9202-a9bb6b23e97b\scratchpad\deck\icons\FaArrowsRotate.png">    </p:cNvPr>
+          <p:cNvPr id="5" name="Image 0" descr="C:\Users\whale\git\uiao\inbox\SSA-Interview\build\icons\FaArrowsRotate.png">    </p:cNvPr>
           <p:cNvPicPr>
             <a:picLocks noChangeAspect="1"/>
           </p:cNvPicPr>
@@ -10844,7 +10959,7 @@
       </p:sp>
       <p:pic>
         <p:nvPicPr>
-          <p:cNvPr id="10" name="Image 1" descr="C:\Users\whale\AppData\Local\Temp\claude\C--Users-whale-git-uiao-inbox\cbd5b766-acc0-4006-9202-a9bb6b23e97b\scratchpad\deck\icons\FaLandmark.png">    </p:cNvPr>
+          <p:cNvPr id="10" name="Image 1" descr="C:\Users\whale\git\uiao\inbox\SSA-Interview\build\icons\FaLandmark.png">    </p:cNvPr>
           <p:cNvPicPr>
             <a:picLocks noChangeAspect="1"/>
           </p:cNvPicPr>
@@ -11042,7 +11157,7 @@
       </p:sp>
       <p:pic>
         <p:nvPicPr>
-          <p:cNvPr id="15" name="Image 2" descr="C:\Users\whale\AppData\Local\Temp\claude\C--Users-whale-git-uiao-inbox\cbd5b766-acc0-4006-9202-a9bb6b23e97b\scratchpad\deck\icons\FaLightbulb.png">    </p:cNvPr>
+          <p:cNvPr id="15" name="Image 2" descr="C:\Users\whale\git\uiao\inbox\SSA-Interview\build\icons\FaLightbulb.png">    </p:cNvPr>
           <p:cNvPicPr>
             <a:picLocks noChangeAspect="1"/>
           </p:cNvPicPr>
@@ -12791,7 +12906,7 @@
                   <a:srgbClr val="B45309"/>
                 </a:solidFill>
               </a:rPr>
-              <a:t>When access is decided by attributes, </a:t>
+              <a:t>When access decisions depend on attributes, </a:t>
             </a:r>
             <a:pPr indent="0" marL="0">
               <a:buNone/>
@@ -12802,7 +12917,7 @@
                   <a:schemeClr val="tx2"/>
                 </a:solidFill>
               </a:rPr>
-              <a:t>the accuracy of employee data is the accuracy of access.</a:t>
+              <a:t>the accuracy of employee data drives the accuracy of access.</a:t>
             </a:r>
             <a:endParaRPr lang="en-US" sz="1800" dirty="0"/>
           </a:p>
@@ -12980,7 +13095,7 @@
       </p:sp>
       <p:pic>
         <p:nvPicPr>
-          <p:cNvPr id="5" name="Image 0" descr="C:\Users\whale\AppData\Local\Temp\claude\C--Users-whale-git-uiao-inbox\cbd5b766-acc0-4006-9202-a9bb6b23e97b\scratchpad\deck\icons\FaAddressBook.png">    </p:cNvPr>
+          <p:cNvPr id="5" name="Image 0" descr="C:\Users\whale\git\uiao\inbox\SSA-Interview\build\icons\FaAddressBook.png">    </p:cNvPr>
           <p:cNvPicPr>
             <a:picLocks noChangeAspect="1"/>
           </p:cNvPicPr>
@@ -13122,7 +13237,7 @@
       </p:sp>
       <p:pic>
         <p:nvPicPr>
-          <p:cNvPr id="9" name="Image 1" descr="C:\Users\whale\AppData\Local\Temp\claude\C--Users-whale-git-uiao-inbox\cbd5b766-acc0-4006-9202-a9bb6b23e97b\scratchpad\deck\icons\FaUserTie.png">    </p:cNvPr>
+          <p:cNvPr id="9" name="Image 1" descr="C:\Users\whale\git\uiao\inbox\SSA-Interview\build\icons\FaUserTie.png">    </p:cNvPr>
           <p:cNvPicPr>
             <a:picLocks noChangeAspect="1"/>
           </p:cNvPicPr>
@@ -13264,7 +13379,7 @@
       </p:sp>
       <p:pic>
         <p:nvPicPr>
-          <p:cNvPr id="13" name="Image 2" descr="C:\Users\whale\AppData\Local\Temp\claude\C--Users-whale-git-uiao-inbox\cbd5b766-acc0-4006-9202-a9bb6b23e97b\scratchpad\deck\icons\FaRightLeft.png">    </p:cNvPr>
+          <p:cNvPr id="13" name="Image 2" descr="C:\Users\whale\git\uiao\inbox\SSA-Interview\build\icons\FaRightLeft.png">    </p:cNvPr>
           <p:cNvPicPr>
             <a:picLocks noChangeAspect="1"/>
           </p:cNvPicPr>
@@ -14234,7 +14349,7 @@
                   <a:srgbClr val="B45309"/>
                 </a:solidFill>
               </a:rPr>
-              <a:t>Wave 2 agencies</a:t>
+              <a:t>Wave 2 agencies (planning assumption)</a:t>
             </a:r>
             <a:endParaRPr lang="en-US" sz="1400" dirty="0"/>
           </a:p>
@@ -14248,7 +14363,7 @@
                   <a:schemeClr val="tx2"/>
                 </a:solidFill>
               </a:rPr>
-              <a:t>~8-month onboarding; interconnections live ~month 5</a:t>
+              <a:t>Interconnections during onboarding; confirm agency milestones</a:t>
             </a:r>
             <a:endParaRPr lang="en-US" sz="1400" dirty="0"/>
           </a:p>
@@ -14429,7 +14544,7 @@
       </p:sp>
       <p:pic>
         <p:nvPicPr>
-          <p:cNvPr id="21" name="Image 0" descr="C:\Users\whale\AppData\Local\Temp\claude\C--Users-whale-git-uiao-inbox\cbd5b766-acc0-4006-9202-a9bb6b23e97b\scratchpad\deck\icons\FaDoorOpen.png">    </p:cNvPr>
+          <p:cNvPr id="21" name="Image 0" descr="C:\Users\whale\git\uiao\inbox\SSA-Interview\build\icons\FaDoorOpen.png">    </p:cNvPr>
           <p:cNvPicPr>
             <a:picLocks noChangeAspect="1"/>
           </p:cNvPicPr>
@@ -14571,7 +14686,7 @@
       </p:sp>
       <p:pic>
         <p:nvPicPr>
-          <p:cNvPr id="25" name="Image 1" descr="C:\Users\whale\AppData\Local\Temp\claude\C--Users-whale-git-uiao-inbox\cbd5b766-acc0-4006-9202-a9bb6b23e97b\scratchpad\deck\icons\FaDoorClosed.png">    </p:cNvPr>
+          <p:cNvPr id="25" name="Image 1" descr="C:\Users\whale\git\uiao\inbox\SSA-Interview\build\icons\FaDoorClosed.png">    </p:cNvPr>
           <p:cNvPicPr>
             <a:picLocks noChangeAspect="1"/>
           </p:cNvPicPr>
@@ -15958,7 +16073,7 @@
       </p:sp>
       <p:pic>
         <p:nvPicPr>
-          <p:cNvPr id="6" name="Image 0" descr="C:\Users\whale\AppData\Local\Temp\claude\C--Users-whale-git-uiao-inbox\cbd5b766-acc0-4006-9202-a9bb6b23e97b\scratchpad\deck\icons\FaBook.png">    </p:cNvPr>
+          <p:cNvPr id="6" name="Image 0" descr="C:\Users\whale\git\uiao\inbox\SSA-Interview\build\icons\FaBook.png">    </p:cNvPr>
           <p:cNvPicPr>
             <a:picLocks noChangeAspect="1"/>
           </p:cNvPicPr>
@@ -16116,7 +16231,7 @@
       </p:sp>
       <p:pic>
         <p:nvPicPr>
-          <p:cNvPr id="11" name="Image 1" descr="C:\Users\whale\AppData\Local\Temp\claude\C--Users-whale-git-uiao-inbox\cbd5b766-acc0-4006-9202-a9bb6b23e97b\scratchpad\deck\icons\FaPeopleArrows.png">    </p:cNvPr>
+          <p:cNvPr id="11" name="Image 1" descr="C:\Users\whale\git\uiao\inbox\SSA-Interview\build\icons\FaPeopleArrows.png">    </p:cNvPr>
           <p:cNvPicPr>
             <a:picLocks noChangeAspect="1"/>
           </p:cNvPicPr>
@@ -16185,8 +16300,8 @@
         </p:nvSpPr>
         <p:spPr>
           <a:xfrm>
-            <a:off x="8732520" y="4315968"/>
-            <a:ext cx="2788920" cy="1280160"/>
+            <a:off x="8732520" y="4279392"/>
+            <a:ext cx="2788920" cy="1353312"/>
           </a:xfrm>
           <a:prstGeom prst="rect">
             <a:avLst/>
@@ -16202,25 +16317,25 @@
               <a:buNone/>
             </a:pPr>
             <a:r>
-              <a:rPr lang="en-US" sz="1350" b="1" dirty="0">
+              <a:rPr lang="en-US" sz="1250" b="1" dirty="0">
                 <a:solidFill>
                   <a:srgbClr val="1F2A44"/>
                 </a:solidFill>
               </a:rPr>
-              <a:t>Not in HRIT; today in COR spreadsheets. </a:t>
+              <a:t>Not in HRIT; tracked in COR spreadsheets in the processes observed. </a:t>
             </a:r>
             <a:pPr indent="0" marL="0">
               <a:buNone/>
             </a:pPr>
             <a:r>
-              <a:rPr lang="en-US" sz="1350" dirty="0">
+              <a:rPr lang="en-US" sz="1250" dirty="0">
                 <a:solidFill>
                   <a:schemeClr val="tx2"/>
                 </a:solidFill>
               </a:rPr>
-              <a:t>Best bet: Core HCM’s Contingent Worker type. Alternative: PIV sponsorship as the source.</a:t>
+              <a:t>Contractor authority decision required: evaluate suitability, sponsorship, and contingent-worker records.</a:t>
             </a:r>
-            <a:endParaRPr lang="en-US" sz="1350" dirty="0"/>
+            <a:endParaRPr lang="en-US" sz="1250" dirty="0"/>
           </a:p>
         </p:txBody>
       </p:sp>
@@ -16365,7 +16480,7 @@
                 <a:ea typeface="Cambria" pitchFamily="34" charset="-122"/>
                 <a:cs typeface="Cambria" pitchFamily="34" charset="-120"/>
               </a:rPr>
-              <a:t>Personnel actions drive the lifecycle — by code, not by ticket</a:t>
+              <a:t>Proposed identity interpretation of OPM nature-of-action families</a:t>
             </a:r>
             <a:endParaRPr lang="en-US" sz="3000" dirty="0"/>
           </a:p>
@@ -18382,7 +18497,7 @@
       </p:sp>
       <p:pic>
         <p:nvPicPr>
-          <p:cNvPr id="6" name="Image 0" descr="C:\Users\whale\AppData\Local\Temp\claude\C--Users-whale-git-uiao-inbox\cbd5b766-acc0-4006-9202-a9bb6b23e97b\scratchpad\deck\icons\FaUserClock.png">    </p:cNvPr>
+          <p:cNvPr id="6" name="Image 0" descr="C:\Users\whale\git\uiao\inbox\SSA-Interview\build\icons\FaUserClock.png">    </p:cNvPr>
           <p:cNvPicPr>
             <a:picLocks noChangeAspect="1"/>
           </p:cNvPicPr>
@@ -18512,7 +18627,7 @@
       </p:sp>
       <p:pic>
         <p:nvPicPr>
-          <p:cNvPr id="10" name="Image 1" descr="C:\Users\whale\AppData\Local\Temp\claude\C--Users-whale-git-uiao-inbox\cbd5b766-acc0-4006-9202-a9bb6b23e97b\scratchpad\deck\icons\FaArrowDownWideShort.png">    </p:cNvPr>
+          <p:cNvPr id="10" name="Image 1" descr="C:\Users\whale\git\uiao\inbox\SSA-Interview\build\icons\FaArrowDownWideShort.png">    </p:cNvPr>
           <p:cNvPicPr>
             <a:picLocks noChangeAspect="1"/>
           </p:cNvPicPr>
@@ -18642,7 +18757,7 @@
       </p:sp>
       <p:pic>
         <p:nvPicPr>
-          <p:cNvPr id="14" name="Image 2" descr="C:\Users\whale\AppData\Local\Temp\claude\C--Users-whale-git-uiao-inbox\cbd5b766-acc0-4006-9202-a9bb6b23e97b\scratchpad\deck\icons\FaUserXmark.png">    </p:cNvPr>
+          <p:cNvPr id="14" name="Image 2" descr="C:\Users\whale\git\uiao\inbox\SSA-Interview\build\icons\FaUserXmark.png">    </p:cNvPr>
           <p:cNvPicPr>
             <a:picLocks noChangeAspect="1"/>
           </p:cNvPicPr>
@@ -19346,7 +19461,7 @@
                           <a:ea typeface="Calibri" pitchFamily="34" charset="-122"/>
                           <a:cs typeface="Calibri" pitchFamily="34" charset="-120"/>
                         </a:rPr>
-                        <a:t>Never, once assigned</a:t>
+                        <a:t>Never, by design (to validate)</a:t>
                       </a:r>
                       <a:endParaRPr lang="en-US" sz="1300" dirty="0">
                         <a:latin typeface="Calibri" charset="0"/>
@@ -20559,7 +20674,7 @@
       </p:sp>
       <p:pic>
         <p:nvPicPr>
-          <p:cNvPr id="6" name="Image 0" descr="C:\Users\whale\AppData\Local\Temp\claude\C--Users-whale-git-uiao-inbox\cbd5b766-acc0-4006-9202-a9bb6b23e97b\scratchpad\deck\icons\FaSitemap.png">    </p:cNvPr>
+          <p:cNvPr id="6" name="Image 0" descr="C:\Users\whale\git\uiao\inbox\SSA-Interview\build\icons\FaSitemap.png">    </p:cNvPr>
           <p:cNvPicPr>
             <a:picLocks noChangeAspect="1"/>
           </p:cNvPicPr>
@@ -20773,7 +20888,7 @@
               <a:buNone/>
             </a:pPr>
             <a:r>
-              <a:rPr lang="en-US" sz="1700" b="1" dirty="0">
+              <a:rPr lang="en-US" sz="1400" b="1" dirty="0">
                 <a:solidFill>
                   <a:srgbClr val="B45309"/>
                 </a:solidFill>
@@ -20784,14 +20899,14 @@
               <a:buNone/>
             </a:pPr>
             <a:r>
-              <a:rPr lang="en-US" sz="1700" dirty="0">
+              <a:rPr lang="en-US" sz="1400" dirty="0">
                 <a:solidFill>
                   <a:schemeClr val="tx2"/>
                 </a:solidFill>
               </a:rPr>
-              <a:t>for example, a Mainframe PIN. Confirm it as the enterprise person key, and map Core HCM’s PersonNumber and every directory and credential key to it.</a:t>
+              <a:t>for example, a Mainframe PIN, proposed for confirmation as the enterprise person key. Validate uniqueness, persistence, non-reassignment, coverage, privacy and history; then map Core HCM’s PersonNumber and every directory and credential key to it.</a:t>
             </a:r>
-            <a:endParaRPr lang="en-US" sz="1700" dirty="0"/>
+            <a:endParaRPr lang="en-US" sz="1400" dirty="0"/>
           </a:p>
         </p:txBody>
       </p:sp>
@@ -23394,7 +23509,7 @@
       </p:sp>
       <p:pic>
         <p:nvPicPr>
-          <p:cNvPr id="6" name="Image 0" descr="C:\Users\whale\AppData\Local\Temp\claude\C--Users-whale-git-uiao-inbox\cbd5b766-acc0-4006-9202-a9bb6b23e97b\scratchpad\deck\icons\FaCubes.png">    </p:cNvPr>
+          <p:cNvPr id="6" name="Image 0" descr="C:\Users\whale\git\uiao\inbox\SSA-Interview\build\icons\FaCubes.png">    </p:cNvPr>
           <p:cNvPicPr>
             <a:picLocks noChangeAspect="1"/>
           </p:cNvPicPr>
@@ -23527,7 +23642,7 @@
       </p:sp>
       <p:pic>
         <p:nvPicPr>
-          <p:cNvPr id="10" name="Image 1" descr="C:\Users\whale\AppData\Local\Temp\claude\C--Users-whale-git-uiao-inbox\cbd5b766-acc0-4006-9202-a9bb6b23e97b\scratchpad\deck\icons\FaHashtag.png">    </p:cNvPr>
+          <p:cNvPr id="10" name="Image 1" descr="C:\Users\whale\git\uiao\inbox\SSA-Interview\build\icons\FaHashtag.png">    </p:cNvPr>
           <p:cNvPicPr>
             <a:picLocks noChangeAspect="1"/>
           </p:cNvPicPr>
@@ -23660,7 +23775,7 @@
       </p:sp>
       <p:pic>
         <p:nvPicPr>
-          <p:cNvPr id="14" name="Image 2" descr="C:\Users\whale\AppData\Local\Temp\claude\C--Users-whale-git-uiao-inbox\cbd5b766-acc0-4006-9202-a9bb6b23e97b\scratchpad\deck\icons\FaTableList.png">    </p:cNvPr>
+          <p:cNvPr id="14" name="Image 2" descr="C:\Users\whale\git\uiao\inbox\SSA-Interview\build\icons\FaTableList.png">    </p:cNvPr>
           <p:cNvPicPr>
             <a:picLocks noChangeAspect="1"/>
           </p:cNvPicPr>

--- a/presentations/hr-driven-identity-interview/HR_Driven_Identity_AnyAgency.pptx
+++ b/presentations/hr-driven-identity-interview/HR_Driven_Identity_AnyAgency.pptx
@@ -122,7 +122,7 @@
   <p:extLst>
     <p:ext uri="{521415D9-36F7-43E2-AB2F-B90AF26B5E84}">
       <p14:sectionLst xmlns:p14="http://schemas.microsoft.com/office/powerpoint/2010/main">
-        <p14:section name="Thesis" id="{0b715bc0-98aa-193d-782b-d042dc88f4ed}">
+        <p14:section name="Thesis" id="{3d600ff1-e064-2ca8-1311-871e3316b19c}">
           <p14:sldIdLst>
             <p14:sldId id="256"/>
             <p14:sldId id="257"/>
@@ -131,7 +131,7 @@
             <p14:sldId id="260"/>
           </p14:sldIdLst>
         </p14:section>
-        <p14:section name="The data" id="{64b8220b-93a9-72ec-60cd-17b41d252d89}">
+        <p14:section name="The data" id="{2231609d-f9ec-9c53-f42d-423399b8a0aa}">
           <p14:sldIdLst>
             <p14:sldId id="261"/>
             <p14:sldId id="262"/>
@@ -139,21 +139,21 @@
             <p14:sldId id="264"/>
           </p14:sldIdLst>
         </p14:section>
-        <p14:section name="Identity and ICAM" id="{7f6c2bb3-a34d-a968-d664-85822baad2fe}">
+        <p14:section name="Identity and ICAM" id="{3cbdb440-b8e1-8437-1bc4-b6b002f554a1}">
           <p14:sldIdLst>
             <p14:sldId id="265"/>
             <p14:sldId id="266"/>
             <p14:sldId id="267"/>
           </p14:sldIdLst>
         </p14:section>
-        <p14:section name="Delivery" id="{81048cee-169c-705a-7003-91d04e251d5a}">
+        <p14:section name="Delivery" id="{9d518470-f160-b170-1844-3e1ff983573c}">
           <p14:sldIdLst>
             <p14:sldId id="268"/>
             <p14:sldId id="269"/>
             <p14:sldId id="270"/>
           </p14:sldIdLst>
         </p14:section>
-        <p14:section name="Beyond" id="{2b41fc3b-001d-ab77-41c3-6b6b0e965b36}">
+        <p14:section name="Beyond" id="{95fdccde-50a5-bf23-1464-03a6c819c647}">
           <p14:sldIdLst>
             <p14:sldId id="271"/>
           </p14:sldIdLst>
@@ -748,7 +748,7 @@
               <a:t>[10:27–11:23]  ICAM — beyond accounts.
 Credentials: the joiner event schedules PIV enrollment. The leaver event blocks sign-in and revokes sessions first — Microsoft's documented order, and the step that closes certificate sign-in immediately rather than at the next revocation-list refresh — then revokes PIV, derived credentials and device certificates in parallel, reconciled to completion.
 Assurance: record each person's proofing level and authenticator assurance as governed attributes, treat missing proofing evidence as a finding, and enforce phishing-resistant MFA under M-22-09.
-Access: baseline access derived by rule from the standard attributes; privileged eligibility by position, through PIM, never standing; and any activity from a separated person is an alert.
+Access: baseline access derived by rule from the standard attributes; position attributes scoping candidates for privileged eligibility, with explicit approval and PIM still required; and any activity from a separated person is an alert.
 The result: every entitlement has a "because" — a rule, an attribute, and the personnel action that set it.
 Workbook: HR-Driven Identity, Chapter 07 — The canonical leaver sequence; Assurance as data; Chapter 08 — Where dynamic membership stops.</a:t>
             </a:r>
@@ -1023,8 +1023,8 @@
             <a:r>
               <a:rPr lang="en-US" dirty="0"/>
               <a:t>[13:10–13:58]  One standard, shared across agencies.
-Every agency is moving to the same Core HCM on the same OPM data standards. If one agency defines HR-driven ICAM as a standard — crosswalk, canonical model, identifiers and evidence — other agencies can reuse it instead of building their own. And attributes that mean the same thing everywhere make details, transfers, shared services and cross-agency access easier.
-That's the work an enterprise data architect does: working the issues with other agencies and industry, developing options and predicting their impact, and serving as the data expert on interagency committees and working groups. The goal: present this model to our fellow agencies, and adopt it together.
+Participating civilian agencies are moving toward shared Core HCM capabilities and common federal personnel standards. If one agency defines HR-driven ICAM as a standard — crosswalk, canonical model, identifiers and evidence — other agencies can reuse it instead of building their own. And attributes that mean the same thing everywhere make details, transfers, shared services and cross-agency access easier.
+That's the work an enterprise data architect does: working the issues with other agencies and industry, developing options and predicting their impact, and serving as the data expert on interagency committees and working groups. The goal: offer the model for interagency evaluation and reuse.
 Workbook: HR-Driven Identity, Chapter 02 — Federal HR 2.0; Chapter 05 — The standard-attribute layer.</a:t>
             </a:r>
             <a:endParaRPr lang="en-US" dirty="0"/>
@@ -1393,7 +1393,7 @@
             <a:r>
               <a:rPr lang="en-US" dirty="0"/>
               <a:t>[1:48–3:09]  Why we need HR-driven ICAM at all — and why now.
-Zero Trust is federal strategy — OMB M-22-09, with NIST SP 800-207 as the architecture and CISA's maturity model as the yardstick. SASE is how it's delivered: security enforced at a cloud edge close to the user, which TIC 3.0 opens up for agencies, instead of at our network perimeter. And SASE's decisions are driven by ICAM: the user presents a token from a PIV card or phishing-resistant MFA, and Entra ID decides access through Conditional Access and dynamic groups that read the user's attributes.
+Zero Trust is federal strategy — OMB M-22-09, with NIST SP 800-207 as the architecture and CISA's maturity model as the yardstick. SASE is one way these controls can be delivered near users and cloud resources, which TIC 3.0 opens up for agencies, instead of only at our network perimeter. Reliable ICAM supplies critical identity signals to those decisions: the user presents a token from a PIV card or phishing-resistant MFA, and Entra ID decides access through Conditional Access and dynamic groups that read the user's attributes.
 In the perimeter era, a wrong department meant a wrong phone-book entry. Now it means the wrong groups, and so the wrong access — and a stale status is worse than ever. In the perimeter era an orphaned account was already a standing security violation that could enable a breach. Now it's a valid token for someone who has left, usable from anywhere, because there is no perimeter left to stop it. When access decisions depend on attributes, the accuracy of employee data drives the accuracy of access.
 Workbook: HR-Driven Identity, Chapter 01 — Why the agency needs HR-driven ICAM now; Chapter 08 — The derivation chain.</a:t>
             </a:r>
@@ -1669,7 +1669,7 @@
               <a:rPr lang="en-US" dirty="0"/>
               <a:t>[5:18–6:49]  This is the heart of the proposal, and it's the programmatic data knowledge.
 OPM already defines the personnel data every agency records. Agency and subelement give the legal employer and component. Duty station is the location of record. Series, pay plan and grade give a position category for role-based access. Supervisory status tells us who can approve and review. Tenure and appointment type drive the worker type. And the nature-of-action code, with its effective date, tells us what just happened — next slide.
-Why build on OPM's standard rather than on Oracle's field names? Because OPM defines these elements and their codes the same way for every agency. We map them to Entra ID and AD once, for every employee population — and if the HR vendor ever changes, the mapping still holds.
+Why build on OPM's standard rather than on Oracle's field names? Because OPM standards provide a common federal vocabulary that agencies can map into a shared canonical model. We map them to Entra ID and AD once, for every employee population — and if the HR vendor ever changes, the mapping still holds.
 One honest limit: HRIT covers federal employees only. In the processes I have observed, contractors and vendors are tracked in COR spreadsheets. A contractor authority decision is required, and I propose evaluating three candidate sources: Core HCM's Contingent Worker type — a person record, an assignment and a lifecycle much like an employee's, though with no vendor-management layer; PIV sponsorship; and a contractor suitability register, which ties each contractor to an agency contract with a suitability decision. That's a decision to put in front of the program early.
 (Confirm element names against OPM's current data standards.)
 Workbook: HR-Driven Identity, Chapter 05 — The standard-attribute layer; Contractors and vendors.</a:t>
@@ -1760,7 +1760,7 @@
           <a:p>
             <a:r>
               <a:rPr lang="en-US" dirty="0"/>
-              <a:t>[6:49–7:43]  Personnel actions drive the lifecycle.
+              <a:t>[6:49–7:43]  Personnel actions can initiate the lifecycle, after their identity interpretations and exceptions are approved.
 For federal employees, every personnel action carries a nature-of-action code, and I propose mapping the families to identity events: the 100 series are joiners, the 700 series movers, the 500 series conversions, the 300 series separations. Contractors have no SF-50; their events come from contract start and end dates.
 Two families matter more than people expect. The 400 series — furlough, leave without pay, suspension — is not a leaver; the person is still employed and policy restricts the account. The 200 series, return to duty, lifts those restrictions. Getting this wrong either locks out people on leave or leaves access open for people who've left.
 The codes also settle precedence — a separation wins — and rescinded offers. HR, security, labor-relations, privacy, and personnel-policy owners would validate the mappings, exceptions, precedence rules, and actions before automation.
@@ -5155,7 +5155,7 @@
                   <a:schemeClr val="tx2"/>
                 </a:solidFill>
               </a:rPr>
-              <a:t>Privileged eligibility by position, through PIM — never standing</a:t>
+              <a:t>Position scopes candidates for privileged eligibility; explicit approval and PIM still required</a:t>
             </a:r>
             <a:endParaRPr lang="en-US" sz="1550" dirty="0"/>
           </a:p>
@@ -7384,7 +7384,7 @@
                 <a:ea typeface="Cambria" pitchFamily="34" charset="-122"/>
                 <a:cs typeface="Cambria" pitchFamily="34" charset="-120"/>
               </a:rPr>
-              <a:t>One standard for HR-driven ICAM, shared across agencies</a:t>
+              <a:t>A reusable HR-driven ICAM model for interagency evaluation</a:t>
             </a:r>
             <a:endParaRPr lang="en-US" sz="3000" dirty="0"/>
           </a:p>
@@ -7542,7 +7542,7 @@
                   <a:srgbClr val="1F2A44"/>
                 </a:solidFill>
               </a:rPr>
-              <a:t>Same platform, same standards</a:t>
+              <a:t>Shared platform, common standards</a:t>
             </a:r>
             <a:endParaRPr lang="en-US" sz="1400" dirty="0"/>
           </a:p>
@@ -7559,7 +7559,7 @@
                   <a:schemeClr val="tx2"/>
                 </a:solidFill>
               </a:rPr>
-              <a:t>Every agency moves to Core HCM on OPM’s data standards — one crosswalk and canonical model, reused rather than rebuilt</a:t>
+              <a:t>Participating civilian agencies move toward shared Core HCM capabilities and OPM’s data standards — a crosswalk and canonical model others can evaluate and reuse</a:t>
             </a:r>
             <a:endParaRPr lang="en-US" sz="1400" dirty="0"/>
           </a:p>
@@ -8235,7 +8235,7 @@
                   <a:schemeClr val="tx2"/>
                 </a:solidFill>
               </a:rPr>
-              <a:t>present this model to our fellow agencies, and adopt one HR-driven ICAM standard together as each agency onboards to HR 2.0.</a:t>
+              <a:t>offer the model for interagency evaluation and reuse as participating agencies onboard to HR 2.0.</a:t>
             </a:r>
             <a:endParaRPr lang="en-US" sz="1700" dirty="0"/>
           </a:p>
@@ -10694,7 +10694,7 @@
                 <a:ea typeface="Cambria" pitchFamily="34" charset="-122"/>
                 <a:cs typeface="Cambria" pitchFamily="34" charset="-120"/>
               </a:rPr>
-              <a:t>HRIT is coming — build identity into it</a:t>
+              <a:t>Use the onboarding window to design HR-driven identity</a:t>
             </a:r>
             <a:endParaRPr lang="en-US" sz="3000" dirty="0"/>
           </a:p>
@@ -10892,7 +10892,7 @@
                   <a:schemeClr val="tx2"/>
                 </a:solidFill>
               </a:rPr>
-              <a:t>Today: no HR-driven identity; accounts come from tickets</a:t>
+              <a:t>Today: lifecycle substantially manual; many changes ticket-dependent</a:t>
             </a:r>
             <a:endParaRPr lang="en-US" sz="1550" dirty="0"/>
           </a:p>
@@ -11663,7 +11663,7 @@
                   <a:srgbClr val="1F2A44"/>
                 </a:solidFill>
               </a:rPr>
-              <a:t>THE DELIVERY</a:t>
+              <a:t>ONE DELIVERY MODEL</a:t>
             </a:r>
             <a:endParaRPr lang="en-US" sz="1400" dirty="0"/>
           </a:p>
@@ -11700,7 +11700,7 @@
                   <a:schemeClr val="tx2"/>
                 </a:solidFill>
               </a:rPr>
-              <a:t>Each request enforced at the cloud edge (TIC 3.0)</a:t>
+              <a:t>Zero Trust controls enforced near users and cloud resources (TIC 3.0)</a:t>
             </a:r>
             <a:endParaRPr lang="en-US" sz="1400" dirty="0"/>
           </a:p>
@@ -12168,7 +12168,7 @@
                           <a:ea typeface="Calibri" pitchFamily="34" charset="-122"/>
                           <a:cs typeface="Calibri" pitchFamily="34" charset="-120"/>
                         </a:rPr>
-                        <a:t>Zero Trust, delivered through SASE</a:t>
+                        <a:t>Zero Trust (for example, through SASE)</a:t>
                       </a:r>
                       <a:endParaRPr lang="en-US" sz="1400" dirty="0">
                         <a:latin typeface="Calibri" charset="0"/>
@@ -13170,7 +13170,7 @@
                   <a:schemeClr val="tx2"/>
                 </a:solidFill>
               </a:rPr>
-              <a:t>Active Directory feeds the agency phone book, but nothing feeds Active Directory from HR. Titles, offices, phone numbers and managers stay wrong until someone files a ticket.</a:t>
+              <a:t>In many agencies, HR changes are not automatically reflected in Active Directory, which feeds the phone book. Titles, offices, phone numbers and managers stay wrong until someone files a ticket.</a:t>
             </a:r>
             <a:endParaRPr lang="en-US" sz="1400" dirty="0"/>
           </a:p>
@@ -16164,7 +16164,7 @@
                   <a:schemeClr val="tx2"/>
                 </a:solidFill>
               </a:rPr>
-              <a:t>OPM defines these elements and codes the same way for every agency. Map them to Entra ID and AD once, and the mapping still works if the HR vendor changes.</a:t>
+              <a:t>OPM standards give a common federal vocabulary that agencies map into a shared canonical model; the mapping holds if the HR vendor changes.</a:t>
             </a:r>
             <a:endParaRPr lang="en-US" sz="1350" dirty="0"/>
           </a:p>
@@ -21015,9 +21015,45 @@
                 <a:ea typeface="Cambria" pitchFamily="34" charset="-122"/>
                 <a:cs typeface="Cambria" pitchFamily="34" charset="-120"/>
               </a:rPr>
-              <a:t>HR → canonical model → Entra ID and AD → ICAM</a:t>
+              <a:t>Proposed physical mapping: HR to Entra ID and AD</a:t>
             </a:r>
             <a:endParaRPr lang="en-US" sz="3000" dirty="0"/>
+          </a:p>
+        </p:txBody>
+      </p:sp>
+      <p:sp>
+        <p:nvSpPr>
+          <p:cNvPr id="3" name="Mapping caveat"/>
+          <p:cNvSpPr txBox="1"/>
+          <p:nvPr/>
+        </p:nvSpPr>
+        <p:spPr>
+          <a:xfrm>
+            <a:off x="548640" y="6144768"/>
+            <a:ext cx="11064240" cy="228600"/>
+          </a:xfrm>
+          <a:prstGeom prst="rect">
+            <a:avLst/>
+          </a:prstGeom>
+          <a:noFill/>
+          <a:ln/>
+        </p:spPr>
+        <p:txBody>
+          <a:bodyPr wrap="square" lIns="0" tIns="0" rIns="0" bIns="0" rtlCol="0" anchor="t"/>
+          <a:lstStyle/>
+          <a:p>
+            <a:pPr indent="0" marL="0">
+              <a:buNone/>
+            </a:pPr>
+            <a:r>
+              <a:rPr lang="en-US" sz="1050" i="1" dirty="0">
+                <a:solidFill>
+                  <a:srgbClr val="64748B"/>
+                </a:solidFill>
+              </a:rPr>
+              <a:t>Target attributes are implementation proposals subject to existing-use inventory, security review and tenant validation.</a:t>
+            </a:r>
+            <a:endParaRPr lang="en-US" sz="1050" dirty="0"/>
           </a:p>
         </p:txBody>
       </p:sp>
@@ -23450,7 +23486,7 @@
       </p:graphicFrame>
       <p:sp>
         <p:nvSpPr>
-          <p:cNvPr id="4" name="Model rule 1"/>
+          <p:cNvPr id="5" name="Model rule 1"/>
           <p:cNvSpPr/>
           <p:nvPr/>
         </p:nvSpPr>
@@ -23484,7 +23520,7 @@
       </p:sp>
       <p:sp>
         <p:nvSpPr>
-          <p:cNvPr id="5" name="Icon FaCubes"/>
+          <p:cNvPr id="6" name="Icon FaCubes"/>
           <p:cNvSpPr/>
           <p:nvPr/>
         </p:nvSpPr>
@@ -23509,7 +23545,7 @@
       </p:sp>
       <p:pic>
         <p:nvPicPr>
-          <p:cNvPr id="6" name="Image 0" descr="C:\Users\whale\git\uiao\inbox\SSA-Interview\build\icons\FaCubes.png">    </p:cNvPr>
+          <p:cNvPr id="7" name="Image 0" descr="C:\Users\whale\git\uiao\inbox\SSA-Interview\build\icons\FaCubes.png">    </p:cNvPr>
           <p:cNvPicPr>
             <a:picLocks noChangeAspect="1"/>
           </p:cNvPicPr>
@@ -23533,7 +23569,7 @@
       </p:pic>
       <p:sp>
         <p:nvSpPr>
-          <p:cNvPr id="7" name="Model rule 1 text"/>
+          <p:cNvPr id="8" name="Model rule 1 text"/>
           <p:cNvSpPr txBox="1"/>
           <p:nvPr/>
         </p:nvSpPr>
@@ -23583,7 +23619,7 @@
       </p:sp>
       <p:sp>
         <p:nvSpPr>
-          <p:cNvPr id="8" name="Model rule 2"/>
+          <p:cNvPr id="9" name="Model rule 2"/>
           <p:cNvSpPr/>
           <p:nvPr/>
         </p:nvSpPr>
@@ -23617,7 +23653,7 @@
       </p:sp>
       <p:sp>
         <p:nvSpPr>
-          <p:cNvPr id="9" name="Icon FaHashtag"/>
+          <p:cNvPr id="10" name="Icon FaHashtag"/>
           <p:cNvSpPr/>
           <p:nvPr/>
         </p:nvSpPr>
@@ -23642,7 +23678,7 @@
       </p:sp>
       <p:pic>
         <p:nvPicPr>
-          <p:cNvPr id="10" name="Image 1" descr="C:\Users\whale\git\uiao\inbox\SSA-Interview\build\icons\FaHashtag.png">    </p:cNvPr>
+          <p:cNvPr id="11" name="Image 1" descr="C:\Users\whale\git\uiao\inbox\SSA-Interview\build\icons\FaHashtag.png">    </p:cNvPr>
           <p:cNvPicPr>
             <a:picLocks noChangeAspect="1"/>
           </p:cNvPicPr>
@@ -23666,7 +23702,7 @@
       </p:pic>
       <p:sp>
         <p:nvSpPr>
-          <p:cNvPr id="11" name="Model rule 2 text"/>
+          <p:cNvPr id="12" name="Model rule 2 text"/>
           <p:cNvSpPr txBox="1"/>
           <p:nvPr/>
         </p:nvSpPr>
@@ -23716,7 +23752,7 @@
       </p:sp>
       <p:sp>
         <p:nvSpPr>
-          <p:cNvPr id="12" name="Model rule 3"/>
+          <p:cNvPr id="13" name="Model rule 3"/>
           <p:cNvSpPr/>
           <p:nvPr/>
         </p:nvSpPr>
@@ -23750,7 +23786,7 @@
       </p:sp>
       <p:sp>
         <p:nvSpPr>
-          <p:cNvPr id="13" name="Icon FaTableList"/>
+          <p:cNvPr id="14" name="Icon FaTableList"/>
           <p:cNvSpPr/>
           <p:nvPr/>
         </p:nvSpPr>
@@ -23775,7 +23811,7 @@
       </p:sp>
       <p:pic>
         <p:nvPicPr>
-          <p:cNvPr id="14" name="Image 2" descr="C:\Users\whale\git\uiao\inbox\SSA-Interview\build\icons\FaTableList.png">    </p:cNvPr>
+          <p:cNvPr id="15" name="Image 2" descr="C:\Users\whale\git\uiao\inbox\SSA-Interview\build\icons\FaTableList.png">    </p:cNvPr>
           <p:cNvPicPr>
             <a:picLocks noChangeAspect="1"/>
           </p:cNvPicPr>
@@ -23799,7 +23835,7 @@
       </p:pic>
       <p:sp>
         <p:nvSpPr>
-          <p:cNvPr id="15" name="Model rule 3 text"/>
+          <p:cNvPr id="16" name="Model rule 3 text"/>
           <p:cNvSpPr txBox="1"/>
           <p:nvPr/>
         </p:nvSpPr>

--- a/presentations/hr-driven-identity-interview/HR_Driven_Identity_AnyAgency.pptx
+++ b/presentations/hr-driven-identity-interview/HR_Driven_Identity_AnyAgency.pptx
@@ -2786,7 +2786,7 @@
                   <a:srgbClr val="1F2A44"/>
                 </a:solidFill>
               </a:rPr>
-              <a:t>Mike Stratton</a:t>
+              <a:t>Michael F. Stratton</a:t>
             </a:r>
             <a:endParaRPr lang="en-US" sz="1600" dirty="0"/>
           </a:p>
@@ -2910,7 +2910,13 @@
       </p:sp>
       <p:sp>
         <p:nvSpPr>
-          <p:cNvPr id="4" name="LM 1.1"/>
+          <p:cNvPr id="4" name="LM 1.1" descr="">
+            <a:extLst>
+              <a:ext uri="{C183D7F6-B498-43B3-948B-1728B52AA6E4}">
+                <adec:decorative xmlns:adec="http://schemas.microsoft.com/office/drawing/2017/decorative" val="1"/>
+              </a:ext>
+            </a:extLst>
+          </p:cNvPr>
           <p:cNvSpPr/>
           <p:nvPr/>
         </p:nvSpPr>
@@ -2980,7 +2986,13 @@
       </p:sp>
       <p:sp>
         <p:nvSpPr>
-          <p:cNvPr id="6" name="Shape 4"/>
+          <p:cNvPr id="6" name="Shape 4" descr="">
+            <a:extLst>
+              <a:ext uri="{C183D7F6-B498-43B3-948B-1728B52AA6E4}">
+                <adec:decorative xmlns:adec="http://schemas.microsoft.com/office/drawing/2017/decorative" val="1"/>
+              </a:ext>
+            </a:extLst>
+          </p:cNvPr>
           <p:cNvSpPr/>
           <p:nvPr/>
         </p:nvSpPr>
@@ -3004,7 +3016,13 @@
       </p:sp>
       <p:sp>
         <p:nvSpPr>
-          <p:cNvPr id="7" name="LM 1.2"/>
+          <p:cNvPr id="7" name="LM 1.2" descr="">
+            <a:extLst>
+              <a:ext uri="{C183D7F6-B498-43B3-948B-1728B52AA6E4}">
+                <adec:decorative xmlns:adec="http://schemas.microsoft.com/office/drawing/2017/decorative" val="1"/>
+              </a:ext>
+            </a:extLst>
+          </p:cNvPr>
           <p:cNvSpPr/>
           <p:nvPr/>
         </p:nvSpPr>
@@ -3074,7 +3092,13 @@
       </p:sp>
       <p:sp>
         <p:nvSpPr>
-          <p:cNvPr id="9" name="Shape 7"/>
+          <p:cNvPr id="9" name="Shape 7" descr="">
+            <a:extLst>
+              <a:ext uri="{C183D7F6-B498-43B3-948B-1728B52AA6E4}">
+                <adec:decorative xmlns:adec="http://schemas.microsoft.com/office/drawing/2017/decorative" val="1"/>
+              </a:ext>
+            </a:extLst>
+          </p:cNvPr>
           <p:cNvSpPr/>
           <p:nvPr/>
         </p:nvSpPr>
@@ -3098,7 +3122,13 @@
       </p:sp>
       <p:sp>
         <p:nvSpPr>
-          <p:cNvPr id="10" name="LM 1.3"/>
+          <p:cNvPr id="10" name="LM 1.3" descr="">
+            <a:extLst>
+              <a:ext uri="{C183D7F6-B498-43B3-948B-1728B52AA6E4}">
+                <adec:decorative xmlns:adec="http://schemas.microsoft.com/office/drawing/2017/decorative" val="1"/>
+              </a:ext>
+            </a:extLst>
+          </p:cNvPr>
           <p:cNvSpPr/>
           <p:nvPr/>
         </p:nvSpPr>
@@ -3168,7 +3198,13 @@
       </p:sp>
       <p:sp>
         <p:nvSpPr>
-          <p:cNvPr id="12" name="Shape 10"/>
+          <p:cNvPr id="12" name="Shape 10" descr="">
+            <a:extLst>
+              <a:ext uri="{C183D7F6-B498-43B3-948B-1728B52AA6E4}">
+                <adec:decorative xmlns:adec="http://schemas.microsoft.com/office/drawing/2017/decorative" val="1"/>
+              </a:ext>
+            </a:extLst>
+          </p:cNvPr>
           <p:cNvSpPr/>
           <p:nvPr/>
         </p:nvSpPr>
@@ -3192,7 +3228,13 @@
       </p:sp>
       <p:sp>
         <p:nvSpPr>
-          <p:cNvPr id="13" name="LM 1.4"/>
+          <p:cNvPr id="13" name="LM 1.4" descr="">
+            <a:extLst>
+              <a:ext uri="{C183D7F6-B498-43B3-948B-1728B52AA6E4}">
+                <adec:decorative xmlns:adec="http://schemas.microsoft.com/office/drawing/2017/decorative" val="1"/>
+              </a:ext>
+            </a:extLst>
+          </p:cNvPr>
           <p:cNvSpPr/>
           <p:nvPr/>
         </p:nvSpPr>
@@ -3262,7 +3304,13 @@
       </p:sp>
       <p:sp>
         <p:nvSpPr>
-          <p:cNvPr id="15" name="Shape 13"/>
+          <p:cNvPr id="15" name="Shape 13" descr="">
+            <a:extLst>
+              <a:ext uri="{C183D7F6-B498-43B3-948B-1728B52AA6E4}">
+                <adec:decorative xmlns:adec="http://schemas.microsoft.com/office/drawing/2017/decorative" val="1"/>
+              </a:ext>
+            </a:extLst>
+          </p:cNvPr>
           <p:cNvSpPr/>
           <p:nvPr/>
         </p:nvSpPr>
@@ -3286,7 +3334,13 @@
       </p:sp>
       <p:sp>
         <p:nvSpPr>
-          <p:cNvPr id="16" name="LM 1.5"/>
+          <p:cNvPr id="16" name="LM 1.5" descr="">
+            <a:extLst>
+              <a:ext uri="{C183D7F6-B498-43B3-948B-1728B52AA6E4}">
+                <adec:decorative xmlns:adec="http://schemas.microsoft.com/office/drawing/2017/decorative" val="1"/>
+              </a:ext>
+            </a:extLst>
+          </p:cNvPr>
           <p:cNvSpPr/>
           <p:nvPr/>
         </p:nvSpPr>
@@ -3392,7 +3446,13 @@
       </p:sp>
       <p:sp>
         <p:nvSpPr>
-          <p:cNvPr id="19" name="LM 2.1"/>
+          <p:cNvPr id="19" name="LM 2.1" descr="">
+            <a:extLst>
+              <a:ext uri="{C183D7F6-B498-43B3-948B-1728B52AA6E4}">
+                <adec:decorative xmlns:adec="http://schemas.microsoft.com/office/drawing/2017/decorative" val="1"/>
+              </a:ext>
+            </a:extLst>
+          </p:cNvPr>
           <p:cNvSpPr/>
           <p:nvPr/>
         </p:nvSpPr>
@@ -3462,7 +3522,13 @@
       </p:sp>
       <p:sp>
         <p:nvSpPr>
-          <p:cNvPr id="21" name="Shape 19"/>
+          <p:cNvPr id="21" name="Shape 19" descr="">
+            <a:extLst>
+              <a:ext uri="{C183D7F6-B498-43B3-948B-1728B52AA6E4}">
+                <adec:decorative xmlns:adec="http://schemas.microsoft.com/office/drawing/2017/decorative" val="1"/>
+              </a:ext>
+            </a:extLst>
+          </p:cNvPr>
           <p:cNvSpPr/>
           <p:nvPr/>
         </p:nvSpPr>
@@ -3486,7 +3552,13 @@
       </p:sp>
       <p:sp>
         <p:nvSpPr>
-          <p:cNvPr id="22" name="LM 2.2"/>
+          <p:cNvPr id="22" name="LM 2.2" descr="">
+            <a:extLst>
+              <a:ext uri="{C183D7F6-B498-43B3-948B-1728B52AA6E4}">
+                <adec:decorative xmlns:adec="http://schemas.microsoft.com/office/drawing/2017/decorative" val="1"/>
+              </a:ext>
+            </a:extLst>
+          </p:cNvPr>
           <p:cNvSpPr/>
           <p:nvPr/>
         </p:nvSpPr>
@@ -3556,7 +3628,13 @@
       </p:sp>
       <p:sp>
         <p:nvSpPr>
-          <p:cNvPr id="24" name="Shape 22"/>
+          <p:cNvPr id="24" name="Shape 22" descr="">
+            <a:extLst>
+              <a:ext uri="{C183D7F6-B498-43B3-948B-1728B52AA6E4}">
+                <adec:decorative xmlns:adec="http://schemas.microsoft.com/office/drawing/2017/decorative" val="1"/>
+              </a:ext>
+            </a:extLst>
+          </p:cNvPr>
           <p:cNvSpPr/>
           <p:nvPr/>
         </p:nvSpPr>
@@ -3580,7 +3658,13 @@
       </p:sp>
       <p:sp>
         <p:nvSpPr>
-          <p:cNvPr id="25" name="LM 2.3"/>
+          <p:cNvPr id="25" name="LM 2.3" descr="">
+            <a:extLst>
+              <a:ext uri="{C183D7F6-B498-43B3-948B-1728B52AA6E4}">
+                <adec:decorative xmlns:adec="http://schemas.microsoft.com/office/drawing/2017/decorative" val="1"/>
+              </a:ext>
+            </a:extLst>
+          </p:cNvPr>
           <p:cNvSpPr/>
           <p:nvPr/>
         </p:nvSpPr>
@@ -3650,7 +3734,13 @@
       </p:sp>
       <p:sp>
         <p:nvSpPr>
-          <p:cNvPr id="27" name="Shape 25"/>
+          <p:cNvPr id="27" name="Shape 25" descr="">
+            <a:extLst>
+              <a:ext uri="{C183D7F6-B498-43B3-948B-1728B52AA6E4}">
+                <adec:decorative xmlns:adec="http://schemas.microsoft.com/office/drawing/2017/decorative" val="1"/>
+              </a:ext>
+            </a:extLst>
+          </p:cNvPr>
           <p:cNvSpPr/>
           <p:nvPr/>
         </p:nvSpPr>
@@ -3674,7 +3764,13 @@
       </p:sp>
       <p:sp>
         <p:nvSpPr>
-          <p:cNvPr id="28" name="LM 2.4"/>
+          <p:cNvPr id="28" name="LM 2.4" descr="">
+            <a:extLst>
+              <a:ext uri="{C183D7F6-B498-43B3-948B-1728B52AA6E4}">
+                <adec:decorative xmlns:adec="http://schemas.microsoft.com/office/drawing/2017/decorative" val="1"/>
+              </a:ext>
+            </a:extLst>
+          </p:cNvPr>
           <p:cNvSpPr/>
           <p:nvPr/>
         </p:nvSpPr>
@@ -3744,7 +3840,13 @@
       </p:sp>
       <p:sp>
         <p:nvSpPr>
-          <p:cNvPr id="30" name="Shape 28"/>
+          <p:cNvPr id="30" name="Shape 28" descr="">
+            <a:extLst>
+              <a:ext uri="{C183D7F6-B498-43B3-948B-1728B52AA6E4}">
+                <adec:decorative xmlns:adec="http://schemas.microsoft.com/office/drawing/2017/decorative" val="1"/>
+              </a:ext>
+            </a:extLst>
+          </p:cNvPr>
           <p:cNvSpPr/>
           <p:nvPr/>
         </p:nvSpPr>
@@ -3768,7 +3870,13 @@
       </p:sp>
       <p:sp>
         <p:nvSpPr>
-          <p:cNvPr id="31" name="LM 2.5"/>
+          <p:cNvPr id="31" name="LM 2.5" descr="">
+            <a:extLst>
+              <a:ext uri="{C183D7F6-B498-43B3-948B-1728B52AA6E4}">
+                <adec:decorative xmlns:adec="http://schemas.microsoft.com/office/drawing/2017/decorative" val="1"/>
+              </a:ext>
+            </a:extLst>
+          </p:cNvPr>
           <p:cNvSpPr/>
           <p:nvPr/>
         </p:nvSpPr>
@@ -3857,7 +3965,7 @@
         <a:graphic>
           <a:graphicData uri="http://schemas.openxmlformats.org/drawingml/2006/table">
             <a:tbl>
-              <a:tblPr/>
+              <a:tblPr firstRow="1" bandRow="1"/>
               <a:tblGrid>
                 <a:gridCol w="2103120"/>
                 <a:gridCol w="4480560"/>
@@ -4587,7 +4695,13 @@
       </p:sp>
       <p:sp>
         <p:nvSpPr>
-          <p:cNvPr id="3" name="Credentials card"/>
+          <p:cNvPr id="3" name="Credentials card" descr="">
+            <a:extLst>
+              <a:ext uri="{C183D7F6-B498-43B3-948B-1728B52AA6E4}">
+                <adec:decorative xmlns:adec="http://schemas.microsoft.com/office/drawing/2017/decorative" val="1"/>
+              </a:ext>
+            </a:extLst>
+          </p:cNvPr>
           <p:cNvSpPr/>
           <p:nvPr/>
         </p:nvSpPr>
@@ -4621,7 +4735,13 @@
       </p:sp>
       <p:sp>
         <p:nvSpPr>
-          <p:cNvPr id="4" name="Icon FaIdCard"/>
+          <p:cNvPr id="4" name="Icon FaIdCard" descr="">
+            <a:extLst>
+              <a:ext uri="{C183D7F6-B498-43B3-948B-1728B52AA6E4}">
+                <adec:decorative xmlns:adec="http://schemas.microsoft.com/office/drawing/2017/decorative" val="1"/>
+              </a:ext>
+            </a:extLst>
+          </p:cNvPr>
           <p:cNvSpPr/>
           <p:nvPr/>
         </p:nvSpPr>
@@ -4646,7 +4766,13 @@
       </p:sp>
       <p:pic>
         <p:nvPicPr>
-          <p:cNvPr id="5" name="Image 0" descr="C:\Users\whale\git\uiao\inbox\SSA-Interview\build\icons\FaIdCard.png">    </p:cNvPr>
+          <p:cNvPr id="5" name="Image 0" descr="">
+            <a:extLst>
+              <a:ext uri="{C183D7F6-B498-43B3-948B-1728B52AA6E4}">
+                <adec:decorative xmlns:adec="http://schemas.microsoft.com/office/drawing/2017/decorative" val="1"/>
+              </a:ext>
+            </a:extLst>
+          </p:cNvPr>
           <p:cNvPicPr>
             <a:picLocks noChangeAspect="1"/>
           </p:cNvPicPr>
@@ -4785,7 +4911,13 @@
       </p:sp>
       <p:sp>
         <p:nvSpPr>
-          <p:cNvPr id="8" name="Assurance card"/>
+          <p:cNvPr id="8" name="Assurance card" descr="">
+            <a:extLst>
+              <a:ext uri="{C183D7F6-B498-43B3-948B-1728B52AA6E4}">
+                <adec:decorative xmlns:adec="http://schemas.microsoft.com/office/drawing/2017/decorative" val="1"/>
+              </a:ext>
+            </a:extLst>
+          </p:cNvPr>
           <p:cNvSpPr/>
           <p:nvPr/>
         </p:nvSpPr>
@@ -4819,7 +4951,13 @@
       </p:sp>
       <p:sp>
         <p:nvSpPr>
-          <p:cNvPr id="9" name="Icon FaFingerprint"/>
+          <p:cNvPr id="9" name="Icon FaFingerprint" descr="">
+            <a:extLst>
+              <a:ext uri="{C183D7F6-B498-43B3-948B-1728B52AA6E4}">
+                <adec:decorative xmlns:adec="http://schemas.microsoft.com/office/drawing/2017/decorative" val="1"/>
+              </a:ext>
+            </a:extLst>
+          </p:cNvPr>
           <p:cNvSpPr/>
           <p:nvPr/>
         </p:nvSpPr>
@@ -4844,7 +4982,13 @@
       </p:sp>
       <p:pic>
         <p:nvPicPr>
-          <p:cNvPr id="10" name="Image 1" descr="C:\Users\whale\git\uiao\inbox\SSA-Interview\build\icons\FaFingerprint.png">    </p:cNvPr>
+          <p:cNvPr id="10" name="Image 1" descr="">
+            <a:extLst>
+              <a:ext uri="{C183D7F6-B498-43B3-948B-1728B52AA6E4}">
+                <adec:decorative xmlns:adec="http://schemas.microsoft.com/office/drawing/2017/decorative" val="1"/>
+              </a:ext>
+            </a:extLst>
+          </p:cNvPr>
           <p:cNvPicPr>
             <a:picLocks noChangeAspect="1"/>
           </p:cNvPicPr>
@@ -4983,7 +5127,13 @@
       </p:sp>
       <p:sp>
         <p:nvSpPr>
-          <p:cNvPr id="13" name="Access card"/>
+          <p:cNvPr id="13" name="Access card" descr="">
+            <a:extLst>
+              <a:ext uri="{C183D7F6-B498-43B3-948B-1728B52AA6E4}">
+                <adec:decorative xmlns:adec="http://schemas.microsoft.com/office/drawing/2017/decorative" val="1"/>
+              </a:ext>
+            </a:extLst>
+          </p:cNvPr>
           <p:cNvSpPr/>
           <p:nvPr/>
         </p:nvSpPr>
@@ -5017,7 +5167,13 @@
       </p:sp>
       <p:sp>
         <p:nvSpPr>
-          <p:cNvPr id="14" name="Icon FaKey"/>
+          <p:cNvPr id="14" name="Icon FaKey" descr="">
+            <a:extLst>
+              <a:ext uri="{C183D7F6-B498-43B3-948B-1728B52AA6E4}">
+                <adec:decorative xmlns:adec="http://schemas.microsoft.com/office/drawing/2017/decorative" val="1"/>
+              </a:ext>
+            </a:extLst>
+          </p:cNvPr>
           <p:cNvSpPr/>
           <p:nvPr/>
         </p:nvSpPr>
@@ -5042,7 +5198,13 @@
       </p:sp>
       <p:pic>
         <p:nvPicPr>
-          <p:cNvPr id="15" name="Image 2" descr="C:\Users\whale\git\uiao\inbox\SSA-Interview\build\icons\FaKey.png">    </p:cNvPr>
+          <p:cNvPr id="15" name="Image 2" descr="">
+            <a:extLst>
+              <a:ext uri="{C183D7F6-B498-43B3-948B-1728B52AA6E4}">
+                <adec:decorative xmlns:adec="http://schemas.microsoft.com/office/drawing/2017/decorative" val="1"/>
+              </a:ext>
+            </a:extLst>
+          </p:cNvPr>
           <p:cNvPicPr>
             <a:picLocks noChangeAspect="1"/>
           </p:cNvPicPr>
@@ -5181,7 +5343,13 @@
       </p:sp>
       <p:sp>
         <p:nvSpPr>
-          <p:cNvPr id="18" name="ICAM takeaway"/>
+          <p:cNvPr id="18" name="ICAM takeaway" descr="">
+            <a:extLst>
+              <a:ext uri="{C183D7F6-B498-43B3-948B-1728B52AA6E4}">
+                <adec:decorative xmlns:adec="http://schemas.microsoft.com/office/drawing/2017/decorative" val="1"/>
+              </a:ext>
+            </a:extLst>
+          </p:cNvPr>
           <p:cNvSpPr/>
           <p:nvPr/>
         </p:nvSpPr>
@@ -5373,7 +5541,13 @@
       </p:sp>
       <p:sp>
         <p:nvSpPr>
-          <p:cNvPr id="3" name="Privacy 1"/>
+          <p:cNvPr id="3" name="Privacy 1" descr="">
+            <a:extLst>
+              <a:ext uri="{C183D7F6-B498-43B3-948B-1728B52AA6E4}">
+                <adec:decorative xmlns:adec="http://schemas.microsoft.com/office/drawing/2017/decorative" val="1"/>
+              </a:ext>
+            </a:extLst>
+          </p:cNvPr>
           <p:cNvSpPr/>
           <p:nvPr/>
         </p:nvSpPr>
@@ -5407,7 +5581,13 @@
       </p:sp>
       <p:sp>
         <p:nvSpPr>
-          <p:cNvPr id="4" name="Icon FaScaleBalanced"/>
+          <p:cNvPr id="4" name="Icon FaScaleBalanced" descr="">
+            <a:extLst>
+              <a:ext uri="{C183D7F6-B498-43B3-948B-1728B52AA6E4}">
+                <adec:decorative xmlns:adec="http://schemas.microsoft.com/office/drawing/2017/decorative" val="1"/>
+              </a:ext>
+            </a:extLst>
+          </p:cNvPr>
           <p:cNvSpPr/>
           <p:nvPr/>
         </p:nvSpPr>
@@ -5432,7 +5612,13 @@
       </p:sp>
       <p:pic>
         <p:nvPicPr>
-          <p:cNvPr id="5" name="Image 0" descr="C:\Users\whale\git\uiao\inbox\SSA-Interview\build\icons\FaScaleBalanced.png">    </p:cNvPr>
+          <p:cNvPr id="5" name="Image 0" descr="">
+            <a:extLst>
+              <a:ext uri="{C183D7F6-B498-43B3-948B-1728B52AA6E4}">
+                <adec:decorative xmlns:adec="http://schemas.microsoft.com/office/drawing/2017/decorative" val="1"/>
+              </a:ext>
+            </a:extLst>
+          </p:cNvPr>
           <p:cNvPicPr>
             <a:picLocks noChangeAspect="1"/>
           </p:cNvPicPr>
@@ -5515,7 +5701,13 @@
       </p:sp>
       <p:sp>
         <p:nvSpPr>
-          <p:cNvPr id="7" name="Privacy 2"/>
+          <p:cNvPr id="7" name="Privacy 2" descr="">
+            <a:extLst>
+              <a:ext uri="{C183D7F6-B498-43B3-948B-1728B52AA6E4}">
+                <adec:decorative xmlns:adec="http://schemas.microsoft.com/office/drawing/2017/decorative" val="1"/>
+              </a:ext>
+            </a:extLst>
+          </p:cNvPr>
           <p:cNvSpPr/>
           <p:nvPr/>
         </p:nvSpPr>
@@ -5549,7 +5741,13 @@
       </p:sp>
       <p:sp>
         <p:nvSpPr>
-          <p:cNvPr id="8" name="Icon FaFilter"/>
+          <p:cNvPr id="8" name="Icon FaFilter" descr="">
+            <a:extLst>
+              <a:ext uri="{C183D7F6-B498-43B3-948B-1728B52AA6E4}">
+                <adec:decorative xmlns:adec="http://schemas.microsoft.com/office/drawing/2017/decorative" val="1"/>
+              </a:ext>
+            </a:extLst>
+          </p:cNvPr>
           <p:cNvSpPr/>
           <p:nvPr/>
         </p:nvSpPr>
@@ -5574,7 +5772,13 @@
       </p:sp>
       <p:pic>
         <p:nvPicPr>
-          <p:cNvPr id="9" name="Image 1" descr="C:\Users\whale\git\uiao\inbox\SSA-Interview\build\icons\FaFilter.png">    </p:cNvPr>
+          <p:cNvPr id="9" name="Image 1" descr="">
+            <a:extLst>
+              <a:ext uri="{C183D7F6-B498-43B3-948B-1728B52AA6E4}">
+                <adec:decorative xmlns:adec="http://schemas.microsoft.com/office/drawing/2017/decorative" val="1"/>
+              </a:ext>
+            </a:extLst>
+          </p:cNvPr>
           <p:cNvPicPr>
             <a:picLocks noChangeAspect="1"/>
           </p:cNvPicPr>
@@ -5657,7 +5861,13 @@
       </p:sp>
       <p:sp>
         <p:nvSpPr>
-          <p:cNvPr id="11" name="Privacy 3"/>
+          <p:cNvPr id="11" name="Privacy 3" descr="">
+            <a:extLst>
+              <a:ext uri="{C183D7F6-B498-43B3-948B-1728B52AA6E4}">
+                <adec:decorative xmlns:adec="http://schemas.microsoft.com/office/drawing/2017/decorative" val="1"/>
+              </a:ext>
+            </a:extLst>
+          </p:cNvPr>
           <p:cNvSpPr/>
           <p:nvPr/>
         </p:nvSpPr>
@@ -5691,7 +5901,13 @@
       </p:sp>
       <p:sp>
         <p:nvSpPr>
-          <p:cNvPr id="12" name="Icon FaFileShield"/>
+          <p:cNvPr id="12" name="Icon FaFileShield" descr="">
+            <a:extLst>
+              <a:ext uri="{C183D7F6-B498-43B3-948B-1728B52AA6E4}">
+                <adec:decorative xmlns:adec="http://schemas.microsoft.com/office/drawing/2017/decorative" val="1"/>
+              </a:ext>
+            </a:extLst>
+          </p:cNvPr>
           <p:cNvSpPr/>
           <p:nvPr/>
         </p:nvSpPr>
@@ -5716,7 +5932,13 @@
       </p:sp>
       <p:pic>
         <p:nvPicPr>
-          <p:cNvPr id="13" name="Image 2" descr="C:\Users\whale\git\uiao\inbox\SSA-Interview\build\icons\FaFileShield.png">    </p:cNvPr>
+          <p:cNvPr id="13" name="Image 2" descr="">
+            <a:extLst>
+              <a:ext uri="{C183D7F6-B498-43B3-948B-1728B52AA6E4}">
+                <adec:decorative xmlns:adec="http://schemas.microsoft.com/office/drawing/2017/decorative" val="1"/>
+              </a:ext>
+            </a:extLst>
+          </p:cNvPr>
           <p:cNvPicPr>
             <a:picLocks noChangeAspect="1"/>
           </p:cNvPicPr>
@@ -5799,7 +6021,13 @@
       </p:sp>
       <p:sp>
         <p:nvSpPr>
-          <p:cNvPr id="15" name="Privacy 4"/>
+          <p:cNvPr id="15" name="Privacy 4" descr="">
+            <a:extLst>
+              <a:ext uri="{C183D7F6-B498-43B3-948B-1728B52AA6E4}">
+                <adec:decorative xmlns:adec="http://schemas.microsoft.com/office/drawing/2017/decorative" val="1"/>
+              </a:ext>
+            </a:extLst>
+          </p:cNvPr>
           <p:cNvSpPr/>
           <p:nvPr/>
         </p:nvSpPr>
@@ -5833,7 +6061,13 @@
       </p:sp>
       <p:sp>
         <p:nvSpPr>
-          <p:cNvPr id="16" name="Icon FaLock"/>
+          <p:cNvPr id="16" name="Icon FaLock" descr="">
+            <a:extLst>
+              <a:ext uri="{C183D7F6-B498-43B3-948B-1728B52AA6E4}">
+                <adec:decorative xmlns:adec="http://schemas.microsoft.com/office/drawing/2017/decorative" val="1"/>
+              </a:ext>
+            </a:extLst>
+          </p:cNvPr>
           <p:cNvSpPr/>
           <p:nvPr/>
         </p:nvSpPr>
@@ -5858,7 +6092,13 @@
       </p:sp>
       <p:pic>
         <p:nvPicPr>
-          <p:cNvPr id="17" name="Image 3" descr="C:\Users\whale\git\uiao\inbox\SSA-Interview\build\icons\FaLock.png">    </p:cNvPr>
+          <p:cNvPr id="17" name="Image 3" descr="">
+            <a:extLst>
+              <a:ext uri="{C183D7F6-B498-43B3-948B-1728B52AA6E4}">
+                <adec:decorative xmlns:adec="http://schemas.microsoft.com/office/drawing/2017/decorative" val="1"/>
+              </a:ext>
+            </a:extLst>
+          </p:cNvPr>
           <p:cNvPicPr>
             <a:picLocks noChangeAspect="1"/>
           </p:cNvPicPr>
@@ -5941,7 +6181,13 @@
       </p:sp>
       <p:sp>
         <p:nvSpPr>
-          <p:cNvPr id="19" name="Privacy takeaway"/>
+          <p:cNvPr id="19" name="Privacy takeaway" descr="">
+            <a:extLst>
+              <a:ext uri="{C183D7F6-B498-43B3-948B-1728B52AA6E4}">
+                <adec:decorative xmlns:adec="http://schemas.microsoft.com/office/drawing/2017/decorative" val="1"/>
+              </a:ext>
+            </a:extLst>
+          </p:cNvPr>
           <p:cNvSpPr/>
           <p:nvPr/>
         </p:nvSpPr>
@@ -6133,7 +6379,13 @@
       </p:sp>
       <p:sp>
         <p:nvSpPr>
-          <p:cNvPr id="3" name="Gov 1"/>
+          <p:cNvPr id="3" name="Gov 1" descr="">
+            <a:extLst>
+              <a:ext uri="{C183D7F6-B498-43B3-948B-1728B52AA6E4}">
+                <adec:decorative xmlns:adec="http://schemas.microsoft.com/office/drawing/2017/decorative" val="1"/>
+              </a:ext>
+            </a:extLst>
+          </p:cNvPr>
           <p:cNvSpPr/>
           <p:nvPr/>
         </p:nvSpPr>
@@ -6167,7 +6419,13 @@
       </p:sp>
       <p:sp>
         <p:nvSpPr>
-          <p:cNvPr id="4" name="Icon FaSitemap"/>
+          <p:cNvPr id="4" name="Icon FaSitemap" descr="">
+            <a:extLst>
+              <a:ext uri="{C183D7F6-B498-43B3-948B-1728B52AA6E4}">
+                <adec:decorative xmlns:adec="http://schemas.microsoft.com/office/drawing/2017/decorative" val="1"/>
+              </a:ext>
+            </a:extLst>
+          </p:cNvPr>
           <p:cNvSpPr/>
           <p:nvPr/>
         </p:nvSpPr>
@@ -6192,7 +6450,13 @@
       </p:sp>
       <p:pic>
         <p:nvPicPr>
-          <p:cNvPr id="5" name="Image 0" descr="C:\Users\whale\git\uiao\inbox\SSA-Interview\build\icons\FaSitemap.png">    </p:cNvPr>
+          <p:cNvPr id="5" name="Image 0" descr="">
+            <a:extLst>
+              <a:ext uri="{C183D7F6-B498-43B3-948B-1728B52AA6E4}">
+                <adec:decorative xmlns:adec="http://schemas.microsoft.com/office/drawing/2017/decorative" val="1"/>
+              </a:ext>
+            </a:extLst>
+          </p:cNvPr>
           <p:cNvPicPr>
             <a:picLocks noChangeAspect="1"/>
           </p:cNvPicPr>
@@ -6272,7 +6536,13 @@
       </p:sp>
       <p:sp>
         <p:nvSpPr>
-          <p:cNvPr id="7" name="Gov 2"/>
+          <p:cNvPr id="7" name="Gov 2" descr="">
+            <a:extLst>
+              <a:ext uri="{C183D7F6-B498-43B3-948B-1728B52AA6E4}">
+                <adec:decorative xmlns:adec="http://schemas.microsoft.com/office/drawing/2017/decorative" val="1"/>
+              </a:ext>
+            </a:extLst>
+          </p:cNvPr>
           <p:cNvSpPr/>
           <p:nvPr/>
         </p:nvSpPr>
@@ -6306,7 +6576,13 @@
       </p:sp>
       <p:sp>
         <p:nvSpPr>
-          <p:cNvPr id="8" name="Icon FaUserShield"/>
+          <p:cNvPr id="8" name="Icon FaUserShield" descr="">
+            <a:extLst>
+              <a:ext uri="{C183D7F6-B498-43B3-948B-1728B52AA6E4}">
+                <adec:decorative xmlns:adec="http://schemas.microsoft.com/office/drawing/2017/decorative" val="1"/>
+              </a:ext>
+            </a:extLst>
+          </p:cNvPr>
           <p:cNvSpPr/>
           <p:nvPr/>
         </p:nvSpPr>
@@ -6331,7 +6607,13 @@
       </p:sp>
       <p:pic>
         <p:nvPicPr>
-          <p:cNvPr id="9" name="Image 1" descr="C:\Users\whale\git\uiao\inbox\SSA-Interview\build\icons\FaUserShield.png">    </p:cNvPr>
+          <p:cNvPr id="9" name="Image 1" descr="">
+            <a:extLst>
+              <a:ext uri="{C183D7F6-B498-43B3-948B-1728B52AA6E4}">
+                <adec:decorative xmlns:adec="http://schemas.microsoft.com/office/drawing/2017/decorative" val="1"/>
+              </a:ext>
+            </a:extLst>
+          </p:cNvPr>
           <p:cNvPicPr>
             <a:picLocks noChangeAspect="1"/>
           </p:cNvPicPr>
@@ -6411,7 +6693,13 @@
       </p:sp>
       <p:sp>
         <p:nvSpPr>
-          <p:cNvPr id="11" name="Gov 3"/>
+          <p:cNvPr id="11" name="Gov 3" descr="">
+            <a:extLst>
+              <a:ext uri="{C183D7F6-B498-43B3-948B-1728B52AA6E4}">
+                <adec:decorative xmlns:adec="http://schemas.microsoft.com/office/drawing/2017/decorative" val="1"/>
+              </a:ext>
+            </a:extLst>
+          </p:cNvPr>
           <p:cNvSpPr/>
           <p:nvPr/>
         </p:nvSpPr>
@@ -6445,7 +6733,13 @@
       </p:sp>
       <p:sp>
         <p:nvSpPr>
-          <p:cNvPr id="12" name="Icon FaClipboardCheck"/>
+          <p:cNvPr id="12" name="Icon FaClipboardCheck" descr="">
+            <a:extLst>
+              <a:ext uri="{C183D7F6-B498-43B3-948B-1728B52AA6E4}">
+                <adec:decorative xmlns:adec="http://schemas.microsoft.com/office/drawing/2017/decorative" val="1"/>
+              </a:ext>
+            </a:extLst>
+          </p:cNvPr>
           <p:cNvSpPr/>
           <p:nvPr/>
         </p:nvSpPr>
@@ -6470,7 +6764,13 @@
       </p:sp>
       <p:pic>
         <p:nvPicPr>
-          <p:cNvPr id="13" name="Image 2" descr="C:\Users\whale\git\uiao\inbox\SSA-Interview\build\icons\FaClipboardCheck.png">    </p:cNvPr>
+          <p:cNvPr id="13" name="Image 2" descr="">
+            <a:extLst>
+              <a:ext uri="{C183D7F6-B498-43B3-948B-1728B52AA6E4}">
+                <adec:decorative xmlns:adec="http://schemas.microsoft.com/office/drawing/2017/decorative" val="1"/>
+              </a:ext>
+            </a:extLst>
+          </p:cNvPr>
           <p:cNvPicPr>
             <a:picLocks noChangeAspect="1"/>
           </p:cNvPicPr>
@@ -6550,7 +6850,13 @@
       </p:sp>
       <p:sp>
         <p:nvSpPr>
-          <p:cNvPr id="15" name="Gov 4"/>
+          <p:cNvPr id="15" name="Gov 4" descr="">
+            <a:extLst>
+              <a:ext uri="{C183D7F6-B498-43B3-948B-1728B52AA6E4}">
+                <adec:decorative xmlns:adec="http://schemas.microsoft.com/office/drawing/2017/decorative" val="1"/>
+              </a:ext>
+            </a:extLst>
+          </p:cNvPr>
           <p:cNvSpPr/>
           <p:nvPr/>
         </p:nvSpPr>
@@ -6584,7 +6890,13 @@
       </p:sp>
       <p:sp>
         <p:nvSpPr>
-          <p:cNvPr id="16" name="Icon FaPlugCircleXmark"/>
+          <p:cNvPr id="16" name="Icon FaPlugCircleXmark" descr="">
+            <a:extLst>
+              <a:ext uri="{C183D7F6-B498-43B3-948B-1728B52AA6E4}">
+                <adec:decorative xmlns:adec="http://schemas.microsoft.com/office/drawing/2017/decorative" val="1"/>
+              </a:ext>
+            </a:extLst>
+          </p:cNvPr>
           <p:cNvSpPr/>
           <p:nvPr/>
         </p:nvSpPr>
@@ -6609,7 +6921,13 @@
       </p:sp>
       <p:pic>
         <p:nvPicPr>
-          <p:cNvPr id="17" name="Image 3" descr="C:\Users\whale\git\uiao\inbox\SSA-Interview\build\icons\FaPlugCircleXmark.png">    </p:cNvPr>
+          <p:cNvPr id="17" name="Image 3" descr="">
+            <a:extLst>
+              <a:ext uri="{C183D7F6-B498-43B3-948B-1728B52AA6E4}">
+                <adec:decorative xmlns:adec="http://schemas.microsoft.com/office/drawing/2017/decorative" val="1"/>
+              </a:ext>
+            </a:extLst>
+          </p:cNvPr>
           <p:cNvPicPr>
             <a:picLocks noChangeAspect="1"/>
           </p:cNvPicPr>
@@ -6689,7 +7007,13 @@
       </p:sp>
       <p:sp>
         <p:nvSpPr>
-          <p:cNvPr id="19" name="Gov 5"/>
+          <p:cNvPr id="19" name="Gov 5" descr="">
+            <a:extLst>
+              <a:ext uri="{C183D7F6-B498-43B3-948B-1728B52AA6E4}">
+                <adec:decorative xmlns:adec="http://schemas.microsoft.com/office/drawing/2017/decorative" val="1"/>
+              </a:ext>
+            </a:extLst>
+          </p:cNvPr>
           <p:cNvSpPr/>
           <p:nvPr/>
         </p:nvSpPr>
@@ -6723,7 +7047,13 @@
       </p:sp>
       <p:sp>
         <p:nvSpPr>
-          <p:cNvPr id="20" name="Icon FaListCheck"/>
+          <p:cNvPr id="20" name="Icon FaListCheck" descr="">
+            <a:extLst>
+              <a:ext uri="{C183D7F6-B498-43B3-948B-1728B52AA6E4}">
+                <adec:decorative xmlns:adec="http://schemas.microsoft.com/office/drawing/2017/decorative" val="1"/>
+              </a:ext>
+            </a:extLst>
+          </p:cNvPr>
           <p:cNvSpPr/>
           <p:nvPr/>
         </p:nvSpPr>
@@ -6748,7 +7078,13 @@
       </p:sp>
       <p:pic>
         <p:nvPicPr>
-          <p:cNvPr id="21" name="Image 4" descr="C:\Users\whale\git\uiao\inbox\SSA-Interview\build\icons\FaListCheck.png">    </p:cNvPr>
+          <p:cNvPr id="21" name="Image 4" descr="">
+            <a:extLst>
+              <a:ext uri="{C183D7F6-B498-43B3-948B-1728B52AA6E4}">
+                <adec:decorative xmlns:adec="http://schemas.microsoft.com/office/drawing/2017/decorative" val="1"/>
+              </a:ext>
+            </a:extLst>
+          </p:cNvPr>
           <p:cNvPicPr>
             <a:picLocks noChangeAspect="1"/>
           </p:cNvPicPr>
@@ -6828,7 +7164,13 @@
       </p:sp>
       <p:sp>
         <p:nvSpPr>
-          <p:cNvPr id="23" name="Gov 6"/>
+          <p:cNvPr id="23" name="Gov 6" descr="">
+            <a:extLst>
+              <a:ext uri="{C183D7F6-B498-43B3-948B-1728B52AA6E4}">
+                <adec:decorative xmlns:adec="http://schemas.microsoft.com/office/drawing/2017/decorative" val="1"/>
+              </a:ext>
+            </a:extLst>
+          </p:cNvPr>
           <p:cNvSpPr/>
           <p:nvPr/>
         </p:nvSpPr>
@@ -6862,7 +7204,13 @@
       </p:sp>
       <p:sp>
         <p:nvSpPr>
-          <p:cNvPr id="24" name="Icon FaTriangleExclamation"/>
+          <p:cNvPr id="24" name="Icon FaTriangleExclamation" descr="">
+            <a:extLst>
+              <a:ext uri="{C183D7F6-B498-43B3-948B-1728B52AA6E4}">
+                <adec:decorative xmlns:adec="http://schemas.microsoft.com/office/drawing/2017/decorative" val="1"/>
+              </a:ext>
+            </a:extLst>
+          </p:cNvPr>
           <p:cNvSpPr/>
           <p:nvPr/>
         </p:nvSpPr>
@@ -6887,7 +7235,13 @@
       </p:sp>
       <p:pic>
         <p:nvPicPr>
-          <p:cNvPr id="25" name="Image 5" descr="C:\Users\whale\git\uiao\inbox\SSA-Interview\build\icons\FaTriangleExclamation.png">    </p:cNvPr>
+          <p:cNvPr id="25" name="Image 5" descr="">
+            <a:extLst>
+              <a:ext uri="{C183D7F6-B498-43B3-948B-1728B52AA6E4}">
+                <adec:decorative xmlns:adec="http://schemas.microsoft.com/office/drawing/2017/decorative" val="1"/>
+              </a:ext>
+            </a:extLst>
+          </p:cNvPr>
           <p:cNvPicPr>
             <a:picLocks noChangeAspect="1"/>
           </p:cNvPicPr>
@@ -6967,7 +7321,13 @@
       </p:sp>
       <p:sp>
         <p:nvSpPr>
-          <p:cNvPr id="27" name="Gov 7"/>
+          <p:cNvPr id="27" name="Gov 7" descr="">
+            <a:extLst>
+              <a:ext uri="{C183D7F6-B498-43B3-948B-1728B52AA6E4}">
+                <adec:decorative xmlns:adec="http://schemas.microsoft.com/office/drawing/2017/decorative" val="1"/>
+              </a:ext>
+            </a:extLst>
+          </p:cNvPr>
           <p:cNvSpPr/>
           <p:nvPr/>
         </p:nvSpPr>
@@ -7001,7 +7361,13 @@
       </p:sp>
       <p:sp>
         <p:nvSpPr>
-          <p:cNvPr id="28" name="Icon FaChartLine"/>
+          <p:cNvPr id="28" name="Icon FaChartLine" descr="">
+            <a:extLst>
+              <a:ext uri="{C183D7F6-B498-43B3-948B-1728B52AA6E4}">
+                <adec:decorative xmlns:adec="http://schemas.microsoft.com/office/drawing/2017/decorative" val="1"/>
+              </a:ext>
+            </a:extLst>
+          </p:cNvPr>
           <p:cNvSpPr/>
           <p:nvPr/>
         </p:nvSpPr>
@@ -7026,7 +7392,13 @@
       </p:sp>
       <p:pic>
         <p:nvPicPr>
-          <p:cNvPr id="29" name="Image 6" descr="C:\Users\whale\git\uiao\inbox\SSA-Interview\build\icons\FaChartLine.png">    </p:cNvPr>
+          <p:cNvPr id="29" name="Image 6" descr="">
+            <a:extLst>
+              <a:ext uri="{C183D7F6-B498-43B3-948B-1728B52AA6E4}">
+                <adec:decorative xmlns:adec="http://schemas.microsoft.com/office/drawing/2017/decorative" val="1"/>
+              </a:ext>
+            </a:extLst>
+          </p:cNvPr>
           <p:cNvPicPr>
             <a:picLocks noChangeAspect="1"/>
           </p:cNvPicPr>
@@ -7106,7 +7478,13 @@
       </p:sp>
       <p:sp>
         <p:nvSpPr>
-          <p:cNvPr id="31" name="Gov 8"/>
+          <p:cNvPr id="31" name="Gov 8" descr="">
+            <a:extLst>
+              <a:ext uri="{C183D7F6-B498-43B3-948B-1728B52AA6E4}">
+                <adec:decorative xmlns:adec="http://schemas.microsoft.com/office/drawing/2017/decorative" val="1"/>
+              </a:ext>
+            </a:extLst>
+          </p:cNvPr>
           <p:cNvSpPr/>
           <p:nvPr/>
         </p:nvSpPr>
@@ -7140,7 +7518,13 @@
       </p:sp>
       <p:sp>
         <p:nvSpPr>
-          <p:cNvPr id="32" name="Icon FaCodeBranch"/>
+          <p:cNvPr id="32" name="Icon FaCodeBranch" descr="">
+            <a:extLst>
+              <a:ext uri="{C183D7F6-B498-43B3-948B-1728B52AA6E4}">
+                <adec:decorative xmlns:adec="http://schemas.microsoft.com/office/drawing/2017/decorative" val="1"/>
+              </a:ext>
+            </a:extLst>
+          </p:cNvPr>
           <p:cNvSpPr/>
           <p:nvPr/>
         </p:nvSpPr>
@@ -7165,7 +7549,13 @@
       </p:sp>
       <p:pic>
         <p:nvPicPr>
-          <p:cNvPr id="33" name="Image 7" descr="C:\Users\whale\git\uiao\inbox\SSA-Interview\build\icons\FaCodeBranch.png">    </p:cNvPr>
+          <p:cNvPr id="33" name="Image 7" descr="">
+            <a:extLst>
+              <a:ext uri="{C183D7F6-B498-43B3-948B-1728B52AA6E4}">
+                <adec:decorative xmlns:adec="http://schemas.microsoft.com/office/drawing/2017/decorative" val="1"/>
+              </a:ext>
+            </a:extLst>
+          </p:cNvPr>
           <p:cNvPicPr>
             <a:picLocks noChangeAspect="1"/>
           </p:cNvPicPr>
@@ -7392,7 +7782,13 @@
       </p:sp>
       <p:sp>
         <p:nvSpPr>
-          <p:cNvPr id="3" name="Cross col 1"/>
+          <p:cNvPr id="3" name="Cross col 1" descr="">
+            <a:extLst>
+              <a:ext uri="{C183D7F6-B498-43B3-948B-1728B52AA6E4}">
+                <adec:decorative xmlns:adec="http://schemas.microsoft.com/office/drawing/2017/decorative" val="1"/>
+              </a:ext>
+            </a:extLst>
+          </p:cNvPr>
           <p:cNvSpPr/>
           <p:nvPr/>
         </p:nvSpPr>
@@ -7462,7 +7858,13 @@
       </p:sp>
       <p:sp>
         <p:nvSpPr>
-          <p:cNvPr id="5" name="Icon FaBuildingColumns"/>
+          <p:cNvPr id="5" name="Icon FaBuildingColumns" descr="">
+            <a:extLst>
+              <a:ext uri="{C183D7F6-B498-43B3-948B-1728B52AA6E4}">
+                <adec:decorative xmlns:adec="http://schemas.microsoft.com/office/drawing/2017/decorative" val="1"/>
+              </a:ext>
+            </a:extLst>
+          </p:cNvPr>
           <p:cNvSpPr/>
           <p:nvPr/>
         </p:nvSpPr>
@@ -7487,7 +7889,13 @@
       </p:sp>
       <p:pic>
         <p:nvPicPr>
-          <p:cNvPr id="6" name="Image 0" descr="C:\Users\whale\git\uiao\inbox\SSA-Interview\build\icons\FaBuildingColumns.png">    </p:cNvPr>
+          <p:cNvPr id="6" name="Image 0" descr="">
+            <a:extLst>
+              <a:ext uri="{C183D7F6-B498-43B3-948B-1728B52AA6E4}">
+                <adec:decorative xmlns:adec="http://schemas.microsoft.com/office/drawing/2017/decorative" val="1"/>
+              </a:ext>
+            </a:extLst>
+          </p:cNvPr>
           <p:cNvPicPr>
             <a:picLocks noChangeAspect="1"/>
           </p:cNvPicPr>
@@ -7567,7 +7975,13 @@
       </p:sp>
       <p:sp>
         <p:nvSpPr>
-          <p:cNvPr id="8" name="Icon FaRightLeft"/>
+          <p:cNvPr id="8" name="Icon FaRightLeft" descr="">
+            <a:extLst>
+              <a:ext uri="{C183D7F6-B498-43B3-948B-1728B52AA6E4}">
+                <adec:decorative xmlns:adec="http://schemas.microsoft.com/office/drawing/2017/decorative" val="1"/>
+              </a:ext>
+            </a:extLst>
+          </p:cNvPr>
           <p:cNvSpPr/>
           <p:nvPr/>
         </p:nvSpPr>
@@ -7592,7 +8006,13 @@
       </p:sp>
       <p:pic>
         <p:nvPicPr>
-          <p:cNvPr id="9" name="Image 1" descr="C:\Users\whale\git\uiao\inbox\SSA-Interview\build\icons\FaRightLeft.png">    </p:cNvPr>
+          <p:cNvPr id="9" name="Image 1" descr="">
+            <a:extLst>
+              <a:ext uri="{C183D7F6-B498-43B3-948B-1728B52AA6E4}">
+                <adec:decorative xmlns:adec="http://schemas.microsoft.com/office/drawing/2017/decorative" val="1"/>
+              </a:ext>
+            </a:extLst>
+          </p:cNvPr>
           <p:cNvPicPr>
             <a:picLocks noChangeAspect="1"/>
           </p:cNvPicPr>
@@ -7672,7 +8092,13 @@
       </p:sp>
       <p:sp>
         <p:nvSpPr>
-          <p:cNvPr id="11" name="Icon FaChartLine"/>
+          <p:cNvPr id="11" name="Icon FaChartLine" descr="">
+            <a:extLst>
+              <a:ext uri="{C183D7F6-B498-43B3-948B-1728B52AA6E4}">
+                <adec:decorative xmlns:adec="http://schemas.microsoft.com/office/drawing/2017/decorative" val="1"/>
+              </a:ext>
+            </a:extLst>
+          </p:cNvPr>
           <p:cNvSpPr/>
           <p:nvPr/>
         </p:nvSpPr>
@@ -7697,7 +8123,13 @@
       </p:sp>
       <p:pic>
         <p:nvPicPr>
-          <p:cNvPr id="12" name="Image 2" descr="C:\Users\whale\git\uiao\inbox\SSA-Interview\build\icons\FaChartLine.png">    </p:cNvPr>
+          <p:cNvPr id="12" name="Image 2" descr="">
+            <a:extLst>
+              <a:ext uri="{C183D7F6-B498-43B3-948B-1728B52AA6E4}">
+                <adec:decorative xmlns:adec="http://schemas.microsoft.com/office/drawing/2017/decorative" val="1"/>
+              </a:ext>
+            </a:extLst>
+          </p:cNvPr>
           <p:cNvPicPr>
             <a:picLocks noChangeAspect="1"/>
           </p:cNvPicPr>
@@ -7777,7 +8209,13 @@
       </p:sp>
       <p:sp>
         <p:nvSpPr>
-          <p:cNvPr id="14" name="Cross col 2"/>
+          <p:cNvPr id="14" name="Cross col 2" descr="">
+            <a:extLst>
+              <a:ext uri="{C183D7F6-B498-43B3-948B-1728B52AA6E4}">
+                <adec:decorative xmlns:adec="http://schemas.microsoft.com/office/drawing/2017/decorative" val="1"/>
+              </a:ext>
+            </a:extLst>
+          </p:cNvPr>
           <p:cNvSpPr/>
           <p:nvPr/>
         </p:nvSpPr>
@@ -7847,7 +8285,13 @@
       </p:sp>
       <p:sp>
         <p:nvSpPr>
-          <p:cNvPr id="16" name="Icon FaPeopleArrows"/>
+          <p:cNvPr id="16" name="Icon FaPeopleArrows" descr="">
+            <a:extLst>
+              <a:ext uri="{C183D7F6-B498-43B3-948B-1728B52AA6E4}">
+                <adec:decorative xmlns:adec="http://schemas.microsoft.com/office/drawing/2017/decorative" val="1"/>
+              </a:ext>
+            </a:extLst>
+          </p:cNvPr>
           <p:cNvSpPr/>
           <p:nvPr/>
         </p:nvSpPr>
@@ -7872,7 +8316,13 @@
       </p:sp>
       <p:pic>
         <p:nvPicPr>
-          <p:cNvPr id="17" name="Image 3" descr="C:\Users\whale\git\uiao\inbox\SSA-Interview\build\icons\FaPeopleArrows.png">    </p:cNvPr>
+          <p:cNvPr id="17" name="Image 3" descr="">
+            <a:extLst>
+              <a:ext uri="{C183D7F6-B498-43B3-948B-1728B52AA6E4}">
+                <adec:decorative xmlns:adec="http://schemas.microsoft.com/office/drawing/2017/decorative" val="1"/>
+              </a:ext>
+            </a:extLst>
+          </p:cNvPr>
           <p:cNvPicPr>
             <a:picLocks noChangeAspect="1"/>
           </p:cNvPicPr>
@@ -7952,7 +8402,13 @@
       </p:sp>
       <p:sp>
         <p:nvSpPr>
-          <p:cNvPr id="19" name="Icon FaScaleBalanced"/>
+          <p:cNvPr id="19" name="Icon FaScaleBalanced" descr="">
+            <a:extLst>
+              <a:ext uri="{C183D7F6-B498-43B3-948B-1728B52AA6E4}">
+                <adec:decorative xmlns:adec="http://schemas.microsoft.com/office/drawing/2017/decorative" val="1"/>
+              </a:ext>
+            </a:extLst>
+          </p:cNvPr>
           <p:cNvSpPr/>
           <p:nvPr/>
         </p:nvSpPr>
@@ -7977,7 +8433,13 @@
       </p:sp>
       <p:pic>
         <p:nvPicPr>
-          <p:cNvPr id="20" name="Image 4" descr="C:\Users\whale\git\uiao\inbox\SSA-Interview\build\icons\FaScaleBalanced.png">    </p:cNvPr>
+          <p:cNvPr id="20" name="Image 4" descr="">
+            <a:extLst>
+              <a:ext uri="{C183D7F6-B498-43B3-948B-1728B52AA6E4}">
+                <adec:decorative xmlns:adec="http://schemas.microsoft.com/office/drawing/2017/decorative" val="1"/>
+              </a:ext>
+            </a:extLst>
+          </p:cNvPr>
           <p:cNvPicPr>
             <a:picLocks noChangeAspect="1"/>
           </p:cNvPicPr>
@@ -8057,7 +8519,13 @@
       </p:sp>
       <p:sp>
         <p:nvSpPr>
-          <p:cNvPr id="22" name="Icon FaUsersGear"/>
+          <p:cNvPr id="22" name="Icon FaUsersGear" descr="">
+            <a:extLst>
+              <a:ext uri="{C183D7F6-B498-43B3-948B-1728B52AA6E4}">
+                <adec:decorative xmlns:adec="http://schemas.microsoft.com/office/drawing/2017/decorative" val="1"/>
+              </a:ext>
+            </a:extLst>
+          </p:cNvPr>
           <p:cNvSpPr/>
           <p:nvPr/>
         </p:nvSpPr>
@@ -8082,7 +8550,13 @@
       </p:sp>
       <p:pic>
         <p:nvPicPr>
-          <p:cNvPr id="23" name="Image 5" descr="C:\Users\whale\git\uiao\inbox\SSA-Interview\build\icons\FaUsersGear.png">    </p:cNvPr>
+          <p:cNvPr id="23" name="Image 5" descr="">
+            <a:extLst>
+              <a:ext uri="{C183D7F6-B498-43B3-948B-1728B52AA6E4}">
+                <adec:decorative xmlns:adec="http://schemas.microsoft.com/office/drawing/2017/decorative" val="1"/>
+              </a:ext>
+            </a:extLst>
+          </p:cNvPr>
           <p:cNvPicPr>
             <a:picLocks noChangeAspect="1"/>
           </p:cNvPicPr>
@@ -8162,7 +8636,13 @@
       </p:sp>
       <p:sp>
         <p:nvSpPr>
-          <p:cNvPr id="25" name="Cross banner"/>
+          <p:cNvPr id="25" name="Cross banner" descr="">
+            <a:extLst>
+              <a:ext uri="{C183D7F6-B498-43B3-948B-1728B52AA6E4}">
+                <adec:decorative xmlns:adec="http://schemas.microsoft.com/office/drawing/2017/decorative" val="1"/>
+              </a:ext>
+            </a:extLst>
+          </p:cNvPr>
           <p:cNvSpPr/>
           <p:nvPr/>
         </p:nvSpPr>
@@ -8354,7 +8834,13 @@
       </p:sp>
       <p:sp>
         <p:nvSpPr>
-          <p:cNvPr id="3" name="Shape 1"/>
+          <p:cNvPr id="3" name="Shape 1" descr="">
+            <a:extLst>
+              <a:ext uri="{C183D7F6-B498-43B3-948B-1728B52AA6E4}">
+                <adec:decorative xmlns:adec="http://schemas.microsoft.com/office/drawing/2017/decorative" val="1"/>
+              </a:ext>
+            </a:extLst>
+          </p:cNvPr>
           <p:cNvSpPr/>
           <p:nvPr/>
         </p:nvSpPr>
@@ -8377,7 +8863,13 @@
       </p:sp>
       <p:sp>
         <p:nvSpPr>
-          <p:cNvPr id="4" name="Roadmap dot 1"/>
+          <p:cNvPr id="4" name="Roadmap dot 1" descr="">
+            <a:extLst>
+              <a:ext uri="{C183D7F6-B498-43B3-948B-1728B52AA6E4}">
+                <adec:decorative xmlns:adec="http://schemas.microsoft.com/office/drawing/2017/decorative" val="1"/>
+              </a:ext>
+            </a:extLst>
+          </p:cNvPr>
           <p:cNvSpPr/>
           <p:nvPr/>
         </p:nvSpPr>
@@ -8494,7 +8986,13 @@
       </p:sp>
       <p:sp>
         <p:nvSpPr>
-          <p:cNvPr id="7" name="Roadmap dot 2"/>
+          <p:cNvPr id="7" name="Roadmap dot 2" descr="">
+            <a:extLst>
+              <a:ext uri="{C183D7F6-B498-43B3-948B-1728B52AA6E4}">
+                <adec:decorative xmlns:adec="http://schemas.microsoft.com/office/drawing/2017/decorative" val="1"/>
+              </a:ext>
+            </a:extLst>
+          </p:cNvPr>
           <p:cNvSpPr/>
           <p:nvPr/>
         </p:nvSpPr>
@@ -8611,7 +9109,13 @@
       </p:sp>
       <p:sp>
         <p:nvSpPr>
-          <p:cNvPr id="10" name="Roadmap dot 3"/>
+          <p:cNvPr id="10" name="Roadmap dot 3" descr="">
+            <a:extLst>
+              <a:ext uri="{C183D7F6-B498-43B3-948B-1728B52AA6E4}">
+                <adec:decorative xmlns:adec="http://schemas.microsoft.com/office/drawing/2017/decorative" val="1"/>
+              </a:ext>
+            </a:extLst>
+          </p:cNvPr>
           <p:cNvSpPr/>
           <p:nvPr/>
         </p:nvSpPr>
@@ -8728,7 +9232,13 @@
       </p:sp>
       <p:sp>
         <p:nvSpPr>
-          <p:cNvPr id="13" name="Roadmap dot 4"/>
+          <p:cNvPr id="13" name="Roadmap dot 4" descr="">
+            <a:extLst>
+              <a:ext uri="{C183D7F6-B498-43B3-948B-1728B52AA6E4}">
+                <adec:decorative xmlns:adec="http://schemas.microsoft.com/office/drawing/2017/decorative" val="1"/>
+              </a:ext>
+            </a:extLst>
+          </p:cNvPr>
           <p:cNvSpPr/>
           <p:nvPr/>
         </p:nvSpPr>
@@ -8845,7 +9355,13 @@
       </p:sp>
       <p:sp>
         <p:nvSpPr>
-          <p:cNvPr id="16" name="Roadmap dot 5"/>
+          <p:cNvPr id="16" name="Roadmap dot 5" descr="">
+            <a:extLst>
+              <a:ext uri="{C183D7F6-B498-43B3-948B-1728B52AA6E4}">
+                <adec:decorative xmlns:adec="http://schemas.microsoft.com/office/drawing/2017/decorative" val="1"/>
+              </a:ext>
+            </a:extLst>
+          </p:cNvPr>
           <p:cNvSpPr/>
           <p:nvPr/>
         </p:nvSpPr>
@@ -8962,7 +9478,13 @@
       </p:sp>
       <p:sp>
         <p:nvSpPr>
-          <p:cNvPr id="19" name="Ask"/>
+          <p:cNvPr id="19" name="Ask" descr="">
+            <a:extLst>
+              <a:ext uri="{C183D7F6-B498-43B3-948B-1728B52AA6E4}">
+                <adec:decorative xmlns:adec="http://schemas.microsoft.com/office/drawing/2017/decorative" val="1"/>
+              </a:ext>
+            </a:extLst>
+          </p:cNvPr>
           <p:cNvSpPr/>
           <p:nvPr/>
         </p:nvSpPr>
@@ -8996,7 +9518,13 @@
       </p:sp>
       <p:sp>
         <p:nvSpPr>
-          <p:cNvPr id="20" name="Icon FaLightbulb"/>
+          <p:cNvPr id="20" name="Icon FaLightbulb" descr="">
+            <a:extLst>
+              <a:ext uri="{C183D7F6-B498-43B3-948B-1728B52AA6E4}">
+                <adec:decorative xmlns:adec="http://schemas.microsoft.com/office/drawing/2017/decorative" val="1"/>
+              </a:ext>
+            </a:extLst>
+          </p:cNvPr>
           <p:cNvSpPr/>
           <p:nvPr/>
         </p:nvSpPr>
@@ -9021,7 +9549,13 @@
       </p:sp>
       <p:pic>
         <p:nvPicPr>
-          <p:cNvPr id="21" name="Image 0" descr="C:\Users\whale\git\uiao\inbox\SSA-Interview\build\icons\FaLightbulb.png">    </p:cNvPr>
+          <p:cNvPr id="21" name="Image 0" descr="">
+            <a:extLst>
+              <a:ext uri="{C183D7F6-B498-43B3-948B-1728B52AA6E4}">
+                <adec:decorative xmlns:adec="http://schemas.microsoft.com/office/drawing/2017/decorative" val="1"/>
+              </a:ext>
+            </a:extLst>
+          </p:cNvPr>
           <p:cNvPicPr>
             <a:picLocks noChangeAspect="1"/>
           </p:cNvPicPr>
@@ -9092,7 +9626,13 @@
       </p:sp>
       <p:sp>
         <p:nvSpPr>
-          <p:cNvPr id="23" name="EDA contribution"/>
+          <p:cNvPr id="23" name="EDA contribution" descr="">
+            <a:extLst>
+              <a:ext uri="{C183D7F6-B498-43B3-948B-1728B52AA6E4}">
+                <adec:decorative xmlns:adec="http://schemas.microsoft.com/office/drawing/2017/decorative" val="1"/>
+              </a:ext>
+            </a:extLst>
+          </p:cNvPr>
           <p:cNvSpPr/>
           <p:nvPr/>
         </p:nvSpPr>
@@ -9284,7 +9824,13 @@
       </p:sp>
       <p:sp>
         <p:nvSpPr>
-          <p:cNvPr id="3" name="Teaser 1"/>
+          <p:cNvPr id="3" name="Teaser 1" descr="">
+            <a:extLst>
+              <a:ext uri="{C183D7F6-B498-43B3-948B-1728B52AA6E4}">
+                <adec:decorative xmlns:adec="http://schemas.microsoft.com/office/drawing/2017/decorative" val="1"/>
+              </a:ext>
+            </a:extLst>
+          </p:cNvPr>
           <p:cNvSpPr/>
           <p:nvPr/>
         </p:nvSpPr>
@@ -9318,7 +9864,13 @@
       </p:sp>
       <p:sp>
         <p:nvSpPr>
-          <p:cNvPr id="4" name="Icon FaCloudArrowUp"/>
+          <p:cNvPr id="4" name="Icon FaCloudArrowUp" descr="">
+            <a:extLst>
+              <a:ext uri="{C183D7F6-B498-43B3-948B-1728B52AA6E4}">
+                <adec:decorative xmlns:adec="http://schemas.microsoft.com/office/drawing/2017/decorative" val="1"/>
+              </a:ext>
+            </a:extLst>
+          </p:cNvPr>
           <p:cNvSpPr/>
           <p:nvPr/>
         </p:nvSpPr>
@@ -9343,7 +9895,13 @@
       </p:sp>
       <p:pic>
         <p:nvPicPr>
-          <p:cNvPr id="5" name="Image 0" descr="C:\Users\whale\git\uiao\inbox\SSA-Interview\build\icons\FaCloudArrowUp.png">    </p:cNvPr>
+          <p:cNvPr id="5" name="Image 0" descr="">
+            <a:extLst>
+              <a:ext uri="{C183D7F6-B498-43B3-948B-1728B52AA6E4}">
+                <adec:decorative xmlns:adec="http://schemas.microsoft.com/office/drawing/2017/decorative" val="1"/>
+              </a:ext>
+            </a:extLst>
+          </p:cNvPr>
           <p:cNvPicPr>
             <a:picLocks noChangeAspect="1"/>
           </p:cNvPicPr>
@@ -9423,7 +9981,13 @@
       </p:sp>
       <p:sp>
         <p:nvSpPr>
-          <p:cNvPr id="7" name="Teaser 2"/>
+          <p:cNvPr id="7" name="Teaser 2" descr="">
+            <a:extLst>
+              <a:ext uri="{C183D7F6-B498-43B3-948B-1728B52AA6E4}">
+                <adec:decorative xmlns:adec="http://schemas.microsoft.com/office/drawing/2017/decorative" val="1"/>
+              </a:ext>
+            </a:extLst>
+          </p:cNvPr>
           <p:cNvSpPr/>
           <p:nvPr/>
         </p:nvSpPr>
@@ -9457,7 +10021,13 @@
       </p:sp>
       <p:sp>
         <p:nvSpPr>
-          <p:cNvPr id="8" name="Icon FaGlobe"/>
+          <p:cNvPr id="8" name="Icon FaGlobe" descr="">
+            <a:extLst>
+              <a:ext uri="{C183D7F6-B498-43B3-948B-1728B52AA6E4}">
+                <adec:decorative xmlns:adec="http://schemas.microsoft.com/office/drawing/2017/decorative" val="1"/>
+              </a:ext>
+            </a:extLst>
+          </p:cNvPr>
           <p:cNvSpPr/>
           <p:nvPr/>
         </p:nvSpPr>
@@ -9482,7 +10052,13 @@
       </p:sp>
       <p:pic>
         <p:nvPicPr>
-          <p:cNvPr id="9" name="Image 1" descr="C:\Users\whale\git\uiao\inbox\SSA-Interview\build\icons\FaGlobe.png">    </p:cNvPr>
+          <p:cNvPr id="9" name="Image 1" descr="">
+            <a:extLst>
+              <a:ext uri="{C183D7F6-B498-43B3-948B-1728B52AA6E4}">
+                <adec:decorative xmlns:adec="http://schemas.microsoft.com/office/drawing/2017/decorative" val="1"/>
+              </a:ext>
+            </a:extLst>
+          </p:cNvPr>
           <p:cNvPicPr>
             <a:picLocks noChangeAspect="1"/>
           </p:cNvPicPr>
@@ -9562,7 +10138,13 @@
       </p:sp>
       <p:sp>
         <p:nvSpPr>
-          <p:cNvPr id="11" name="Teaser 3"/>
+          <p:cNvPr id="11" name="Teaser 3" descr="">
+            <a:extLst>
+              <a:ext uri="{C183D7F6-B498-43B3-948B-1728B52AA6E4}">
+                <adec:decorative xmlns:adec="http://schemas.microsoft.com/office/drawing/2017/decorative" val="1"/>
+              </a:ext>
+            </a:extLst>
+          </p:cNvPr>
           <p:cNvSpPr/>
           <p:nvPr/>
         </p:nvSpPr>
@@ -9596,7 +10178,13 @@
       </p:sp>
       <p:sp>
         <p:nvSpPr>
-          <p:cNvPr id="12" name="Icon FaBuilding"/>
+          <p:cNvPr id="12" name="Icon FaBuilding" descr="">
+            <a:extLst>
+              <a:ext uri="{C183D7F6-B498-43B3-948B-1728B52AA6E4}">
+                <adec:decorative xmlns:adec="http://schemas.microsoft.com/office/drawing/2017/decorative" val="1"/>
+              </a:ext>
+            </a:extLst>
+          </p:cNvPr>
           <p:cNvSpPr/>
           <p:nvPr/>
         </p:nvSpPr>
@@ -9621,7 +10209,13 @@
       </p:sp>
       <p:pic>
         <p:nvPicPr>
-          <p:cNvPr id="13" name="Image 2" descr="C:\Users\whale\git\uiao\inbox\SSA-Interview\build\icons\FaBuilding.png">    </p:cNvPr>
+          <p:cNvPr id="13" name="Image 2" descr="">
+            <a:extLst>
+              <a:ext uri="{C183D7F6-B498-43B3-948B-1728B52AA6E4}">
+                <adec:decorative xmlns:adec="http://schemas.microsoft.com/office/drawing/2017/decorative" val="1"/>
+              </a:ext>
+            </a:extLst>
+          </p:cNvPr>
           <p:cNvPicPr>
             <a:picLocks noChangeAspect="1"/>
           </p:cNvPicPr>
@@ -9701,7 +10295,13 @@
       </p:sp>
       <p:sp>
         <p:nvSpPr>
-          <p:cNvPr id="15" name="Teaser 4"/>
+          <p:cNvPr id="15" name="Teaser 4" descr="">
+            <a:extLst>
+              <a:ext uri="{C183D7F6-B498-43B3-948B-1728B52AA6E4}">
+                <adec:decorative xmlns:adec="http://schemas.microsoft.com/office/drawing/2017/decorative" val="1"/>
+              </a:ext>
+            </a:extLst>
+          </p:cNvPr>
           <p:cNvSpPr/>
           <p:nvPr/>
         </p:nvSpPr>
@@ -9735,7 +10335,13 @@
       </p:sp>
       <p:sp>
         <p:nvSpPr>
-          <p:cNvPr id="16" name="Icon FaRoute"/>
+          <p:cNvPr id="16" name="Icon FaRoute" descr="">
+            <a:extLst>
+              <a:ext uri="{C183D7F6-B498-43B3-948B-1728B52AA6E4}">
+                <adec:decorative xmlns:adec="http://schemas.microsoft.com/office/drawing/2017/decorative" val="1"/>
+              </a:ext>
+            </a:extLst>
+          </p:cNvPr>
           <p:cNvSpPr/>
           <p:nvPr/>
         </p:nvSpPr>
@@ -9760,7 +10366,13 @@
       </p:sp>
       <p:pic>
         <p:nvPicPr>
-          <p:cNvPr id="17" name="Image 3" descr="C:\Users\whale\git\uiao\inbox\SSA-Interview\build\icons\FaRoute.png">    </p:cNvPr>
+          <p:cNvPr id="17" name="Image 3" descr="">
+            <a:extLst>
+              <a:ext uri="{C183D7F6-B498-43B3-948B-1728B52AA6E4}">
+                <adec:decorative xmlns:adec="http://schemas.microsoft.com/office/drawing/2017/decorative" val="1"/>
+              </a:ext>
+            </a:extLst>
+          </p:cNvPr>
           <p:cNvPicPr>
             <a:picLocks noChangeAspect="1"/>
           </p:cNvPicPr>
@@ -9840,7 +10452,13 @@
       </p:sp>
       <p:sp>
         <p:nvSpPr>
-          <p:cNvPr id="19" name="Teaser 5"/>
+          <p:cNvPr id="19" name="Teaser 5" descr="">
+            <a:extLst>
+              <a:ext uri="{C183D7F6-B498-43B3-948B-1728B52AA6E4}">
+                <adec:decorative xmlns:adec="http://schemas.microsoft.com/office/drawing/2017/decorative" val="1"/>
+              </a:ext>
+            </a:extLst>
+          </p:cNvPr>
           <p:cNvSpPr/>
           <p:nvPr/>
         </p:nvSpPr>
@@ -9874,7 +10492,13 @@
       </p:sp>
       <p:sp>
         <p:nvSpPr>
-          <p:cNvPr id="20" name="Icon FaServer"/>
+          <p:cNvPr id="20" name="Icon FaServer" descr="">
+            <a:extLst>
+              <a:ext uri="{C183D7F6-B498-43B3-948B-1728B52AA6E4}">
+                <adec:decorative xmlns:adec="http://schemas.microsoft.com/office/drawing/2017/decorative" val="1"/>
+              </a:ext>
+            </a:extLst>
+          </p:cNvPr>
           <p:cNvSpPr/>
           <p:nvPr/>
         </p:nvSpPr>
@@ -9899,7 +10523,13 @@
       </p:sp>
       <p:pic>
         <p:nvPicPr>
-          <p:cNvPr id="21" name="Image 4" descr="C:\Users\whale\git\uiao\inbox\SSA-Interview\build\icons\FaServer.png">    </p:cNvPr>
+          <p:cNvPr id="21" name="Image 4" descr="">
+            <a:extLst>
+              <a:ext uri="{C183D7F6-B498-43B3-948B-1728B52AA6E4}">
+                <adec:decorative xmlns:adec="http://schemas.microsoft.com/office/drawing/2017/decorative" val="1"/>
+              </a:ext>
+            </a:extLst>
+          </p:cNvPr>
           <p:cNvPicPr>
             <a:picLocks noChangeAspect="1"/>
           </p:cNvPicPr>
@@ -9979,7 +10609,13 @@
       </p:sp>
       <p:sp>
         <p:nvSpPr>
-          <p:cNvPr id="23" name="Teaser 6"/>
+          <p:cNvPr id="23" name="Teaser 6" descr="">
+            <a:extLst>
+              <a:ext uri="{C183D7F6-B498-43B3-948B-1728B52AA6E4}">
+                <adec:decorative xmlns:adec="http://schemas.microsoft.com/office/drawing/2017/decorative" val="1"/>
+              </a:ext>
+            </a:extLst>
+          </p:cNvPr>
           <p:cNvSpPr/>
           <p:nvPr/>
         </p:nvSpPr>
@@ -10013,7 +10649,13 @@
       </p:sp>
       <p:sp>
         <p:nvSpPr>
-          <p:cNvPr id="24" name="Icon FaDatabase"/>
+          <p:cNvPr id="24" name="Icon FaDatabase" descr="">
+            <a:extLst>
+              <a:ext uri="{C183D7F6-B498-43B3-948B-1728B52AA6E4}">
+                <adec:decorative xmlns:adec="http://schemas.microsoft.com/office/drawing/2017/decorative" val="1"/>
+              </a:ext>
+            </a:extLst>
+          </p:cNvPr>
           <p:cNvSpPr/>
           <p:nvPr/>
         </p:nvSpPr>
@@ -10038,7 +10680,13 @@
       </p:sp>
       <p:pic>
         <p:nvPicPr>
-          <p:cNvPr id="25" name="Image 5" descr="C:\Users\whale\git\uiao\inbox\SSA-Interview\build\icons\FaDatabase.png">    </p:cNvPr>
+          <p:cNvPr id="25" name="Image 5" descr="">
+            <a:extLst>
+              <a:ext uri="{C183D7F6-B498-43B3-948B-1728B52AA6E4}">
+                <adec:decorative xmlns:adec="http://schemas.microsoft.com/office/drawing/2017/decorative" val="1"/>
+              </a:ext>
+            </a:extLst>
+          </p:cNvPr>
           <p:cNvPicPr>
             <a:picLocks noChangeAspect="1"/>
           </p:cNvPicPr>
@@ -10118,7 +10766,13 @@
       </p:sp>
       <p:sp>
         <p:nvSpPr>
-          <p:cNvPr id="27" name="Teaser 7"/>
+          <p:cNvPr id="27" name="Teaser 7" descr="">
+            <a:extLst>
+              <a:ext uri="{C183D7F6-B498-43B3-948B-1728B52AA6E4}">
+                <adec:decorative xmlns:adec="http://schemas.microsoft.com/office/drawing/2017/decorative" val="1"/>
+              </a:ext>
+            </a:extLst>
+          </p:cNvPr>
           <p:cNvSpPr/>
           <p:nvPr/>
         </p:nvSpPr>
@@ -10152,7 +10806,13 @@
       </p:sp>
       <p:sp>
         <p:nvSpPr>
-          <p:cNvPr id="28" name="Icon FaLaptop"/>
+          <p:cNvPr id="28" name="Icon FaLaptop" descr="">
+            <a:extLst>
+              <a:ext uri="{C183D7F6-B498-43B3-948B-1728B52AA6E4}">
+                <adec:decorative xmlns:adec="http://schemas.microsoft.com/office/drawing/2017/decorative" val="1"/>
+              </a:ext>
+            </a:extLst>
+          </p:cNvPr>
           <p:cNvSpPr/>
           <p:nvPr/>
         </p:nvSpPr>
@@ -10177,7 +10837,13 @@
       </p:sp>
       <p:pic>
         <p:nvPicPr>
-          <p:cNvPr id="29" name="Image 6" descr="C:\Users\whale\git\uiao\inbox\SSA-Interview\build\icons\FaLaptop.png">    </p:cNvPr>
+          <p:cNvPr id="29" name="Image 6" descr="">
+            <a:extLst>
+              <a:ext uri="{C183D7F6-B498-43B3-948B-1728B52AA6E4}">
+                <adec:decorative xmlns:adec="http://schemas.microsoft.com/office/drawing/2017/decorative" val="1"/>
+              </a:ext>
+            </a:extLst>
+          </p:cNvPr>
           <p:cNvPicPr>
             <a:picLocks noChangeAspect="1"/>
           </p:cNvPicPr>
@@ -10257,7 +10923,13 @@
       </p:sp>
       <p:sp>
         <p:nvSpPr>
-          <p:cNvPr id="31" name="Teaser 8"/>
+          <p:cNvPr id="31" name="Teaser 8" descr="">
+            <a:extLst>
+              <a:ext uri="{C183D7F6-B498-43B3-948B-1728B52AA6E4}">
+                <adec:decorative xmlns:adec="http://schemas.microsoft.com/office/drawing/2017/decorative" val="1"/>
+              </a:ext>
+            </a:extLst>
+          </p:cNvPr>
           <p:cNvSpPr/>
           <p:nvPr/>
         </p:nvSpPr>
@@ -10291,7 +10963,13 @@
       </p:sp>
       <p:sp>
         <p:nvSpPr>
-          <p:cNvPr id="32" name="Icon FaShieldHalved"/>
+          <p:cNvPr id="32" name="Icon FaShieldHalved" descr="">
+            <a:extLst>
+              <a:ext uri="{C183D7F6-B498-43B3-948B-1728B52AA6E4}">
+                <adec:decorative xmlns:adec="http://schemas.microsoft.com/office/drawing/2017/decorative" val="1"/>
+              </a:ext>
+            </a:extLst>
+          </p:cNvPr>
           <p:cNvSpPr/>
           <p:nvPr/>
         </p:nvSpPr>
@@ -10316,7 +10994,13 @@
       </p:sp>
       <p:pic>
         <p:nvPicPr>
-          <p:cNvPr id="33" name="Image 7" descr="C:\Users\whale\git\uiao\inbox\SSA-Interview\build\icons\FaShieldHalved.png">    </p:cNvPr>
+          <p:cNvPr id="33" name="Image 7" descr="">
+            <a:extLst>
+              <a:ext uri="{C183D7F6-B498-43B3-948B-1728B52AA6E4}">
+                <adec:decorative xmlns:adec="http://schemas.microsoft.com/office/drawing/2017/decorative" val="1"/>
+              </a:ext>
+            </a:extLst>
+          </p:cNvPr>
           <p:cNvPicPr>
             <a:picLocks noChangeAspect="1"/>
           </p:cNvPicPr>
@@ -10396,7 +11080,13 @@
       </p:sp>
       <p:sp>
         <p:nvSpPr>
-          <p:cNvPr id="35" name="Teaser companions"/>
+          <p:cNvPr id="35" name="Teaser companions" descr="">
+            <a:extLst>
+              <a:ext uri="{C183D7F6-B498-43B3-948B-1728B52AA6E4}">
+                <adec:decorative xmlns:adec="http://schemas.microsoft.com/office/drawing/2017/decorative" val="1"/>
+              </a:ext>
+            </a:extLst>
+          </p:cNvPr>
           <p:cNvSpPr/>
           <p:nvPr/>
         </p:nvSpPr>
@@ -10510,7 +11200,13 @@
       </p:sp>
       <p:sp>
         <p:nvSpPr>
-          <p:cNvPr id="37" name="Teaser footer"/>
+          <p:cNvPr id="37" name="Teaser footer" descr="">
+            <a:extLst>
+              <a:ext uri="{C183D7F6-B498-43B3-948B-1728B52AA6E4}">
+                <adec:decorative xmlns:adec="http://schemas.microsoft.com/office/drawing/2017/decorative" val="1"/>
+              </a:ext>
+            </a:extLst>
+          </p:cNvPr>
           <p:cNvSpPr/>
           <p:nvPr/>
         </p:nvSpPr>
@@ -10702,7 +11398,13 @@
       </p:sp>
       <p:sp>
         <p:nvSpPr>
-          <p:cNvPr id="3" name="Two migrations, regardless card"/>
+          <p:cNvPr id="3" name="Two migrations, regardless card" descr="">
+            <a:extLst>
+              <a:ext uri="{C183D7F6-B498-43B3-948B-1728B52AA6E4}">
+                <adec:decorative xmlns:adec="http://schemas.microsoft.com/office/drawing/2017/decorative" val="1"/>
+              </a:ext>
+            </a:extLst>
+          </p:cNvPr>
           <p:cNvSpPr/>
           <p:nvPr/>
         </p:nvSpPr>
@@ -10736,7 +11438,13 @@
       </p:sp>
       <p:sp>
         <p:nvSpPr>
-          <p:cNvPr id="4" name="Icon FaArrowsRotate"/>
+          <p:cNvPr id="4" name="Icon FaArrowsRotate" descr="">
+            <a:extLst>
+              <a:ext uri="{C183D7F6-B498-43B3-948B-1728B52AA6E4}">
+                <adec:decorative xmlns:adec="http://schemas.microsoft.com/office/drawing/2017/decorative" val="1"/>
+              </a:ext>
+            </a:extLst>
+          </p:cNvPr>
           <p:cNvSpPr/>
           <p:nvPr/>
         </p:nvSpPr>
@@ -10761,7 +11469,13 @@
       </p:sp>
       <p:pic>
         <p:nvPicPr>
-          <p:cNvPr id="5" name="Image 0" descr="C:\Users\whale\git\uiao\inbox\SSA-Interview\build\icons\FaArrowsRotate.png">    </p:cNvPr>
+          <p:cNvPr id="5" name="Image 0" descr="">
+            <a:extLst>
+              <a:ext uri="{C183D7F6-B498-43B3-948B-1728B52AA6E4}">
+                <adec:decorative xmlns:adec="http://schemas.microsoft.com/office/drawing/2017/decorative" val="1"/>
+              </a:ext>
+            </a:extLst>
+          </p:cNvPr>
           <p:cNvPicPr>
             <a:picLocks noChangeAspect="1"/>
           </p:cNvPicPr>
@@ -10900,7 +11614,13 @@
       </p:sp>
       <p:sp>
         <p:nvSpPr>
-          <p:cNvPr id="8" name="The agency’s call card"/>
+          <p:cNvPr id="8" name="The agency’s call card" descr="">
+            <a:extLst>
+              <a:ext uri="{C183D7F6-B498-43B3-948B-1728B52AA6E4}">
+                <adec:decorative xmlns:adec="http://schemas.microsoft.com/office/drawing/2017/decorative" val="1"/>
+              </a:ext>
+            </a:extLst>
+          </p:cNvPr>
           <p:cNvSpPr/>
           <p:nvPr/>
         </p:nvSpPr>
@@ -10934,7 +11654,13 @@
       </p:sp>
       <p:sp>
         <p:nvSpPr>
-          <p:cNvPr id="9" name="Icon FaLandmark"/>
+          <p:cNvPr id="9" name="Icon FaLandmark" descr="">
+            <a:extLst>
+              <a:ext uri="{C183D7F6-B498-43B3-948B-1728B52AA6E4}">
+                <adec:decorative xmlns:adec="http://schemas.microsoft.com/office/drawing/2017/decorative" val="1"/>
+              </a:ext>
+            </a:extLst>
+          </p:cNvPr>
           <p:cNvSpPr/>
           <p:nvPr/>
         </p:nvSpPr>
@@ -10959,7 +11685,13 @@
       </p:sp>
       <p:pic>
         <p:nvPicPr>
-          <p:cNvPr id="10" name="Image 1" descr="C:\Users\whale\git\uiao\inbox\SSA-Interview\build\icons\FaLandmark.png">    </p:cNvPr>
+          <p:cNvPr id="10" name="Image 1" descr="">
+            <a:extLst>
+              <a:ext uri="{C183D7F6-B498-43B3-948B-1728B52AA6E4}">
+                <adec:decorative xmlns:adec="http://schemas.microsoft.com/office/drawing/2017/decorative" val="1"/>
+              </a:ext>
+            </a:extLst>
+          </p:cNvPr>
           <p:cNvPicPr>
             <a:picLocks noChangeAspect="1"/>
           </p:cNvPicPr>
@@ -11098,7 +11830,13 @@
       </p:sp>
       <p:sp>
         <p:nvSpPr>
-          <p:cNvPr id="13" name="The proposal card"/>
+          <p:cNvPr id="13" name="The proposal card" descr="">
+            <a:extLst>
+              <a:ext uri="{C183D7F6-B498-43B3-948B-1728B52AA6E4}">
+                <adec:decorative xmlns:adec="http://schemas.microsoft.com/office/drawing/2017/decorative" val="1"/>
+              </a:ext>
+            </a:extLst>
+          </p:cNvPr>
           <p:cNvSpPr/>
           <p:nvPr/>
         </p:nvSpPr>
@@ -11132,7 +11870,13 @@
       </p:sp>
       <p:sp>
         <p:nvSpPr>
-          <p:cNvPr id="14" name="Icon FaLightbulb"/>
+          <p:cNvPr id="14" name="Icon FaLightbulb" descr="">
+            <a:extLst>
+              <a:ext uri="{C183D7F6-B498-43B3-948B-1728B52AA6E4}">
+                <adec:decorative xmlns:adec="http://schemas.microsoft.com/office/drawing/2017/decorative" val="1"/>
+              </a:ext>
+            </a:extLst>
+          </p:cNvPr>
           <p:cNvSpPr/>
           <p:nvPr/>
         </p:nvSpPr>
@@ -11157,7 +11901,13 @@
       </p:sp>
       <p:pic>
         <p:nvPicPr>
-          <p:cNvPr id="15" name="Image 2" descr="C:\Users\whale\git\uiao\inbox\SSA-Interview\build\icons\FaLightbulb.png">    </p:cNvPr>
+          <p:cNvPr id="15" name="Image 2" descr="">
+            <a:extLst>
+              <a:ext uri="{C183D7F6-B498-43B3-948B-1728B52AA6E4}">
+                <adec:decorative xmlns:adec="http://schemas.microsoft.com/office/drawing/2017/decorative" val="1"/>
+              </a:ext>
+            </a:extLst>
+          </p:cNvPr>
           <p:cNvPicPr>
             <a:picLocks noChangeAspect="1"/>
           </p:cNvPicPr>
@@ -11296,7 +12046,13 @@
       </p:sp>
       <p:sp>
         <p:nvSpPr>
-          <p:cNvPr id="18" name="Choice"/>
+          <p:cNvPr id="18" name="Choice" descr="">
+            <a:extLst>
+              <a:ext uri="{C183D7F6-B498-43B3-948B-1728B52AA6E4}">
+                <adec:decorative xmlns:adec="http://schemas.microsoft.com/office/drawing/2017/decorative" val="1"/>
+              </a:ext>
+            </a:extLst>
+          </p:cNvPr>
           <p:cNvSpPr/>
           <p:nvPr/>
         </p:nvSpPr>
@@ -11488,7 +12244,13 @@
       </p:sp>
       <p:sp>
         <p:nvSpPr>
-          <p:cNvPr id="3" name="Chain 1"/>
+          <p:cNvPr id="3" name="Chain 1" descr="">
+            <a:extLst>
+              <a:ext uri="{C183D7F6-B498-43B3-948B-1728B52AA6E4}">
+                <adec:decorative xmlns:adec="http://schemas.microsoft.com/office/drawing/2017/decorative" val="1"/>
+              </a:ext>
+            </a:extLst>
+          </p:cNvPr>
           <p:cNvSpPr/>
           <p:nvPr/>
         </p:nvSpPr>
@@ -11598,7 +12360,13 @@
       </p:sp>
       <p:sp>
         <p:nvSpPr>
-          <p:cNvPr id="5" name="Chain 2"/>
+          <p:cNvPr id="5" name="Chain 2" descr="">
+            <a:extLst>
+              <a:ext uri="{C183D7F6-B498-43B3-948B-1728B52AA6E4}">
+                <adec:decorative xmlns:adec="http://schemas.microsoft.com/office/drawing/2017/decorative" val="1"/>
+              </a:ext>
+            </a:extLst>
+          </p:cNvPr>
           <p:cNvSpPr/>
           <p:nvPr/>
         </p:nvSpPr>
@@ -11708,7 +12476,13 @@
       </p:sp>
       <p:sp>
         <p:nvSpPr>
-          <p:cNvPr id="7" name="Chain 3"/>
+          <p:cNvPr id="7" name="Chain 3" descr="">
+            <a:extLst>
+              <a:ext uri="{C183D7F6-B498-43B3-948B-1728B52AA6E4}">
+                <adec:decorative xmlns:adec="http://schemas.microsoft.com/office/drawing/2017/decorative" val="1"/>
+              </a:ext>
+            </a:extLst>
+          </p:cNvPr>
           <p:cNvSpPr/>
           <p:nvPr/>
         </p:nvSpPr>
@@ -11818,7 +12592,13 @@
       </p:sp>
       <p:sp>
         <p:nvSpPr>
-          <p:cNvPr id="9" name="Chain 4"/>
+          <p:cNvPr id="9" name="Chain 4" descr="">
+            <a:extLst>
+              <a:ext uri="{C183D7F6-B498-43B3-948B-1728B52AA6E4}">
+                <adec:decorative xmlns:adec="http://schemas.microsoft.com/office/drawing/2017/decorative" val="1"/>
+              </a:ext>
+            </a:extLst>
+          </p:cNvPr>
           <p:cNvSpPr/>
           <p:nvPr/>
         </p:nvSpPr>
@@ -11928,7 +12708,13 @@
       </p:sp>
       <p:sp>
         <p:nvSpPr>
-          <p:cNvPr id="11" name="Shape 9"/>
+          <p:cNvPr id="11" name="Shape 9" descr="">
+            <a:extLst>
+              <a:ext uri="{C183D7F6-B498-43B3-948B-1728B52AA6E4}">
+                <adec:decorative xmlns:adec="http://schemas.microsoft.com/office/drawing/2017/decorative" val="1"/>
+              </a:ext>
+            </a:extLst>
+          </p:cNvPr>
           <p:cNvSpPr/>
           <p:nvPr/>
         </p:nvSpPr>
@@ -11952,7 +12738,13 @@
       </p:sp>
       <p:sp>
         <p:nvSpPr>
-          <p:cNvPr id="12" name="Shape 10"/>
+          <p:cNvPr id="12" name="Shape 10" descr="">
+            <a:extLst>
+              <a:ext uri="{C183D7F6-B498-43B3-948B-1728B52AA6E4}">
+                <adec:decorative xmlns:adec="http://schemas.microsoft.com/office/drawing/2017/decorative" val="1"/>
+              </a:ext>
+            </a:extLst>
+          </p:cNvPr>
           <p:cNvSpPr/>
           <p:nvPr/>
         </p:nvSpPr>
@@ -11976,7 +12768,13 @@
       </p:sp>
       <p:sp>
         <p:nvSpPr>
-          <p:cNvPr id="13" name="Shape 11"/>
+          <p:cNvPr id="13" name="Shape 11" descr="">
+            <a:extLst>
+              <a:ext uri="{C183D7F6-B498-43B3-948B-1728B52AA6E4}">
+                <adec:decorative xmlns:adec="http://schemas.microsoft.com/office/drawing/2017/decorative" val="1"/>
+              </a:ext>
+            </a:extLst>
+          </p:cNvPr>
           <p:cNvSpPr/>
           <p:nvPr/>
         </p:nvSpPr>
@@ -12019,7 +12817,7 @@
         <a:graphic>
           <a:graphicData uri="http://schemas.openxmlformats.org/drawingml/2006/table">
             <a:tbl>
-              <a:tblPr/>
+              <a:tblPr firstRow="1" bandRow="1"/>
               <a:tblGrid>
                 <a:gridCol w="2377440"/>
                 <a:gridCol w="3840480"/>
@@ -12844,7 +13642,13 @@
       </p:graphicFrame>
       <p:sp>
         <p:nvSpPr>
-          <p:cNvPr id="15" name="Takeaway"/>
+          <p:cNvPr id="15" name="Takeaway" descr="">
+            <a:extLst>
+              <a:ext uri="{C183D7F6-B498-43B3-948B-1728B52AA6E4}">
+                <adec:decorative xmlns:adec="http://schemas.microsoft.com/office/drawing/2017/decorative" val="1"/>
+              </a:ext>
+            </a:extLst>
+          </p:cNvPr>
           <p:cNvSpPr/>
           <p:nvPr/>
         </p:nvSpPr>
@@ -13036,7 +13840,13 @@
       </p:sp>
       <p:sp>
         <p:nvSpPr>
-          <p:cNvPr id="3" name="Story 1"/>
+          <p:cNvPr id="3" name="Story 1" descr="">
+            <a:extLst>
+              <a:ext uri="{C183D7F6-B498-43B3-948B-1728B52AA6E4}">
+                <adec:decorative xmlns:adec="http://schemas.microsoft.com/office/drawing/2017/decorative" val="1"/>
+              </a:ext>
+            </a:extLst>
+          </p:cNvPr>
           <p:cNvSpPr/>
           <p:nvPr/>
         </p:nvSpPr>
@@ -13070,7 +13880,13 @@
       </p:sp>
       <p:sp>
         <p:nvSpPr>
-          <p:cNvPr id="4" name="Icon FaAddressBook"/>
+          <p:cNvPr id="4" name="Icon FaAddressBook" descr="">
+            <a:extLst>
+              <a:ext uri="{C183D7F6-B498-43B3-948B-1728B52AA6E4}">
+                <adec:decorative xmlns:adec="http://schemas.microsoft.com/office/drawing/2017/decorative" val="1"/>
+              </a:ext>
+            </a:extLst>
+          </p:cNvPr>
           <p:cNvSpPr/>
           <p:nvPr/>
         </p:nvSpPr>
@@ -13095,7 +13911,13 @@
       </p:sp>
       <p:pic>
         <p:nvPicPr>
-          <p:cNvPr id="5" name="Image 0" descr="C:\Users\whale\git\uiao\inbox\SSA-Interview\build\icons\FaAddressBook.png">    </p:cNvPr>
+          <p:cNvPr id="5" name="Image 0" descr="">
+            <a:extLst>
+              <a:ext uri="{C183D7F6-B498-43B3-948B-1728B52AA6E4}">
+                <adec:decorative xmlns:adec="http://schemas.microsoft.com/office/drawing/2017/decorative" val="1"/>
+              </a:ext>
+            </a:extLst>
+          </p:cNvPr>
           <p:cNvPicPr>
             <a:picLocks noChangeAspect="1"/>
           </p:cNvPicPr>
@@ -13178,7 +14000,13 @@
       </p:sp>
       <p:sp>
         <p:nvSpPr>
-          <p:cNvPr id="7" name="Story 2"/>
+          <p:cNvPr id="7" name="Story 2" descr="">
+            <a:extLst>
+              <a:ext uri="{C183D7F6-B498-43B3-948B-1728B52AA6E4}">
+                <adec:decorative xmlns:adec="http://schemas.microsoft.com/office/drawing/2017/decorative" val="1"/>
+              </a:ext>
+            </a:extLst>
+          </p:cNvPr>
           <p:cNvSpPr/>
           <p:nvPr/>
         </p:nvSpPr>
@@ -13212,7 +14040,13 @@
       </p:sp>
       <p:sp>
         <p:nvSpPr>
-          <p:cNvPr id="8" name="Icon FaUserTie"/>
+          <p:cNvPr id="8" name="Icon FaUserTie" descr="">
+            <a:extLst>
+              <a:ext uri="{C183D7F6-B498-43B3-948B-1728B52AA6E4}">
+                <adec:decorative xmlns:adec="http://schemas.microsoft.com/office/drawing/2017/decorative" val="1"/>
+              </a:ext>
+            </a:extLst>
+          </p:cNvPr>
           <p:cNvSpPr/>
           <p:nvPr/>
         </p:nvSpPr>
@@ -13237,7 +14071,13 @@
       </p:sp>
       <p:pic>
         <p:nvPicPr>
-          <p:cNvPr id="9" name="Image 1" descr="C:\Users\whale\git\uiao\inbox\SSA-Interview\build\icons\FaUserTie.png">    </p:cNvPr>
+          <p:cNvPr id="9" name="Image 1" descr="">
+            <a:extLst>
+              <a:ext uri="{C183D7F6-B498-43B3-948B-1728B52AA6E4}">
+                <adec:decorative xmlns:adec="http://schemas.microsoft.com/office/drawing/2017/decorative" val="1"/>
+              </a:ext>
+            </a:extLst>
+          </p:cNvPr>
           <p:cNvPicPr>
             <a:picLocks noChangeAspect="1"/>
           </p:cNvPicPr>
@@ -13320,7 +14160,13 @@
       </p:sp>
       <p:sp>
         <p:nvSpPr>
-          <p:cNvPr id="11" name="HR-driven panel"/>
+          <p:cNvPr id="11" name="HR-driven panel" descr="">
+            <a:extLst>
+              <a:ext uri="{C183D7F6-B498-43B3-948B-1728B52AA6E4}">
+                <adec:decorative xmlns:adec="http://schemas.microsoft.com/office/drawing/2017/decorative" val="1"/>
+              </a:ext>
+            </a:extLst>
+          </p:cNvPr>
           <p:cNvSpPr/>
           <p:nvPr/>
         </p:nvSpPr>
@@ -13354,7 +14200,13 @@
       </p:sp>
       <p:sp>
         <p:nvSpPr>
-          <p:cNvPr id="12" name="Icon FaRightLeft"/>
+          <p:cNvPr id="12" name="Icon FaRightLeft" descr="">
+            <a:extLst>
+              <a:ext uri="{C183D7F6-B498-43B3-948B-1728B52AA6E4}">
+                <adec:decorative xmlns:adec="http://schemas.microsoft.com/office/drawing/2017/decorative" val="1"/>
+              </a:ext>
+            </a:extLst>
+          </p:cNvPr>
           <p:cNvSpPr/>
           <p:nvPr/>
         </p:nvSpPr>
@@ -13379,7 +14231,13 @@
       </p:sp>
       <p:pic>
         <p:nvPicPr>
-          <p:cNvPr id="13" name="Image 2" descr="C:\Users\whale\git\uiao\inbox\SSA-Interview\build\icons\FaRightLeft.png">    </p:cNvPr>
+          <p:cNvPr id="13" name="Image 2" descr="">
+            <a:extLst>
+              <a:ext uri="{C183D7F6-B498-43B3-948B-1728B52AA6E4}">
+                <adec:decorative xmlns:adec="http://schemas.microsoft.com/office/drawing/2017/decorative" val="1"/>
+              </a:ext>
+            </a:extLst>
+          </p:cNvPr>
           <p:cNvPicPr>
             <a:picLocks noChangeAspect="1"/>
           </p:cNvPicPr>
@@ -13442,7 +14300,13 @@
       </p:sp>
       <p:sp>
         <p:nvSpPr>
-          <p:cNvPr id="15" name="Step 1 badge"/>
+          <p:cNvPr id="15" name="Step 1 badge" descr="">
+            <a:extLst>
+              <a:ext uri="{C183D7F6-B498-43B3-948B-1728B52AA6E4}">
+                <adec:decorative xmlns:adec="http://schemas.microsoft.com/office/drawing/2017/decorative" val="1"/>
+              </a:ext>
+            </a:extLst>
+          </p:cNvPr>
           <p:cNvSpPr/>
           <p:nvPr/>
         </p:nvSpPr>
@@ -13539,7 +14403,13 @@
       </p:sp>
       <p:sp>
         <p:nvSpPr>
-          <p:cNvPr id="18" name="Shape 13"/>
+          <p:cNvPr id="18" name="Shape 13" descr="">
+            <a:extLst>
+              <a:ext uri="{C183D7F6-B498-43B3-948B-1728B52AA6E4}">
+                <adec:decorative xmlns:adec="http://schemas.microsoft.com/office/drawing/2017/decorative" val="1"/>
+              </a:ext>
+            </a:extLst>
+          </p:cNvPr>
           <p:cNvSpPr/>
           <p:nvPr/>
         </p:nvSpPr>
@@ -13563,7 +14433,13 @@
       </p:sp>
       <p:sp>
         <p:nvSpPr>
-          <p:cNvPr id="19" name="Step 2 badge"/>
+          <p:cNvPr id="19" name="Step 2 badge" descr="">
+            <a:extLst>
+              <a:ext uri="{C183D7F6-B498-43B3-948B-1728B52AA6E4}">
+                <adec:decorative xmlns:adec="http://schemas.microsoft.com/office/drawing/2017/decorative" val="1"/>
+              </a:ext>
+            </a:extLst>
+          </p:cNvPr>
           <p:cNvSpPr/>
           <p:nvPr/>
         </p:nvSpPr>
@@ -13660,7 +14536,13 @@
       </p:sp>
       <p:sp>
         <p:nvSpPr>
-          <p:cNvPr id="22" name="Shape 17"/>
+          <p:cNvPr id="22" name="Shape 17" descr="">
+            <a:extLst>
+              <a:ext uri="{C183D7F6-B498-43B3-948B-1728B52AA6E4}">
+                <adec:decorative xmlns:adec="http://schemas.microsoft.com/office/drawing/2017/decorative" val="1"/>
+              </a:ext>
+            </a:extLst>
+          </p:cNvPr>
           <p:cNvSpPr/>
           <p:nvPr/>
         </p:nvSpPr>
@@ -13684,7 +14566,13 @@
       </p:sp>
       <p:sp>
         <p:nvSpPr>
-          <p:cNvPr id="23" name="Step 3 badge"/>
+          <p:cNvPr id="23" name="Step 3 badge" descr="">
+            <a:extLst>
+              <a:ext uri="{C183D7F6-B498-43B3-948B-1728B52AA6E4}">
+                <adec:decorative xmlns:adec="http://schemas.microsoft.com/office/drawing/2017/decorative" val="1"/>
+              </a:ext>
+            </a:extLst>
+          </p:cNvPr>
           <p:cNvSpPr/>
           <p:nvPr/>
         </p:nvSpPr>
@@ -13892,7 +14780,13 @@
       </p:sp>
       <p:sp>
         <p:nvSpPr>
-          <p:cNvPr id="3" name="Shape 1"/>
+          <p:cNvPr id="3" name="Shape 1" descr="">
+            <a:extLst>
+              <a:ext uri="{C183D7F6-B498-43B3-948B-1728B52AA6E4}">
+                <adec:decorative xmlns:adec="http://schemas.microsoft.com/office/drawing/2017/decorative" val="1"/>
+              </a:ext>
+            </a:extLst>
+          </p:cNvPr>
           <p:cNvSpPr/>
           <p:nvPr/>
         </p:nvSpPr>
@@ -13915,7 +14809,13 @@
       </p:sp>
       <p:sp>
         <p:nvSpPr>
-          <p:cNvPr id="4" name="Milestone dot 1"/>
+          <p:cNvPr id="4" name="Milestone dot 1" descr="">
+            <a:extLst>
+              <a:ext uri="{C183D7F6-B498-43B3-948B-1728B52AA6E4}">
+                <adec:decorative xmlns:adec="http://schemas.microsoft.com/office/drawing/2017/decorative" val="1"/>
+              </a:ext>
+            </a:extLst>
+          </p:cNvPr>
           <p:cNvSpPr/>
           <p:nvPr/>
         </p:nvSpPr>
@@ -14029,7 +14929,13 @@
       </p:sp>
       <p:sp>
         <p:nvSpPr>
-          <p:cNvPr id="7" name="Milestone dot 2"/>
+          <p:cNvPr id="7" name="Milestone dot 2" descr="">
+            <a:extLst>
+              <a:ext uri="{C183D7F6-B498-43B3-948B-1728B52AA6E4}">
+                <adec:decorative xmlns:adec="http://schemas.microsoft.com/office/drawing/2017/decorative" val="1"/>
+              </a:ext>
+            </a:extLst>
+          </p:cNvPr>
           <p:cNvSpPr/>
           <p:nvPr/>
         </p:nvSpPr>
@@ -14143,7 +15049,13 @@
       </p:sp>
       <p:sp>
         <p:nvSpPr>
-          <p:cNvPr id="10" name="Milestone dot 3"/>
+          <p:cNvPr id="10" name="Milestone dot 3" descr="">
+            <a:extLst>
+              <a:ext uri="{C183D7F6-B498-43B3-948B-1728B52AA6E4}">
+                <adec:decorative xmlns:adec="http://schemas.microsoft.com/office/drawing/2017/decorative" val="1"/>
+              </a:ext>
+            </a:extLst>
+          </p:cNvPr>
           <p:cNvSpPr/>
           <p:nvPr/>
         </p:nvSpPr>
@@ -14257,7 +15169,13 @@
       </p:sp>
       <p:sp>
         <p:nvSpPr>
-          <p:cNvPr id="13" name="Milestone dot 4"/>
+          <p:cNvPr id="13" name="Milestone dot 4" descr="">
+            <a:extLst>
+              <a:ext uri="{C183D7F6-B498-43B3-948B-1728B52AA6E4}">
+                <adec:decorative xmlns:adec="http://schemas.microsoft.com/office/drawing/2017/decorative" val="1"/>
+              </a:ext>
+            </a:extLst>
+          </p:cNvPr>
           <p:cNvSpPr/>
           <p:nvPr/>
         </p:nvSpPr>
@@ -14371,7 +15289,13 @@
       </p:sp>
       <p:sp>
         <p:nvSpPr>
-          <p:cNvPr id="16" name="Milestone dot 5"/>
+          <p:cNvPr id="16" name="Milestone dot 5" descr="">
+            <a:extLst>
+              <a:ext uri="{C183D7F6-B498-43B3-948B-1728B52AA6E4}">
+                <adec:decorative xmlns:adec="http://schemas.microsoft.com/office/drawing/2017/decorative" val="1"/>
+              </a:ext>
+            </a:extLst>
+          </p:cNvPr>
           <p:cNvSpPr/>
           <p:nvPr/>
         </p:nvSpPr>
@@ -14485,7 +15409,13 @@
       </p:sp>
       <p:sp>
         <p:nvSpPr>
-          <p:cNvPr id="19" name="Window 1"/>
+          <p:cNvPr id="19" name="Window 1" descr="">
+            <a:extLst>
+              <a:ext uri="{C183D7F6-B498-43B3-948B-1728B52AA6E4}">
+                <adec:decorative xmlns:adec="http://schemas.microsoft.com/office/drawing/2017/decorative" val="1"/>
+              </a:ext>
+            </a:extLst>
+          </p:cNvPr>
           <p:cNvSpPr/>
           <p:nvPr/>
         </p:nvSpPr>
@@ -14519,7 +15449,13 @@
       </p:sp>
       <p:sp>
         <p:nvSpPr>
-          <p:cNvPr id="20" name="Icon FaDoorOpen"/>
+          <p:cNvPr id="20" name="Icon FaDoorOpen" descr="">
+            <a:extLst>
+              <a:ext uri="{C183D7F6-B498-43B3-948B-1728B52AA6E4}">
+                <adec:decorative xmlns:adec="http://schemas.microsoft.com/office/drawing/2017/decorative" val="1"/>
+              </a:ext>
+            </a:extLst>
+          </p:cNvPr>
           <p:cNvSpPr/>
           <p:nvPr/>
         </p:nvSpPr>
@@ -14544,7 +15480,13 @@
       </p:sp>
       <p:pic>
         <p:nvPicPr>
-          <p:cNvPr id="21" name="Image 0" descr="C:\Users\whale\git\uiao\inbox\SSA-Interview\build\icons\FaDoorOpen.png">    </p:cNvPr>
+          <p:cNvPr id="21" name="Image 0" descr="">
+            <a:extLst>
+              <a:ext uri="{C183D7F6-B498-43B3-948B-1728B52AA6E4}">
+                <adec:decorative xmlns:adec="http://schemas.microsoft.com/office/drawing/2017/decorative" val="1"/>
+              </a:ext>
+            </a:extLst>
+          </p:cNvPr>
           <p:cNvPicPr>
             <a:picLocks noChangeAspect="1"/>
           </p:cNvPicPr>
@@ -14627,7 +15569,13 @@
       </p:sp>
       <p:sp>
         <p:nvSpPr>
-          <p:cNvPr id="23" name="Window 2"/>
+          <p:cNvPr id="23" name="Window 2" descr="">
+            <a:extLst>
+              <a:ext uri="{C183D7F6-B498-43B3-948B-1728B52AA6E4}">
+                <adec:decorative xmlns:adec="http://schemas.microsoft.com/office/drawing/2017/decorative" val="1"/>
+              </a:ext>
+            </a:extLst>
+          </p:cNvPr>
           <p:cNvSpPr/>
           <p:nvPr/>
         </p:nvSpPr>
@@ -14661,7 +15609,13 @@
       </p:sp>
       <p:sp>
         <p:nvSpPr>
-          <p:cNvPr id="24" name="Icon FaDoorClosed"/>
+          <p:cNvPr id="24" name="Icon FaDoorClosed" descr="">
+            <a:extLst>
+              <a:ext uri="{C183D7F6-B498-43B3-948B-1728B52AA6E4}">
+                <adec:decorative xmlns:adec="http://schemas.microsoft.com/office/drawing/2017/decorative" val="1"/>
+              </a:ext>
+            </a:extLst>
+          </p:cNvPr>
           <p:cNvSpPr/>
           <p:nvPr/>
         </p:nvSpPr>
@@ -14686,7 +15640,13 @@
       </p:sp>
       <p:pic>
         <p:nvPicPr>
-          <p:cNvPr id="25" name="Image 1" descr="C:\Users\whale\git\uiao\inbox\SSA-Interview\build\icons\FaDoorClosed.png">    </p:cNvPr>
+          <p:cNvPr id="25" name="Image 1" descr="">
+            <a:extLst>
+              <a:ext uri="{C183D7F6-B498-43B3-948B-1728B52AA6E4}">
+                <adec:decorative xmlns:adec="http://schemas.microsoft.com/office/drawing/2017/decorative" val="1"/>
+              </a:ext>
+            </a:extLst>
+          </p:cNvPr>
           <p:cNvPicPr>
             <a:picLocks noChangeAspect="1"/>
           </p:cNvPicPr>
@@ -14899,7 +15859,7 @@
         <a:graphic>
           <a:graphicData uri="http://schemas.openxmlformats.org/drawingml/2006/table">
             <a:tbl>
-              <a:tblPr/>
+              <a:tblPr firstRow="1" bandRow="1"/>
               <a:tblGrid>
                 <a:gridCol w="3566160"/>
                 <a:gridCol w="4206240"/>
@@ -16014,7 +16974,13 @@
       </p:graphicFrame>
       <p:sp>
         <p:nvSpPr>
-          <p:cNvPr id="4" name="Why card"/>
+          <p:cNvPr id="4" name="Why card" descr="">
+            <a:extLst>
+              <a:ext uri="{C183D7F6-B498-43B3-948B-1728B52AA6E4}">
+                <adec:decorative xmlns:adec="http://schemas.microsoft.com/office/drawing/2017/decorative" val="1"/>
+              </a:ext>
+            </a:extLst>
+          </p:cNvPr>
           <p:cNvSpPr/>
           <p:nvPr/>
         </p:nvSpPr>
@@ -16048,7 +17014,13 @@
       </p:sp>
       <p:sp>
         <p:nvSpPr>
-          <p:cNvPr id="5" name="Icon FaBook"/>
+          <p:cNvPr id="5" name="Icon FaBook" descr="">
+            <a:extLst>
+              <a:ext uri="{C183D7F6-B498-43B3-948B-1728B52AA6E4}">
+                <adec:decorative xmlns:adec="http://schemas.microsoft.com/office/drawing/2017/decorative" val="1"/>
+              </a:ext>
+            </a:extLst>
+          </p:cNvPr>
           <p:cNvSpPr/>
           <p:nvPr/>
         </p:nvSpPr>
@@ -16073,7 +17045,13 @@
       </p:sp>
       <p:pic>
         <p:nvPicPr>
-          <p:cNvPr id="6" name="Image 0" descr="C:\Users\whale\git\uiao\inbox\SSA-Interview\build\icons\FaBook.png">    </p:cNvPr>
+          <p:cNvPr id="6" name="Image 0" descr="">
+            <a:extLst>
+              <a:ext uri="{C183D7F6-B498-43B3-948B-1728B52AA6E4}">
+                <adec:decorative xmlns:adec="http://schemas.microsoft.com/office/drawing/2017/decorative" val="1"/>
+              </a:ext>
+            </a:extLst>
+          </p:cNvPr>
           <p:cNvPicPr>
             <a:picLocks noChangeAspect="1"/>
           </p:cNvPicPr>
@@ -16172,7 +17150,13 @@
       </p:sp>
       <p:sp>
         <p:nvSpPr>
-          <p:cNvPr id="9" name="CWK card"/>
+          <p:cNvPr id="9" name="CWK card" descr="">
+            <a:extLst>
+              <a:ext uri="{C183D7F6-B498-43B3-948B-1728B52AA6E4}">
+                <adec:decorative xmlns:adec="http://schemas.microsoft.com/office/drawing/2017/decorative" val="1"/>
+              </a:ext>
+            </a:extLst>
+          </p:cNvPr>
           <p:cNvSpPr/>
           <p:nvPr/>
         </p:nvSpPr>
@@ -16206,7 +17190,13 @@
       </p:sp>
       <p:sp>
         <p:nvSpPr>
-          <p:cNvPr id="10" name="Icon FaPeopleArrows"/>
+          <p:cNvPr id="10" name="Icon FaPeopleArrows" descr="">
+            <a:extLst>
+              <a:ext uri="{C183D7F6-B498-43B3-948B-1728B52AA6E4}">
+                <adec:decorative xmlns:adec="http://schemas.microsoft.com/office/drawing/2017/decorative" val="1"/>
+              </a:ext>
+            </a:extLst>
+          </p:cNvPr>
           <p:cNvSpPr/>
           <p:nvPr/>
         </p:nvSpPr>
@@ -16231,7 +17221,13 @@
       </p:sp>
       <p:pic>
         <p:nvPicPr>
-          <p:cNvPr id="11" name="Image 1" descr="C:\Users\whale\git\uiao\inbox\SSA-Interview\build\icons\FaPeopleArrows.png">    </p:cNvPr>
+          <p:cNvPr id="11" name="Image 1" descr="">
+            <a:extLst>
+              <a:ext uri="{C183D7F6-B498-43B3-948B-1728B52AA6E4}">
+                <adec:decorative xmlns:adec="http://schemas.microsoft.com/office/drawing/2017/decorative" val="1"/>
+              </a:ext>
+            </a:extLst>
+          </p:cNvPr>
           <p:cNvPicPr>
             <a:picLocks noChangeAspect="1"/>
           </p:cNvPicPr>
@@ -16507,7 +17503,7 @@
         <a:graphic>
           <a:graphicData uri="http://schemas.openxmlformats.org/drawingml/2006/table">
             <a:tbl>
-              <a:tblPr/>
+              <a:tblPr firstRow="1" bandRow="1"/>
               <a:tblGrid>
                 <a:gridCol w="2743200"/>
                 <a:gridCol w="1600200"/>
@@ -18438,7 +19434,13 @@
       </p:graphicFrame>
       <p:sp>
         <p:nvSpPr>
-          <p:cNvPr id="4" name="NOA rule 1"/>
+          <p:cNvPr id="4" name="NOA rule 1" descr="">
+            <a:extLst>
+              <a:ext uri="{C183D7F6-B498-43B3-948B-1728B52AA6E4}">
+                <adec:decorative xmlns:adec="http://schemas.microsoft.com/office/drawing/2017/decorative" val="1"/>
+              </a:ext>
+            </a:extLst>
+          </p:cNvPr>
           <p:cNvSpPr/>
           <p:nvPr/>
         </p:nvSpPr>
@@ -18472,7 +19474,13 @@
       </p:sp>
       <p:sp>
         <p:nvSpPr>
-          <p:cNvPr id="5" name="Icon FaUserClock"/>
+          <p:cNvPr id="5" name="Icon FaUserClock" descr="">
+            <a:extLst>
+              <a:ext uri="{C183D7F6-B498-43B3-948B-1728B52AA6E4}">
+                <adec:decorative xmlns:adec="http://schemas.microsoft.com/office/drawing/2017/decorative" val="1"/>
+              </a:ext>
+            </a:extLst>
+          </p:cNvPr>
           <p:cNvSpPr/>
           <p:nvPr/>
         </p:nvSpPr>
@@ -18497,7 +19505,13 @@
       </p:sp>
       <p:pic>
         <p:nvPicPr>
-          <p:cNvPr id="6" name="Image 0" descr="C:\Users\whale\git\uiao\inbox\SSA-Interview\build\icons\FaUserClock.png">    </p:cNvPr>
+          <p:cNvPr id="6" name="Image 0" descr="">
+            <a:extLst>
+              <a:ext uri="{C183D7F6-B498-43B3-948B-1728B52AA6E4}">
+                <adec:decorative xmlns:adec="http://schemas.microsoft.com/office/drawing/2017/decorative" val="1"/>
+              </a:ext>
+            </a:extLst>
+          </p:cNvPr>
           <p:cNvPicPr>
             <a:picLocks noChangeAspect="1"/>
           </p:cNvPicPr>
@@ -18568,7 +19582,13 @@
       </p:sp>
       <p:sp>
         <p:nvSpPr>
-          <p:cNvPr id="8" name="NOA rule 2"/>
+          <p:cNvPr id="8" name="NOA rule 2" descr="">
+            <a:extLst>
+              <a:ext uri="{C183D7F6-B498-43B3-948B-1728B52AA6E4}">
+                <adec:decorative xmlns:adec="http://schemas.microsoft.com/office/drawing/2017/decorative" val="1"/>
+              </a:ext>
+            </a:extLst>
+          </p:cNvPr>
           <p:cNvSpPr/>
           <p:nvPr/>
         </p:nvSpPr>
@@ -18602,7 +19622,13 @@
       </p:sp>
       <p:sp>
         <p:nvSpPr>
-          <p:cNvPr id="9" name="Icon FaArrowDownWideShort"/>
+          <p:cNvPr id="9" name="Icon FaArrowDownWideShort" descr="">
+            <a:extLst>
+              <a:ext uri="{C183D7F6-B498-43B3-948B-1728B52AA6E4}">
+                <adec:decorative xmlns:adec="http://schemas.microsoft.com/office/drawing/2017/decorative" val="1"/>
+              </a:ext>
+            </a:extLst>
+          </p:cNvPr>
           <p:cNvSpPr/>
           <p:nvPr/>
         </p:nvSpPr>
@@ -18627,7 +19653,13 @@
       </p:sp>
       <p:pic>
         <p:nvPicPr>
-          <p:cNvPr id="10" name="Image 1" descr="C:\Users\whale\git\uiao\inbox\SSA-Interview\build\icons\FaArrowDownWideShort.png">    </p:cNvPr>
+          <p:cNvPr id="10" name="Image 1" descr="">
+            <a:extLst>
+              <a:ext uri="{C183D7F6-B498-43B3-948B-1728B52AA6E4}">
+                <adec:decorative xmlns:adec="http://schemas.microsoft.com/office/drawing/2017/decorative" val="1"/>
+              </a:ext>
+            </a:extLst>
+          </p:cNvPr>
           <p:cNvPicPr>
             <a:picLocks noChangeAspect="1"/>
           </p:cNvPicPr>
@@ -18698,7 +19730,13 @@
       </p:sp>
       <p:sp>
         <p:nvSpPr>
-          <p:cNvPr id="12" name="NOA rule 3"/>
+          <p:cNvPr id="12" name="NOA rule 3" descr="">
+            <a:extLst>
+              <a:ext uri="{C183D7F6-B498-43B3-948B-1728B52AA6E4}">
+                <adec:decorative xmlns:adec="http://schemas.microsoft.com/office/drawing/2017/decorative" val="1"/>
+              </a:ext>
+            </a:extLst>
+          </p:cNvPr>
           <p:cNvSpPr/>
           <p:nvPr/>
         </p:nvSpPr>
@@ -18732,7 +19770,13 @@
       </p:sp>
       <p:sp>
         <p:nvSpPr>
-          <p:cNvPr id="13" name="Icon FaUserXmark"/>
+          <p:cNvPr id="13" name="Icon FaUserXmark" descr="">
+            <a:extLst>
+              <a:ext uri="{C183D7F6-B498-43B3-948B-1728B52AA6E4}">
+                <adec:decorative xmlns:adec="http://schemas.microsoft.com/office/drawing/2017/decorative" val="1"/>
+              </a:ext>
+            </a:extLst>
+          </p:cNvPr>
           <p:cNvSpPr/>
           <p:nvPr/>
         </p:nvSpPr>
@@ -18757,7 +19801,13 @@
       </p:sp>
       <p:pic>
         <p:nvPicPr>
-          <p:cNvPr id="14" name="Image 2" descr="C:\Users\whale\git\uiao\inbox\SSA-Interview\build\icons\FaUserXmark.png">    </p:cNvPr>
+          <p:cNvPr id="14" name="Image 2" descr="">
+            <a:extLst>
+              <a:ext uri="{C183D7F6-B498-43B3-948B-1728B52AA6E4}">
+                <adec:decorative xmlns:adec="http://schemas.microsoft.com/office/drawing/2017/decorative" val="1"/>
+              </a:ext>
+            </a:extLst>
+          </p:cNvPr>
           <p:cNvPicPr>
             <a:picLocks noChangeAspect="1"/>
           </p:cNvPicPr>
@@ -18958,7 +20008,7 @@
         <a:graphic>
           <a:graphicData uri="http://schemas.openxmlformats.org/drawingml/2006/table">
             <a:tbl>
-              <a:tblPr/>
+              <a:tblPr firstRow="1" bandRow="1"/>
               <a:tblGrid>
                 <a:gridCol w="1965960"/>
                 <a:gridCol w="2377440"/>
@@ -20615,7 +21665,13 @@
       </p:graphicFrame>
       <p:sp>
         <p:nvSpPr>
-          <p:cNvPr id="4" name="EDA card"/>
+          <p:cNvPr id="4" name="EDA card" descr="">
+            <a:extLst>
+              <a:ext uri="{C183D7F6-B498-43B3-948B-1728B52AA6E4}">
+                <adec:decorative xmlns:adec="http://schemas.microsoft.com/office/drawing/2017/decorative" val="1"/>
+              </a:ext>
+            </a:extLst>
+          </p:cNvPr>
           <p:cNvSpPr/>
           <p:nvPr/>
         </p:nvSpPr>
@@ -20649,7 +21705,13 @@
       </p:sp>
       <p:sp>
         <p:nvSpPr>
-          <p:cNvPr id="5" name="Icon FaSitemap"/>
+          <p:cNvPr id="5" name="Icon FaSitemap" descr="">
+            <a:extLst>
+              <a:ext uri="{C183D7F6-B498-43B3-948B-1728B52AA6E4}">
+                <adec:decorative xmlns:adec="http://schemas.microsoft.com/office/drawing/2017/decorative" val="1"/>
+              </a:ext>
+            </a:extLst>
+          </p:cNvPr>
           <p:cNvSpPr/>
           <p:nvPr/>
         </p:nvSpPr>
@@ -20674,7 +21736,13 @@
       </p:sp>
       <p:pic>
         <p:nvPicPr>
-          <p:cNvPr id="6" name="Image 0" descr="C:\Users\whale\git\uiao\inbox\SSA-Interview\build\icons\FaSitemap.png">    </p:cNvPr>
+          <p:cNvPr id="6" name="Image 0" descr="">
+            <a:extLst>
+              <a:ext uri="{C183D7F6-B498-43B3-948B-1728B52AA6E4}">
+                <adec:decorative xmlns:adec="http://schemas.microsoft.com/office/drawing/2017/decorative" val="1"/>
+              </a:ext>
+            </a:extLst>
+          </p:cNvPr>
           <p:cNvPicPr>
             <a:picLocks noChangeAspect="1"/>
           </p:cNvPicPr>
@@ -20831,7 +21899,13 @@
       </p:sp>
       <p:sp>
         <p:nvSpPr>
-          <p:cNvPr id="9" name="Decision"/>
+          <p:cNvPr id="9" name="Decision" descr="">
+            <a:extLst>
+              <a:ext uri="{C183D7F6-B498-43B3-948B-1728B52AA6E4}">
+                <adec:decorative xmlns:adec="http://schemas.microsoft.com/office/drawing/2017/decorative" val="1"/>
+              </a:ext>
+            </a:extLst>
+          </p:cNvPr>
           <p:cNvSpPr/>
           <p:nvPr/>
         </p:nvSpPr>
@@ -21078,7 +22152,7 @@
         <a:graphic>
           <a:graphicData uri="http://schemas.openxmlformats.org/drawingml/2006/table">
             <a:tbl>
-              <a:tblPr/>
+              <a:tblPr firstRow="1" bandRow="1"/>
               <a:tblGrid>
                 <a:gridCol w="2057400"/>
                 <a:gridCol w="1828800"/>
@@ -23486,7 +24560,13 @@
       </p:graphicFrame>
       <p:sp>
         <p:nvSpPr>
-          <p:cNvPr id="5" name="Model rule 1"/>
+          <p:cNvPr id="5" name="Model rule 1" descr="">
+            <a:extLst>
+              <a:ext uri="{C183D7F6-B498-43B3-948B-1728B52AA6E4}">
+                <adec:decorative xmlns:adec="http://schemas.microsoft.com/office/drawing/2017/decorative" val="1"/>
+              </a:ext>
+            </a:extLst>
+          </p:cNvPr>
           <p:cNvSpPr/>
           <p:nvPr/>
         </p:nvSpPr>
@@ -23520,7 +24600,13 @@
       </p:sp>
       <p:sp>
         <p:nvSpPr>
-          <p:cNvPr id="6" name="Icon FaCubes"/>
+          <p:cNvPr id="6" name="Icon FaCubes" descr="">
+            <a:extLst>
+              <a:ext uri="{C183D7F6-B498-43B3-948B-1728B52AA6E4}">
+                <adec:decorative xmlns:adec="http://schemas.microsoft.com/office/drawing/2017/decorative" val="1"/>
+              </a:ext>
+            </a:extLst>
+          </p:cNvPr>
           <p:cNvSpPr/>
           <p:nvPr/>
         </p:nvSpPr>
@@ -23545,7 +24631,13 @@
       </p:sp>
       <p:pic>
         <p:nvPicPr>
-          <p:cNvPr id="7" name="Image 0" descr="C:\Users\whale\git\uiao\inbox\SSA-Interview\build\icons\FaCubes.png">    </p:cNvPr>
+          <p:cNvPr id="7" name="Image 0" descr="">
+            <a:extLst>
+              <a:ext uri="{C183D7F6-B498-43B3-948B-1728B52AA6E4}">
+                <adec:decorative xmlns:adec="http://schemas.microsoft.com/office/drawing/2017/decorative" val="1"/>
+              </a:ext>
+            </a:extLst>
+          </p:cNvPr>
           <p:cNvPicPr>
             <a:picLocks noChangeAspect="1"/>
           </p:cNvPicPr>
@@ -23619,7 +24711,13 @@
       </p:sp>
       <p:sp>
         <p:nvSpPr>
-          <p:cNvPr id="9" name="Model rule 2"/>
+          <p:cNvPr id="9" name="Model rule 2" descr="">
+            <a:extLst>
+              <a:ext uri="{C183D7F6-B498-43B3-948B-1728B52AA6E4}">
+                <adec:decorative xmlns:adec="http://schemas.microsoft.com/office/drawing/2017/decorative" val="1"/>
+              </a:ext>
+            </a:extLst>
+          </p:cNvPr>
           <p:cNvSpPr/>
           <p:nvPr/>
         </p:nvSpPr>
@@ -23653,7 +24751,13 @@
       </p:sp>
       <p:sp>
         <p:nvSpPr>
-          <p:cNvPr id="10" name="Icon FaHashtag"/>
+          <p:cNvPr id="10" name="Icon FaHashtag" descr="">
+            <a:extLst>
+              <a:ext uri="{C183D7F6-B498-43B3-948B-1728B52AA6E4}">
+                <adec:decorative xmlns:adec="http://schemas.microsoft.com/office/drawing/2017/decorative" val="1"/>
+              </a:ext>
+            </a:extLst>
+          </p:cNvPr>
           <p:cNvSpPr/>
           <p:nvPr/>
         </p:nvSpPr>
@@ -23678,7 +24782,13 @@
       </p:sp>
       <p:pic>
         <p:nvPicPr>
-          <p:cNvPr id="11" name="Image 1" descr="C:\Users\whale\git\uiao\inbox\SSA-Interview\build\icons\FaHashtag.png">    </p:cNvPr>
+          <p:cNvPr id="11" name="Image 1" descr="">
+            <a:extLst>
+              <a:ext uri="{C183D7F6-B498-43B3-948B-1728B52AA6E4}">
+                <adec:decorative xmlns:adec="http://schemas.microsoft.com/office/drawing/2017/decorative" val="1"/>
+              </a:ext>
+            </a:extLst>
+          </p:cNvPr>
           <p:cNvPicPr>
             <a:picLocks noChangeAspect="1"/>
           </p:cNvPicPr>
@@ -23752,7 +24862,13 @@
       </p:sp>
       <p:sp>
         <p:nvSpPr>
-          <p:cNvPr id="13" name="Model rule 3"/>
+          <p:cNvPr id="13" name="Model rule 3" descr="">
+            <a:extLst>
+              <a:ext uri="{C183D7F6-B498-43B3-948B-1728B52AA6E4}">
+                <adec:decorative xmlns:adec="http://schemas.microsoft.com/office/drawing/2017/decorative" val="1"/>
+              </a:ext>
+            </a:extLst>
+          </p:cNvPr>
           <p:cNvSpPr/>
           <p:nvPr/>
         </p:nvSpPr>
@@ -23786,7 +24902,13 @@
       </p:sp>
       <p:sp>
         <p:nvSpPr>
-          <p:cNvPr id="14" name="Icon FaTableList"/>
+          <p:cNvPr id="14" name="Icon FaTableList" descr="">
+            <a:extLst>
+              <a:ext uri="{C183D7F6-B498-43B3-948B-1728B52AA6E4}">
+                <adec:decorative xmlns:adec="http://schemas.microsoft.com/office/drawing/2017/decorative" val="1"/>
+              </a:ext>
+            </a:extLst>
+          </p:cNvPr>
           <p:cNvSpPr/>
           <p:nvPr/>
         </p:nvSpPr>
@@ -23811,7 +24933,13 @@
       </p:sp>
       <p:pic>
         <p:nvPicPr>
-          <p:cNvPr id="15" name="Image 2" descr="C:\Users\whale\git\uiao\inbox\SSA-Interview\build\icons\FaTableList.png">    </p:cNvPr>
+          <p:cNvPr id="15" name="Image 2" descr="">
+            <a:extLst>
+              <a:ext uri="{C183D7F6-B498-43B3-948B-1728B52AA6E4}">
+                <adec:decorative xmlns:adec="http://schemas.microsoft.com/office/drawing/2017/decorative" val="1"/>
+              </a:ext>
+            </a:extLst>
+          </p:cNvPr>
           <p:cNvPicPr>
             <a:picLocks noChangeAspect="1"/>
           </p:cNvPicPr>
